--- a/media/exports/reports/2026-01/cost-to-raise.pptx
+++ b/media/exports/reports/2026-01/cost-to-raise.pptx
@@ -260,7 +260,9 @@
     <a:lstStyle/>
     <a:p>
       <a:pPr>
-        <a:defRPr sz="1800"/>
+        <a:defRPr sz="1800">
+          <a:latin typeface="Roboto"/>
+        </a:defRPr>
       </a:pPr>
       <a:endParaRPr lang="en-US"/>
     </a:p>
@@ -508,7 +510,9 @@
     <a:lstStyle/>
     <a:p>
       <a:pPr>
-        <a:defRPr sz="1800"/>
+        <a:defRPr sz="1800">
+          <a:latin typeface="Roboto"/>
+        </a:defRPr>
       </a:pPr>
       <a:endParaRPr/>
     </a:p>
@@ -3539,11 +3543,17 @@
           <a:bodyPr rtlCol="0" anchor="ctr"/>
           <a:lstStyle/>
           <a:p>
+            <a:pPr>
+              <a:defRPr>
+                <a:latin typeface="Roboto"/>
+              </a:defRPr>
+            </a:pPr>
             <a:r>
               <a:rPr sz="1600" b="1">
                 <a:solidFill>
                   <a:srgbClr val="FFFFFF"/>
                 </a:solidFill>
+                <a:latin typeface="Roboto"/>
               </a:rPr>
               <a:t>4th</a:t>
             </a:r>
@@ -3572,14 +3582,19 @@
           </a:bodyPr>
           <a:lstStyle/>
           <a:p>
+            <a:pPr>
+              <a:defRPr>
+                <a:latin typeface="Roboto"/>
+              </a:defRPr>
+            </a:pPr>
             <a:r>
               <a:rPr sz="1800" b="1">
                 <a:solidFill>
                   <a:srgbClr val="25342A"/>
                 </a:solidFill>
-                <a:latin typeface="Arial"/>
-              </a:rPr>
-              <a:t>The 4th Sheet</a:t>
+                <a:latin typeface="Roboto"/>
+              </a:rPr>
+              <a:t>The Fourth Sheet</a:t>
             </a:r>
           </a:p>
         </p:txBody>
@@ -3606,12 +3621,17 @@
           </a:bodyPr>
           <a:lstStyle/>
           <a:p>
+            <a:pPr>
+              <a:defRPr>
+                <a:latin typeface="Roboto"/>
+              </a:defRPr>
+            </a:pPr>
             <a:r>
               <a:rPr sz="1100" b="1">
                 <a:solidFill>
                   <a:srgbClr val="8A7A52"/>
                 </a:solidFill>
-                <a:latin typeface="Arial"/>
+                <a:latin typeface="Roboto"/>
               </a:rPr>
               <a:t>SAMPLE DATA · invented figures for demonstration</a:t>
             </a:r>
@@ -3640,12 +3660,17 @@
           </a:bodyPr>
           <a:lstStyle/>
           <a:p>
+            <a:pPr>
+              <a:defRPr>
+                <a:latin typeface="Roboto"/>
+              </a:defRPr>
+            </a:pPr>
             <a:r>
               <a:rPr sz="3400" b="1">
                 <a:solidFill>
                   <a:srgbClr val="25342A"/>
                 </a:solidFill>
-                <a:latin typeface="Arial"/>
+                <a:latin typeface="Roboto"/>
               </a:rPr>
               <a:t>What does it cost to raise a dollar?</a:t>
             </a:r>
@@ -3674,12 +3699,17 @@
           </a:bodyPr>
           <a:lstStyle/>
           <a:p>
+            <a:pPr>
+              <a:defRPr>
+                <a:latin typeface="Roboto"/>
+              </a:defRPr>
+            </a:pPr>
             <a:r>
               <a:rPr sz="1600" b="0">
                 <a:solidFill>
                   <a:srgbClr val="5F6F63"/>
                 </a:solidFill>
-                <a:latin typeface="Arial"/>
+                <a:latin typeface="Roboto"/>
               </a:rPr>
               <a:t>Sample Community Services Ltd</a:t>
             </a:r>
@@ -3708,12 +3738,17 @@
           </a:bodyPr>
           <a:lstStyle/>
           <a:p>
+            <a:pPr>
+              <a:defRPr>
+                <a:latin typeface="Roboto"/>
+              </a:defRPr>
+            </a:pPr>
             <a:r>
               <a:rPr sz="1400" b="0">
                 <a:solidFill>
                   <a:srgbClr val="25342A"/>
                 </a:solidFill>
-                <a:latin typeface="Arial"/>
+                <a:latin typeface="Roboto"/>
               </a:rPr>
               <a:t>Period: January 2026. What fundraising costs (grant writing, donor campaigns, events) for every dollar it brings in. Pick a source and every number, chart and note follows it.</a:t>
             </a:r>
@@ -3742,45 +3777,65 @@
           </a:bodyPr>
           <a:lstStyle/>
           <a:p>
+            <a:pPr>
+              <a:defRPr>
+                <a:latin typeface="Roboto"/>
+              </a:defRPr>
+            </a:pPr>
             <a:r>
               <a:rPr sz="1100" b="0">
                 <a:solidFill>
                   <a:srgbClr val="5F6F63"/>
                 </a:solidFill>
-                <a:latin typeface="Arial"/>
+                <a:latin typeface="Roboto"/>
               </a:rPr>
               <a:t>How final is this data?</a:t>
             </a:r>
           </a:p>
           <a:p>
+            <a:pPr>
+              <a:defRPr>
+                <a:latin typeface="Roboto"/>
+              </a:defRPr>
+            </a:pPr>
             <a:r>
               <a:rPr sz="1100" b="0">
                 <a:solidFill>
                   <a:srgbClr val="5F6F63"/>
                 </a:solidFill>
-                <a:latin typeface="Arial"/>
+                <a:latin typeface="Roboto"/>
               </a:rPr>
               <a:t>December 2025: Locked. December 2025 is locked (closed 5 Jan 2026). These numbers won't change.</a:t>
             </a:r>
           </a:p>
           <a:p>
+            <a:pPr>
+              <a:defRPr>
+                <a:latin typeface="Roboto"/>
+              </a:defRPr>
+            </a:pPr>
             <a:r>
               <a:rPr sz="1100" b="0">
                 <a:solidFill>
                   <a:srgbClr val="5F6F63"/>
                 </a:solidFill>
-                <a:latin typeface="Arial"/>
+                <a:latin typeface="Roboto"/>
               </a:rPr>
               <a:t>January 2026: Locked. January 2026 is locked (closed 3 Feb 2026). These numbers won't change.</a:t>
             </a:r>
           </a:p>
           <a:p>
+            <a:pPr>
+              <a:defRPr>
+                <a:latin typeface="Roboto"/>
+              </a:defRPr>
+            </a:pPr>
             <a:r>
               <a:rPr sz="1100" b="0">
                 <a:solidFill>
                   <a:srgbClr val="5F6F63"/>
                 </a:solidFill>
-                <a:latin typeface="Arial"/>
+                <a:latin typeface="Roboto"/>
               </a:rPr>
               <a:t>October 2026: Incomplete. October 2026 is still in progress: figures to 6 Oct only.</a:t>
             </a:r>
@@ -3809,12 +3864,17 @@
           </a:bodyPr>
           <a:lstStyle/>
           <a:p>
+            <a:pPr>
+              <a:defRPr>
+                <a:latin typeface="Roboto"/>
+              </a:defRPr>
+            </a:pPr>
             <a:r>
               <a:rPr sz="900" b="0">
                 <a:solidFill>
                   <a:srgbClr val="5F6F63"/>
                 </a:solidFill>
-                <a:latin typeface="Arial"/>
+                <a:latin typeface="Roboto"/>
               </a:rPr>
               <a:t>cost-to-raise.pptx</a:t>
             </a:r>
@@ -3843,13 +3903,17 @@
           </a:bodyPr>
           <a:lstStyle/>
           <a:p>
-            <a:pPr algn="ctr"/>
+            <a:pPr algn="ctr">
+              <a:defRPr>
+                <a:latin typeface="Roboto"/>
+              </a:defRPr>
+            </a:pPr>
             <a:r>
               <a:rPr sz="900" b="0">
                 <a:solidFill>
                   <a:srgbClr val="5F6F63"/>
                 </a:solidFill>
-                <a:latin typeface="Arial"/>
+                <a:latin typeface="Roboto"/>
               </a:rPr>
               <a:t>Data retrieved 2pm, Tue 6 Oct 2026 · Sample data</a:t>
             </a:r>
@@ -3878,13 +3942,17 @@
           </a:bodyPr>
           <a:lstStyle/>
           <a:p>
-            <a:pPr algn="r"/>
+            <a:pPr algn="r">
+              <a:defRPr>
+                <a:latin typeface="Roboto"/>
+              </a:defRPr>
+            </a:pPr>
             <a:r>
               <a:rPr sz="900" b="0">
                 <a:solidFill>
                   <a:srgbClr val="5F6F63"/>
                 </a:solidFill>
-                <a:latin typeface="Arial"/>
+                <a:latin typeface="Roboto"/>
               </a:rPr>
               <a:t>Slide 1 of 11</a:t>
             </a:r>
@@ -3948,7 +4016,11 @@
           <a:bodyPr rtlCol="0" anchor="ctr"/>
           <a:lstStyle/>
           <a:p>
-            <a:pPr algn="ctr"/>
+            <a:pPr algn="ctr">
+              <a:defRPr>
+                <a:latin typeface="Roboto"/>
+              </a:defRPr>
+            </a:pPr>
           </a:p>
         </p:txBody>
       </p:sp>
@@ -3974,12 +4046,17 @@
           </a:bodyPr>
           <a:lstStyle/>
           <a:p>
+            <a:pPr>
+              <a:defRPr>
+                <a:latin typeface="Roboto"/>
+              </a:defRPr>
+            </a:pPr>
             <a:r>
               <a:rPr sz="1000" b="0">
                 <a:solidFill>
                   <a:srgbClr val="5F6F63"/>
                 </a:solidFill>
-                <a:latin typeface="Arial"/>
+                <a:latin typeface="Roboto"/>
               </a:rPr>
               <a:t>Sample Community Services Ltd · What does it cost to raise a dollar?</a:t>
             </a:r>
@@ -4008,12 +4085,17 @@
           </a:bodyPr>
           <a:lstStyle/>
           <a:p>
+            <a:pPr>
+              <a:defRPr>
+                <a:latin typeface="Roboto"/>
+              </a:defRPr>
+            </a:pPr>
             <a:r>
               <a:rPr sz="2400" b="1">
                 <a:solidFill>
                   <a:srgbClr val="25342A"/>
                 </a:solidFill>
-                <a:latin typeface="Arial"/>
+                <a:latin typeface="Roboto"/>
               </a:rPr>
               <a:t>What it shows · Source: Fundraising events</a:t>
             </a:r>
@@ -4061,7 +4143,11 @@
           <a:bodyPr rtlCol="0" anchor="ctr"/>
           <a:lstStyle/>
           <a:p>
-            <a:pPr algn="ctr"/>
+            <a:pPr algn="ctr">
+              <a:defRPr>
+                <a:latin typeface="Roboto"/>
+              </a:defRPr>
+            </a:pPr>
           </a:p>
         </p:txBody>
       </p:sp>
@@ -4087,12 +4173,17 @@
           </a:bodyPr>
           <a:lstStyle/>
           <a:p>
+            <a:pPr>
+              <a:defRPr>
+                <a:latin typeface="Roboto"/>
+              </a:defRPr>
+            </a:pPr>
             <a:r>
               <a:rPr sz="1100" b="1">
                 <a:solidFill>
                   <a:srgbClr val="5F6F63"/>
                 </a:solidFill>
-                <a:latin typeface="Arial"/>
+                <a:latin typeface="Roboto"/>
               </a:rPr>
               <a:t>WHAT IT SHOWS</a:t>
             </a:r>
@@ -4121,12 +4212,17 @@
           </a:bodyPr>
           <a:lstStyle/>
           <a:p>
+            <a:pPr>
+              <a:defRPr>
+                <a:latin typeface="Roboto"/>
+              </a:defRPr>
+            </a:pPr>
             <a:r>
               <a:rPr sz="1600" b="0">
                 <a:solidFill>
                   <a:srgbClr val="25342A"/>
                 </a:solidFill>
-                <a:latin typeface="Arial"/>
+                <a:latin typeface="Roboto"/>
               </a:rPr>
               <a:t>Fundraising events cost 41¢ to raise each dollar this financial year to date ($17,800 of event costs for $43,000).</a:t>
             </a:r>
@@ -4174,7 +4270,11 @@
           <a:bodyPr rtlCol="0" anchor="ctr"/>
           <a:lstStyle/>
           <a:p>
-            <a:pPr algn="ctr"/>
+            <a:pPr algn="ctr">
+              <a:defRPr>
+                <a:latin typeface="Roboto"/>
+              </a:defRPr>
+            </a:pPr>
           </a:p>
         </p:txBody>
       </p:sp>
@@ -4200,12 +4300,17 @@
           </a:bodyPr>
           <a:lstStyle/>
           <a:p>
+            <a:pPr>
+              <a:defRPr>
+                <a:latin typeface="Roboto"/>
+              </a:defRPr>
+            </a:pPr>
             <a:r>
               <a:rPr sz="1100" b="1">
                 <a:solidFill>
                   <a:srgbClr val="5F6F63"/>
                 </a:solidFill>
-                <a:latin typeface="Arial"/>
+                <a:latin typeface="Roboto"/>
               </a:rPr>
               <a:t>WHAT YOU'D DO ABOUT IT</a:t>
             </a:r>
@@ -4234,12 +4339,17 @@
           </a:bodyPr>
           <a:lstStyle/>
           <a:p>
+            <a:pPr>
+              <a:defRPr>
+                <a:latin typeface="Roboto"/>
+              </a:defRPr>
+            </a:pPr>
             <a:r>
               <a:rPr sz="1600" b="0">
                 <a:solidFill>
                   <a:srgbClr val="25342A"/>
                 </a:solidFill>
-                <a:latin typeface="Arial"/>
+                <a:latin typeface="Roboto"/>
               </a:rPr>
               <a:t>Usually the dearest money to raise: events are worth counting for what else they bring too (new donors, profile).</a:t>
             </a:r>
@@ -4268,12 +4378,17 @@
           </a:bodyPr>
           <a:lstStyle/>
           <a:p>
+            <a:pPr>
+              <a:defRPr>
+                <a:latin typeface="Roboto"/>
+              </a:defRPr>
+            </a:pPr>
             <a:r>
               <a:rPr sz="900" b="0">
                 <a:solidFill>
                   <a:srgbClr val="5F6F63"/>
                 </a:solidFill>
-                <a:latin typeface="Arial"/>
+                <a:latin typeface="Roboto"/>
               </a:rPr>
               <a:t>cost-to-raise.pptx</a:t>
             </a:r>
@@ -4302,13 +4417,17 @@
           </a:bodyPr>
           <a:lstStyle/>
           <a:p>
-            <a:pPr algn="ctr"/>
+            <a:pPr algn="ctr">
+              <a:defRPr>
+                <a:latin typeface="Roboto"/>
+              </a:defRPr>
+            </a:pPr>
             <a:r>
               <a:rPr sz="900" b="0">
                 <a:solidFill>
                   <a:srgbClr val="5F6F63"/>
                 </a:solidFill>
-                <a:latin typeface="Arial"/>
+                <a:latin typeface="Roboto"/>
               </a:rPr>
               <a:t>Data retrieved 2pm, Tue 6 Oct 2026 · Sample data</a:t>
             </a:r>
@@ -4337,13 +4456,17 @@
           </a:bodyPr>
           <a:lstStyle/>
           <a:p>
-            <a:pPr algn="r"/>
+            <a:pPr algn="r">
+              <a:defRPr>
+                <a:latin typeface="Roboto"/>
+              </a:defRPr>
+            </a:pPr>
             <a:r>
               <a:rPr sz="900" b="0">
                 <a:solidFill>
                   <a:srgbClr val="5F6F63"/>
                 </a:solidFill>
-                <a:latin typeface="Arial"/>
+                <a:latin typeface="Roboto"/>
               </a:rPr>
               <a:t>Slide 10 of 11</a:t>
             </a:r>
@@ -4407,7 +4530,11 @@
           <a:bodyPr rtlCol="0" anchor="ctr"/>
           <a:lstStyle/>
           <a:p>
-            <a:pPr algn="ctr"/>
+            <a:pPr algn="ctr">
+              <a:defRPr>
+                <a:latin typeface="Roboto"/>
+              </a:defRPr>
+            </a:pPr>
           </a:p>
         </p:txBody>
       </p:sp>
@@ -4433,12 +4560,17 @@
           </a:bodyPr>
           <a:lstStyle/>
           <a:p>
+            <a:pPr>
+              <a:defRPr>
+                <a:latin typeface="Roboto"/>
+              </a:defRPr>
+            </a:pPr>
             <a:r>
               <a:rPr sz="1000" b="0">
                 <a:solidFill>
                   <a:srgbClr val="5F6F63"/>
                 </a:solidFill>
-                <a:latin typeface="Arial"/>
+                <a:latin typeface="Roboto"/>
               </a:rPr>
               <a:t>Sample Community Services Ltd · What does it cost to raise a dollar?</a:t>
             </a:r>
@@ -4467,12 +4599,17 @@
           </a:bodyPr>
           <a:lstStyle/>
           <a:p>
+            <a:pPr>
+              <a:defRPr>
+                <a:latin typeface="Roboto"/>
+              </a:defRPr>
+            </a:pPr>
             <a:r>
               <a:rPr sz="2400" b="1">
                 <a:solidFill>
                   <a:srgbClr val="25342A"/>
                 </a:solidFill>
-                <a:latin typeface="Arial"/>
+                <a:latin typeface="Roboto"/>
               </a:rPr>
               <a:t>Cost to raise a dollar, by month (cents) · Cents per $1 · Every source at once</a:t>
             </a:r>
@@ -4501,12 +4638,17 @@
           </a:bodyPr>
           <a:lstStyle/>
           <a:p>
+            <a:pPr>
+              <a:defRPr>
+                <a:latin typeface="Roboto"/>
+              </a:defRPr>
+            </a:pPr>
             <a:r>
               <a:rPr sz="1200" b="0">
                 <a:solidFill>
                   <a:srgbClr val="5F6F63"/>
                 </a:solidFill>
-                <a:latin typeface="Arial"/>
+                <a:latin typeface="Roboto"/>
               </a:rPr>
               <a:t>Months with an event (the gala, the Christmas appeal) jump. A gap means nothing was raised that month.</a:t>
             </a:r>
@@ -4553,12 +4695,17 @@
           </a:bodyPr>
           <a:lstStyle/>
           <a:p>
+            <a:pPr>
+              <a:defRPr>
+                <a:latin typeface="Roboto"/>
+              </a:defRPr>
+            </a:pPr>
             <a:r>
               <a:rPr sz="900" b="0">
                 <a:solidFill>
                   <a:srgbClr val="5F6F63"/>
                 </a:solidFill>
-                <a:latin typeface="Arial"/>
+                <a:latin typeface="Roboto"/>
               </a:rPr>
               <a:t>cost-to-raise.pptx</a:t>
             </a:r>
@@ -4587,13 +4734,17 @@
           </a:bodyPr>
           <a:lstStyle/>
           <a:p>
-            <a:pPr algn="ctr"/>
+            <a:pPr algn="ctr">
+              <a:defRPr>
+                <a:latin typeface="Roboto"/>
+              </a:defRPr>
+            </a:pPr>
             <a:r>
               <a:rPr sz="900" b="0">
                 <a:solidFill>
                   <a:srgbClr val="5F6F63"/>
                 </a:solidFill>
-                <a:latin typeface="Arial"/>
+                <a:latin typeface="Roboto"/>
               </a:rPr>
               <a:t>Data retrieved 2pm, Tue 6 Oct 2026 · Sample data</a:t>
             </a:r>
@@ -4622,13 +4773,17 @@
           </a:bodyPr>
           <a:lstStyle/>
           <a:p>
-            <a:pPr algn="r"/>
+            <a:pPr algn="r">
+              <a:defRPr>
+                <a:latin typeface="Roboto"/>
+              </a:defRPr>
+            </a:pPr>
             <a:r>
               <a:rPr sz="900" b="0">
                 <a:solidFill>
                   <a:srgbClr val="5F6F63"/>
                 </a:solidFill>
-                <a:latin typeface="Arial"/>
+                <a:latin typeface="Roboto"/>
               </a:rPr>
               <a:t>Slide 11 of 11</a:t>
             </a:r>
@@ -4692,7 +4847,11 @@
           <a:bodyPr rtlCol="0" anchor="ctr"/>
           <a:lstStyle/>
           <a:p>
-            <a:pPr algn="ctr"/>
+            <a:pPr algn="ctr">
+              <a:defRPr>
+                <a:latin typeface="Roboto"/>
+              </a:defRPr>
+            </a:pPr>
           </a:p>
         </p:txBody>
       </p:sp>
@@ -4718,12 +4877,17 @@
           </a:bodyPr>
           <a:lstStyle/>
           <a:p>
+            <a:pPr>
+              <a:defRPr>
+                <a:latin typeface="Roboto"/>
+              </a:defRPr>
+            </a:pPr>
             <a:r>
               <a:rPr sz="1000" b="0">
                 <a:solidFill>
                   <a:srgbClr val="5F6F63"/>
                 </a:solidFill>
-                <a:latin typeface="Arial"/>
+                <a:latin typeface="Roboto"/>
               </a:rPr>
               <a:t>Sample Community Services Ltd · What does it cost to raise a dollar?</a:t>
             </a:r>
@@ -4752,12 +4916,17 @@
           </a:bodyPr>
           <a:lstStyle/>
           <a:p>
+            <a:pPr>
+              <a:defRPr>
+                <a:latin typeface="Roboto"/>
+              </a:defRPr>
+            </a:pPr>
             <a:r>
               <a:rPr sz="2400" b="1">
                 <a:solidFill>
                   <a:srgbClr val="25342A"/>
                 </a:solidFill>
-                <a:latin typeface="Arial"/>
+                <a:latin typeface="Roboto"/>
               </a:rPr>
               <a:t>Headline numbers · Source: All fundraising</a:t>
             </a:r>
@@ -4805,7 +4974,11 @@
           <a:bodyPr rtlCol="0" anchor="ctr"/>
           <a:lstStyle/>
           <a:p>
-            <a:pPr algn="ctr"/>
+            <a:pPr algn="ctr">
+              <a:defRPr>
+                <a:latin typeface="Roboto"/>
+              </a:defRPr>
+            </a:pPr>
           </a:p>
         </p:txBody>
       </p:sp>
@@ -4831,12 +5004,17 @@
           </a:bodyPr>
           <a:lstStyle/>
           <a:p>
+            <a:pPr>
+              <a:defRPr>
+                <a:latin typeface="Roboto"/>
+              </a:defRPr>
+            </a:pPr>
             <a:r>
               <a:rPr sz="1200" b="0">
                 <a:solidFill>
                   <a:srgbClr val="5F6F63"/>
                 </a:solidFill>
-                <a:latin typeface="Arial"/>
+                <a:latin typeface="Roboto"/>
               </a:rPr>
               <a:t>January · all fundraising</a:t>
             </a:r>
@@ -4865,12 +5043,17 @@
           </a:bodyPr>
           <a:lstStyle/>
           <a:p>
+            <a:pPr>
+              <a:defRPr>
+                <a:latin typeface="Roboto"/>
+              </a:defRPr>
+            </a:pPr>
             <a:r>
               <a:rPr sz="3000" b="1">
                 <a:solidFill>
                   <a:srgbClr val="2F7A5D"/>
                 </a:solidFill>
-                <a:latin typeface="Arial"/>
+                <a:latin typeface="Roboto"/>
               </a:rPr>
               <a:t>13¢</a:t>
             </a:r>
@@ -4899,12 +5082,17 @@
           </a:bodyPr>
           <a:lstStyle/>
           <a:p>
+            <a:pPr>
+              <a:defRPr>
+                <a:latin typeface="Roboto"/>
+              </a:defRPr>
+            </a:pPr>
             <a:r>
               <a:rPr sz="1100" b="0">
                 <a:solidFill>
                   <a:srgbClr val="5F6F63"/>
                 </a:solidFill>
-                <a:latin typeface="Arial"/>
+                <a:latin typeface="Roboto"/>
               </a:rPr>
               <a:t>December 14¢</a:t>
             </a:r>
@@ -4952,7 +5140,11 @@
           <a:bodyPr rtlCol="0" anchor="ctr"/>
           <a:lstStyle/>
           <a:p>
-            <a:pPr algn="ctr"/>
+            <a:pPr algn="ctr">
+              <a:defRPr>
+                <a:latin typeface="Roboto"/>
+              </a:defRPr>
+            </a:pPr>
           </a:p>
         </p:txBody>
       </p:sp>
@@ -4978,12 +5170,17 @@
           </a:bodyPr>
           <a:lstStyle/>
           <a:p>
+            <a:pPr>
+              <a:defRPr>
+                <a:latin typeface="Roboto"/>
+              </a:defRPr>
+            </a:pPr>
             <a:r>
               <a:rPr sz="1200" b="0">
                 <a:solidFill>
                   <a:srgbClr val="5F6F63"/>
                 </a:solidFill>
-                <a:latin typeface="Arial"/>
+                <a:latin typeface="Roboto"/>
               </a:rPr>
               <a:t>Year to date (Jul to Jan 2026)</a:t>
             </a:r>
@@ -5012,12 +5209,17 @@
           </a:bodyPr>
           <a:lstStyle/>
           <a:p>
+            <a:pPr>
+              <a:defRPr>
+                <a:latin typeface="Roboto"/>
+              </a:defRPr>
+            </a:pPr>
             <a:r>
               <a:rPr sz="3000" b="1">
                 <a:solidFill>
                   <a:srgbClr val="2F7A5D"/>
                 </a:solidFill>
-                <a:latin typeface="Arial"/>
+                <a:latin typeface="Roboto"/>
               </a:rPr>
               <a:t>14¢</a:t>
             </a:r>
@@ -5046,12 +5248,17 @@
           </a:bodyPr>
           <a:lstStyle/>
           <a:p>
+            <a:pPr>
+              <a:defRPr>
+                <a:latin typeface="Roboto"/>
+              </a:defRPr>
+            </a:pPr>
             <a:r>
               <a:rPr sz="1100" b="0">
                 <a:solidFill>
                   <a:srgbClr val="5F6F63"/>
                 </a:solidFill>
-                <a:latin typeface="Arial"/>
+                <a:latin typeface="Roboto"/>
               </a:rPr>
               <a:t>same period last year: not in the data</a:t>
             </a:r>
@@ -5080,12 +5287,17 @@
           </a:bodyPr>
           <a:lstStyle/>
           <a:p>
+            <a:pPr>
+              <a:defRPr>
+                <a:latin typeface="Roboto"/>
+              </a:defRPr>
+            </a:pPr>
             <a:r>
               <a:rPr sz="900" b="0">
                 <a:solidFill>
                   <a:srgbClr val="5F6F63"/>
                 </a:solidFill>
-                <a:latin typeface="Arial"/>
+                <a:latin typeface="Roboto"/>
               </a:rPr>
               <a:t>cost-to-raise.pptx</a:t>
             </a:r>
@@ -5114,13 +5326,17 @@
           </a:bodyPr>
           <a:lstStyle/>
           <a:p>
-            <a:pPr algn="ctr"/>
+            <a:pPr algn="ctr">
+              <a:defRPr>
+                <a:latin typeface="Roboto"/>
+              </a:defRPr>
+            </a:pPr>
             <a:r>
               <a:rPr sz="900" b="0">
                 <a:solidFill>
                   <a:srgbClr val="5F6F63"/>
                 </a:solidFill>
-                <a:latin typeface="Arial"/>
+                <a:latin typeface="Roboto"/>
               </a:rPr>
               <a:t>Data retrieved 2pm, Tue 6 Oct 2026 · Sample data</a:t>
             </a:r>
@@ -5149,13 +5365,17 @@
           </a:bodyPr>
           <a:lstStyle/>
           <a:p>
-            <a:pPr algn="r"/>
+            <a:pPr algn="r">
+              <a:defRPr>
+                <a:latin typeface="Roboto"/>
+              </a:defRPr>
+            </a:pPr>
             <a:r>
               <a:rPr sz="900" b="0">
                 <a:solidFill>
                   <a:srgbClr val="5F6F63"/>
                 </a:solidFill>
-                <a:latin typeface="Arial"/>
+                <a:latin typeface="Roboto"/>
               </a:rPr>
               <a:t>Slide 2 of 11</a:t>
             </a:r>
@@ -5219,7 +5439,11 @@
           <a:bodyPr rtlCol="0" anchor="ctr"/>
           <a:lstStyle/>
           <a:p>
-            <a:pPr algn="ctr"/>
+            <a:pPr algn="ctr">
+              <a:defRPr>
+                <a:latin typeface="Roboto"/>
+              </a:defRPr>
+            </a:pPr>
           </a:p>
         </p:txBody>
       </p:sp>
@@ -5245,12 +5469,17 @@
           </a:bodyPr>
           <a:lstStyle/>
           <a:p>
+            <a:pPr>
+              <a:defRPr>
+                <a:latin typeface="Roboto"/>
+              </a:defRPr>
+            </a:pPr>
             <a:r>
               <a:rPr sz="1000" b="0">
                 <a:solidFill>
                   <a:srgbClr val="5F6F63"/>
                 </a:solidFill>
-                <a:latin typeface="Arial"/>
+                <a:latin typeface="Roboto"/>
               </a:rPr>
               <a:t>Sample Community Services Ltd · What does it cost to raise a dollar?</a:t>
             </a:r>
@@ -5279,12 +5508,17 @@
           </a:bodyPr>
           <a:lstStyle/>
           <a:p>
+            <a:pPr>
+              <a:defRPr>
+                <a:latin typeface="Roboto"/>
+              </a:defRPr>
+            </a:pPr>
             <a:r>
               <a:rPr sz="2400" b="1">
                 <a:solidFill>
                   <a:srgbClr val="25342A"/>
                 </a:solidFill>
-                <a:latin typeface="Arial"/>
+                <a:latin typeface="Roboto"/>
               </a:rPr>
               <a:t>Cost to raise a dollar, by source, January 2026 (cents) · Source: All fundraising</a:t>
             </a:r>
@@ -5331,12 +5565,17 @@
           </a:bodyPr>
           <a:lstStyle/>
           <a:p>
+            <a:pPr>
+              <a:defRPr>
+                <a:latin typeface="Roboto"/>
+              </a:defRPr>
+            </a:pPr>
             <a:r>
               <a:rPr sz="900" b="0">
                 <a:solidFill>
                   <a:srgbClr val="5F6F63"/>
                 </a:solidFill>
-                <a:latin typeface="Arial"/>
+                <a:latin typeface="Roboto"/>
               </a:rPr>
               <a:t>cost-to-raise.pptx</a:t>
             </a:r>
@@ -5365,13 +5604,17 @@
           </a:bodyPr>
           <a:lstStyle/>
           <a:p>
-            <a:pPr algn="ctr"/>
+            <a:pPr algn="ctr">
+              <a:defRPr>
+                <a:latin typeface="Roboto"/>
+              </a:defRPr>
+            </a:pPr>
             <a:r>
               <a:rPr sz="900" b="0">
                 <a:solidFill>
                   <a:srgbClr val="5F6F63"/>
                 </a:solidFill>
-                <a:latin typeface="Arial"/>
+                <a:latin typeface="Roboto"/>
               </a:rPr>
               <a:t>Data retrieved 2pm, Tue 6 Oct 2026 · Sample data</a:t>
             </a:r>
@@ -5400,13 +5643,17 @@
           </a:bodyPr>
           <a:lstStyle/>
           <a:p>
-            <a:pPr algn="r"/>
+            <a:pPr algn="r">
+              <a:defRPr>
+                <a:latin typeface="Roboto"/>
+              </a:defRPr>
+            </a:pPr>
             <a:r>
               <a:rPr sz="900" b="0">
                 <a:solidFill>
                   <a:srgbClr val="5F6F63"/>
                 </a:solidFill>
-                <a:latin typeface="Arial"/>
+                <a:latin typeface="Roboto"/>
               </a:rPr>
               <a:t>Slide 3 of 11</a:t>
             </a:r>
@@ -5470,7 +5717,11 @@
           <a:bodyPr rtlCol="0" anchor="ctr"/>
           <a:lstStyle/>
           <a:p>
-            <a:pPr algn="ctr"/>
+            <a:pPr algn="ctr">
+              <a:defRPr>
+                <a:latin typeface="Roboto"/>
+              </a:defRPr>
+            </a:pPr>
           </a:p>
         </p:txBody>
       </p:sp>
@@ -5496,12 +5747,17 @@
           </a:bodyPr>
           <a:lstStyle/>
           <a:p>
+            <a:pPr>
+              <a:defRPr>
+                <a:latin typeface="Roboto"/>
+              </a:defRPr>
+            </a:pPr>
             <a:r>
               <a:rPr sz="1000" b="0">
                 <a:solidFill>
                   <a:srgbClr val="5F6F63"/>
                 </a:solidFill>
-                <a:latin typeface="Arial"/>
+                <a:latin typeface="Roboto"/>
               </a:rPr>
               <a:t>Sample Community Services Ltd · What does it cost to raise a dollar?</a:t>
             </a:r>
@@ -5530,12 +5786,17 @@
           </a:bodyPr>
           <a:lstStyle/>
           <a:p>
+            <a:pPr>
+              <a:defRPr>
+                <a:latin typeface="Roboto"/>
+              </a:defRPr>
+            </a:pPr>
             <a:r>
               <a:rPr sz="2400" b="1">
                 <a:solidFill>
                   <a:srgbClr val="25342A"/>
                 </a:solidFill>
-                <a:latin typeface="Arial"/>
+                <a:latin typeface="Roboto"/>
               </a:rPr>
               <a:t>What it shows · Source: All fundraising</a:t>
             </a:r>
@@ -5583,7 +5844,11 @@
           <a:bodyPr rtlCol="0" anchor="ctr"/>
           <a:lstStyle/>
           <a:p>
-            <a:pPr algn="ctr"/>
+            <a:pPr algn="ctr">
+              <a:defRPr>
+                <a:latin typeface="Roboto"/>
+              </a:defRPr>
+            </a:pPr>
           </a:p>
         </p:txBody>
       </p:sp>
@@ -5609,12 +5874,17 @@
           </a:bodyPr>
           <a:lstStyle/>
           <a:p>
+            <a:pPr>
+              <a:defRPr>
+                <a:latin typeface="Roboto"/>
+              </a:defRPr>
+            </a:pPr>
             <a:r>
               <a:rPr sz="1100" b="1">
                 <a:solidFill>
                   <a:srgbClr val="5F6F63"/>
                 </a:solidFill>
-                <a:latin typeface="Arial"/>
+                <a:latin typeface="Roboto"/>
               </a:rPr>
               <a:t>WHAT IT SHOWS</a:t>
             </a:r>
@@ -5643,12 +5913,17 @@
           </a:bodyPr>
           <a:lstStyle/>
           <a:p>
+            <a:pPr>
+              <a:defRPr>
+                <a:latin typeface="Roboto"/>
+              </a:defRPr>
+            </a:pPr>
             <a:r>
               <a:rPr sz="1600" b="0">
                 <a:solidFill>
                   <a:srgbClr val="25342A"/>
                 </a:solidFill>
-                <a:latin typeface="Arial"/>
+                <a:latin typeface="Roboto"/>
               </a:rPr>
               <a:t>January cost 13¢ to raise each dollar, against 14¢ in December. This financial year to date it has cost 14¢ a dollar.</a:t>
             </a:r>
@@ -5696,7 +5971,11 @@
           <a:bodyPr rtlCol="0" anchor="ctr"/>
           <a:lstStyle/>
           <a:p>
-            <a:pPr algn="ctr"/>
+            <a:pPr algn="ctr">
+              <a:defRPr>
+                <a:latin typeface="Roboto"/>
+              </a:defRPr>
+            </a:pPr>
           </a:p>
         </p:txBody>
       </p:sp>
@@ -5722,12 +6001,17 @@
           </a:bodyPr>
           <a:lstStyle/>
           <a:p>
+            <a:pPr>
+              <a:defRPr>
+                <a:latin typeface="Roboto"/>
+              </a:defRPr>
+            </a:pPr>
             <a:r>
               <a:rPr sz="1100" b="1">
                 <a:solidFill>
                   <a:srgbClr val="5F6F63"/>
                 </a:solidFill>
-                <a:latin typeface="Arial"/>
+                <a:latin typeface="Roboto"/>
               </a:rPr>
               <a:t>WHAT YOU'D DO ABOUT IT</a:t>
             </a:r>
@@ -5756,12 +6040,17 @@
           </a:bodyPr>
           <a:lstStyle/>
           <a:p>
+            <a:pPr>
+              <a:defRPr>
+                <a:latin typeface="Roboto"/>
+              </a:defRPr>
+            </a:pPr>
             <a:r>
               <a:rPr sz="1600" b="0">
                 <a:solidFill>
                   <a:srgbClr val="25342A"/>
                 </a:solidFill>
-                <a:latin typeface="Arial"/>
+                <a:latin typeface="Roboto"/>
               </a:rPr>
               <a:t>The year-to-date figure is steadier than single months: events make some months jump. Pick a source above to see which one moves it.</a:t>
             </a:r>
@@ -5790,12 +6079,17 @@
           </a:bodyPr>
           <a:lstStyle/>
           <a:p>
+            <a:pPr>
+              <a:defRPr>
+                <a:latin typeface="Roboto"/>
+              </a:defRPr>
+            </a:pPr>
             <a:r>
               <a:rPr sz="900" b="0">
                 <a:solidFill>
                   <a:srgbClr val="5F6F63"/>
                 </a:solidFill>
-                <a:latin typeface="Arial"/>
+                <a:latin typeface="Roboto"/>
               </a:rPr>
               <a:t>cost-to-raise.pptx</a:t>
             </a:r>
@@ -5824,13 +6118,17 @@
           </a:bodyPr>
           <a:lstStyle/>
           <a:p>
-            <a:pPr algn="ctr"/>
+            <a:pPr algn="ctr">
+              <a:defRPr>
+                <a:latin typeface="Roboto"/>
+              </a:defRPr>
+            </a:pPr>
             <a:r>
               <a:rPr sz="900" b="0">
                 <a:solidFill>
                   <a:srgbClr val="5F6F63"/>
                 </a:solidFill>
-                <a:latin typeface="Arial"/>
+                <a:latin typeface="Roboto"/>
               </a:rPr>
               <a:t>Data retrieved 2pm, Tue 6 Oct 2026 · Sample data</a:t>
             </a:r>
@@ -5859,13 +6157,17 @@
           </a:bodyPr>
           <a:lstStyle/>
           <a:p>
-            <a:pPr algn="r"/>
+            <a:pPr algn="r">
+              <a:defRPr>
+                <a:latin typeface="Roboto"/>
+              </a:defRPr>
+            </a:pPr>
             <a:r>
               <a:rPr sz="900" b="0">
                 <a:solidFill>
                   <a:srgbClr val="5F6F63"/>
                 </a:solidFill>
-                <a:latin typeface="Arial"/>
+                <a:latin typeface="Roboto"/>
               </a:rPr>
               <a:t>Slide 4 of 11</a:t>
             </a:r>
@@ -5929,7 +6231,11 @@
           <a:bodyPr rtlCol="0" anchor="ctr"/>
           <a:lstStyle/>
           <a:p>
-            <a:pPr algn="ctr"/>
+            <a:pPr algn="ctr">
+              <a:defRPr>
+                <a:latin typeface="Roboto"/>
+              </a:defRPr>
+            </a:pPr>
           </a:p>
         </p:txBody>
       </p:sp>
@@ -5955,12 +6261,17 @@
           </a:bodyPr>
           <a:lstStyle/>
           <a:p>
+            <a:pPr>
+              <a:defRPr>
+                <a:latin typeface="Roboto"/>
+              </a:defRPr>
+            </a:pPr>
             <a:r>
               <a:rPr sz="1000" b="0">
                 <a:solidFill>
                   <a:srgbClr val="5F6F63"/>
                 </a:solidFill>
-                <a:latin typeface="Arial"/>
+                <a:latin typeface="Roboto"/>
               </a:rPr>
               <a:t>Sample Community Services Ltd · What does it cost to raise a dollar?</a:t>
             </a:r>
@@ -5989,12 +6300,17 @@
           </a:bodyPr>
           <a:lstStyle/>
           <a:p>
+            <a:pPr>
+              <a:defRPr>
+                <a:latin typeface="Roboto"/>
+              </a:defRPr>
+            </a:pPr>
             <a:r>
               <a:rPr sz="2400" b="1">
                 <a:solidFill>
                   <a:srgbClr val="25342A"/>
                 </a:solidFill>
-                <a:latin typeface="Arial"/>
+                <a:latin typeface="Roboto"/>
               </a:rPr>
               <a:t>Headline numbers · Source: Grants</a:t>
             </a:r>
@@ -6042,7 +6358,11 @@
           <a:bodyPr rtlCol="0" anchor="ctr"/>
           <a:lstStyle/>
           <a:p>
-            <a:pPr algn="ctr"/>
+            <a:pPr algn="ctr">
+              <a:defRPr>
+                <a:latin typeface="Roboto"/>
+              </a:defRPr>
+            </a:pPr>
           </a:p>
         </p:txBody>
       </p:sp>
@@ -6068,12 +6388,17 @@
           </a:bodyPr>
           <a:lstStyle/>
           <a:p>
+            <a:pPr>
+              <a:defRPr>
+                <a:latin typeface="Roboto"/>
+              </a:defRPr>
+            </a:pPr>
             <a:r>
               <a:rPr sz="1200" b="0">
                 <a:solidFill>
                   <a:srgbClr val="5F6F63"/>
                 </a:solidFill>
-                <a:latin typeface="Arial"/>
+                <a:latin typeface="Roboto"/>
               </a:rPr>
               <a:t>January · Grants</a:t>
             </a:r>
@@ -6102,12 +6427,17 @@
           </a:bodyPr>
           <a:lstStyle/>
           <a:p>
+            <a:pPr>
+              <a:defRPr>
+                <a:latin typeface="Roboto"/>
+              </a:defRPr>
+            </a:pPr>
             <a:r>
               <a:rPr sz="3000" b="1">
                 <a:solidFill>
                   <a:srgbClr val="2F7A5D"/>
                 </a:solidFill>
-                <a:latin typeface="Arial"/>
+                <a:latin typeface="Roboto"/>
               </a:rPr>
               <a:t>12¢</a:t>
             </a:r>
@@ -6136,12 +6466,17 @@
           </a:bodyPr>
           <a:lstStyle/>
           <a:p>
+            <a:pPr>
+              <a:defRPr>
+                <a:latin typeface="Roboto"/>
+              </a:defRPr>
+            </a:pPr>
             <a:r>
               <a:rPr sz="1100" b="0">
                 <a:solidFill>
                   <a:srgbClr val="5F6F63"/>
                 </a:solidFill>
-                <a:latin typeface="Arial"/>
+                <a:latin typeface="Roboto"/>
               </a:rPr>
               <a:t>December 10¢</a:t>
             </a:r>
@@ -6189,7 +6524,11 @@
           <a:bodyPr rtlCol="0" anchor="ctr"/>
           <a:lstStyle/>
           <a:p>
-            <a:pPr algn="ctr"/>
+            <a:pPr algn="ctr">
+              <a:defRPr>
+                <a:latin typeface="Roboto"/>
+              </a:defRPr>
+            </a:pPr>
           </a:p>
         </p:txBody>
       </p:sp>
@@ -6215,12 +6554,17 @@
           </a:bodyPr>
           <a:lstStyle/>
           <a:p>
+            <a:pPr>
+              <a:defRPr>
+                <a:latin typeface="Roboto"/>
+              </a:defRPr>
+            </a:pPr>
             <a:r>
               <a:rPr sz="1200" b="0">
                 <a:solidFill>
                   <a:srgbClr val="5F6F63"/>
                 </a:solidFill>
-                <a:latin typeface="Arial"/>
+                <a:latin typeface="Roboto"/>
               </a:rPr>
               <a:t>Year to date (Jul to Jan 2026)</a:t>
             </a:r>
@@ -6249,12 +6593,17 @@
           </a:bodyPr>
           <a:lstStyle/>
           <a:p>
+            <a:pPr>
+              <a:defRPr>
+                <a:latin typeface="Roboto"/>
+              </a:defRPr>
+            </a:pPr>
             <a:r>
               <a:rPr sz="3000" b="1">
                 <a:solidFill>
                   <a:srgbClr val="2F7A5D"/>
                 </a:solidFill>
-                <a:latin typeface="Arial"/>
+                <a:latin typeface="Roboto"/>
               </a:rPr>
               <a:t>11¢</a:t>
             </a:r>
@@ -6283,12 +6632,17 @@
           </a:bodyPr>
           <a:lstStyle/>
           <a:p>
+            <a:pPr>
+              <a:defRPr>
+                <a:latin typeface="Roboto"/>
+              </a:defRPr>
+            </a:pPr>
             <a:r>
               <a:rPr sz="1100" b="0">
                 <a:solidFill>
                   <a:srgbClr val="5F6F63"/>
                 </a:solidFill>
-                <a:latin typeface="Arial"/>
+                <a:latin typeface="Roboto"/>
               </a:rPr>
               <a:t>same period last year: not in the data</a:t>
             </a:r>
@@ -6317,12 +6671,17 @@
           </a:bodyPr>
           <a:lstStyle/>
           <a:p>
+            <a:pPr>
+              <a:defRPr>
+                <a:latin typeface="Roboto"/>
+              </a:defRPr>
+            </a:pPr>
             <a:r>
               <a:rPr sz="900" b="0">
                 <a:solidFill>
                   <a:srgbClr val="5F6F63"/>
                 </a:solidFill>
-                <a:latin typeface="Arial"/>
+                <a:latin typeface="Roboto"/>
               </a:rPr>
               <a:t>cost-to-raise.pptx</a:t>
             </a:r>
@@ -6351,13 +6710,17 @@
           </a:bodyPr>
           <a:lstStyle/>
           <a:p>
-            <a:pPr algn="ctr"/>
+            <a:pPr algn="ctr">
+              <a:defRPr>
+                <a:latin typeface="Roboto"/>
+              </a:defRPr>
+            </a:pPr>
             <a:r>
               <a:rPr sz="900" b="0">
                 <a:solidFill>
                   <a:srgbClr val="5F6F63"/>
                 </a:solidFill>
-                <a:latin typeface="Arial"/>
+                <a:latin typeface="Roboto"/>
               </a:rPr>
               <a:t>Data retrieved 2pm, Tue 6 Oct 2026 · Sample data</a:t>
             </a:r>
@@ -6386,13 +6749,17 @@
           </a:bodyPr>
           <a:lstStyle/>
           <a:p>
-            <a:pPr algn="r"/>
+            <a:pPr algn="r">
+              <a:defRPr>
+                <a:latin typeface="Roboto"/>
+              </a:defRPr>
+            </a:pPr>
             <a:r>
               <a:rPr sz="900" b="0">
                 <a:solidFill>
                   <a:srgbClr val="5F6F63"/>
                 </a:solidFill>
-                <a:latin typeface="Arial"/>
+                <a:latin typeface="Roboto"/>
               </a:rPr>
               <a:t>Slide 5 of 11</a:t>
             </a:r>
@@ -6456,7 +6823,11 @@
           <a:bodyPr rtlCol="0" anchor="ctr"/>
           <a:lstStyle/>
           <a:p>
-            <a:pPr algn="ctr"/>
+            <a:pPr algn="ctr">
+              <a:defRPr>
+                <a:latin typeface="Roboto"/>
+              </a:defRPr>
+            </a:pPr>
           </a:p>
         </p:txBody>
       </p:sp>
@@ -6482,12 +6853,17 @@
           </a:bodyPr>
           <a:lstStyle/>
           <a:p>
+            <a:pPr>
+              <a:defRPr>
+                <a:latin typeface="Roboto"/>
+              </a:defRPr>
+            </a:pPr>
             <a:r>
               <a:rPr sz="1000" b="0">
                 <a:solidFill>
                   <a:srgbClr val="5F6F63"/>
                 </a:solidFill>
-                <a:latin typeface="Arial"/>
+                <a:latin typeface="Roboto"/>
               </a:rPr>
               <a:t>Sample Community Services Ltd · What does it cost to raise a dollar?</a:t>
             </a:r>
@@ -6516,12 +6892,17 @@
           </a:bodyPr>
           <a:lstStyle/>
           <a:p>
+            <a:pPr>
+              <a:defRPr>
+                <a:latin typeface="Roboto"/>
+              </a:defRPr>
+            </a:pPr>
             <a:r>
               <a:rPr sz="2400" b="1">
                 <a:solidFill>
                   <a:srgbClr val="25342A"/>
                 </a:solidFill>
-                <a:latin typeface="Arial"/>
+                <a:latin typeface="Roboto"/>
               </a:rPr>
               <a:t>What it shows · Source: Grants</a:t>
             </a:r>
@@ -6569,7 +6950,11 @@
           <a:bodyPr rtlCol="0" anchor="ctr"/>
           <a:lstStyle/>
           <a:p>
-            <a:pPr algn="ctr"/>
+            <a:pPr algn="ctr">
+              <a:defRPr>
+                <a:latin typeface="Roboto"/>
+              </a:defRPr>
+            </a:pPr>
           </a:p>
         </p:txBody>
       </p:sp>
@@ -6595,12 +6980,17 @@
           </a:bodyPr>
           <a:lstStyle/>
           <a:p>
+            <a:pPr>
+              <a:defRPr>
+                <a:latin typeface="Roboto"/>
+              </a:defRPr>
+            </a:pPr>
             <a:r>
               <a:rPr sz="1100" b="1">
                 <a:solidFill>
                   <a:srgbClr val="5F6F63"/>
                 </a:solidFill>
-                <a:latin typeface="Arial"/>
+                <a:latin typeface="Roboto"/>
               </a:rPr>
               <a:t>WHAT IT SHOWS</a:t>
             </a:r>
@@ -6629,12 +7019,17 @@
           </a:bodyPr>
           <a:lstStyle/>
           <a:p>
+            <a:pPr>
+              <a:defRPr>
+                <a:latin typeface="Roboto"/>
+              </a:defRPr>
+            </a:pPr>
             <a:r>
               <a:rPr sz="1600" b="0">
                 <a:solidFill>
                   <a:srgbClr val="25342A"/>
                 </a:solidFill>
-                <a:latin typeface="Arial"/>
+                <a:latin typeface="Roboto"/>
               </a:rPr>
               <a:t>Grants cost 11¢ to raise each dollar this financial year to date ($49,700 of grant writing and reporting for $450,671).</a:t>
             </a:r>
@@ -6682,7 +7077,11 @@
           <a:bodyPr rtlCol="0" anchor="ctr"/>
           <a:lstStyle/>
           <a:p>
-            <a:pPr algn="ctr"/>
+            <a:pPr algn="ctr">
+              <a:defRPr>
+                <a:latin typeface="Roboto"/>
+              </a:defRPr>
+            </a:pPr>
           </a:p>
         </p:txBody>
       </p:sp>
@@ -6708,12 +7107,17 @@
           </a:bodyPr>
           <a:lstStyle/>
           <a:p>
+            <a:pPr>
+              <a:defRPr>
+                <a:latin typeface="Roboto"/>
+              </a:defRPr>
+            </a:pPr>
             <a:r>
               <a:rPr sz="1100" b="1">
                 <a:solidFill>
                   <a:srgbClr val="5F6F63"/>
                 </a:solidFill>
-                <a:latin typeface="Arial"/>
+                <a:latin typeface="Roboto"/>
               </a:rPr>
               <a:t>WHAT YOU'D DO ABOUT IT</a:t>
             </a:r>
@@ -6742,12 +7146,17 @@
           </a:bodyPr>
           <a:lstStyle/>
           <a:p>
+            <a:pPr>
+              <a:defRPr>
+                <a:latin typeface="Roboto"/>
+              </a:defRPr>
+            </a:pPr>
             <a:r>
               <a:rPr sz="1600" b="0">
                 <a:solidFill>
                   <a:srgbClr val="25342A"/>
                 </a:solidFill>
-                <a:latin typeface="Arial"/>
+                <a:latin typeface="Roboto"/>
               </a:rPr>
               <a:t>Usually the cheapest money to raise, as long as the time that goes into applications and acquittals is protected.</a:t>
             </a:r>
@@ -6776,12 +7185,17 @@
           </a:bodyPr>
           <a:lstStyle/>
           <a:p>
+            <a:pPr>
+              <a:defRPr>
+                <a:latin typeface="Roboto"/>
+              </a:defRPr>
+            </a:pPr>
             <a:r>
               <a:rPr sz="900" b="0">
                 <a:solidFill>
                   <a:srgbClr val="5F6F63"/>
                 </a:solidFill>
-                <a:latin typeface="Arial"/>
+                <a:latin typeface="Roboto"/>
               </a:rPr>
               <a:t>cost-to-raise.pptx</a:t>
             </a:r>
@@ -6810,13 +7224,17 @@
           </a:bodyPr>
           <a:lstStyle/>
           <a:p>
-            <a:pPr algn="ctr"/>
+            <a:pPr algn="ctr">
+              <a:defRPr>
+                <a:latin typeface="Roboto"/>
+              </a:defRPr>
+            </a:pPr>
             <a:r>
               <a:rPr sz="900" b="0">
                 <a:solidFill>
                   <a:srgbClr val="5F6F63"/>
                 </a:solidFill>
-                <a:latin typeface="Arial"/>
+                <a:latin typeface="Roboto"/>
               </a:rPr>
               <a:t>Data retrieved 2pm, Tue 6 Oct 2026 · Sample data</a:t>
             </a:r>
@@ -6845,13 +7263,17 @@
           </a:bodyPr>
           <a:lstStyle/>
           <a:p>
-            <a:pPr algn="r"/>
+            <a:pPr algn="r">
+              <a:defRPr>
+                <a:latin typeface="Roboto"/>
+              </a:defRPr>
+            </a:pPr>
             <a:r>
               <a:rPr sz="900" b="0">
                 <a:solidFill>
                   <a:srgbClr val="5F6F63"/>
                 </a:solidFill>
-                <a:latin typeface="Arial"/>
+                <a:latin typeface="Roboto"/>
               </a:rPr>
               <a:t>Slide 6 of 11</a:t>
             </a:r>
@@ -6915,7 +7337,11 @@
           <a:bodyPr rtlCol="0" anchor="ctr"/>
           <a:lstStyle/>
           <a:p>
-            <a:pPr algn="ctr"/>
+            <a:pPr algn="ctr">
+              <a:defRPr>
+                <a:latin typeface="Roboto"/>
+              </a:defRPr>
+            </a:pPr>
           </a:p>
         </p:txBody>
       </p:sp>
@@ -6941,12 +7367,17 @@
           </a:bodyPr>
           <a:lstStyle/>
           <a:p>
+            <a:pPr>
+              <a:defRPr>
+                <a:latin typeface="Roboto"/>
+              </a:defRPr>
+            </a:pPr>
             <a:r>
               <a:rPr sz="1000" b="0">
                 <a:solidFill>
                   <a:srgbClr val="5F6F63"/>
                 </a:solidFill>
-                <a:latin typeface="Arial"/>
+                <a:latin typeface="Roboto"/>
               </a:rPr>
               <a:t>Sample Community Services Ltd · What does it cost to raise a dollar?</a:t>
             </a:r>
@@ -6975,12 +7406,17 @@
           </a:bodyPr>
           <a:lstStyle/>
           <a:p>
+            <a:pPr>
+              <a:defRPr>
+                <a:latin typeface="Roboto"/>
+              </a:defRPr>
+            </a:pPr>
             <a:r>
               <a:rPr sz="2400" b="1">
                 <a:solidFill>
                   <a:srgbClr val="25342A"/>
                 </a:solidFill>
-                <a:latin typeface="Arial"/>
+                <a:latin typeface="Roboto"/>
               </a:rPr>
               <a:t>Headline numbers · Source: Donations</a:t>
             </a:r>
@@ -7028,7 +7464,11 @@
           <a:bodyPr rtlCol="0" anchor="ctr"/>
           <a:lstStyle/>
           <a:p>
-            <a:pPr algn="ctr"/>
+            <a:pPr algn="ctr">
+              <a:defRPr>
+                <a:latin typeface="Roboto"/>
+              </a:defRPr>
+            </a:pPr>
           </a:p>
         </p:txBody>
       </p:sp>
@@ -7054,12 +7494,17 @@
           </a:bodyPr>
           <a:lstStyle/>
           <a:p>
+            <a:pPr>
+              <a:defRPr>
+                <a:latin typeface="Roboto"/>
+              </a:defRPr>
+            </a:pPr>
             <a:r>
               <a:rPr sz="1200" b="0">
                 <a:solidFill>
                   <a:srgbClr val="5F6F63"/>
                 </a:solidFill>
-                <a:latin typeface="Arial"/>
+                <a:latin typeface="Roboto"/>
               </a:rPr>
               <a:t>January · Donations</a:t>
             </a:r>
@@ -7088,12 +7533,17 @@
           </a:bodyPr>
           <a:lstStyle/>
           <a:p>
+            <a:pPr>
+              <a:defRPr>
+                <a:latin typeface="Roboto"/>
+              </a:defRPr>
+            </a:pPr>
             <a:r>
               <a:rPr sz="3000" b="1">
                 <a:solidFill>
                   <a:srgbClr val="2F7A5D"/>
                 </a:solidFill>
-                <a:latin typeface="Arial"/>
+                <a:latin typeface="Roboto"/>
               </a:rPr>
               <a:t>17¢</a:t>
             </a:r>
@@ -7122,12 +7572,17 @@
           </a:bodyPr>
           <a:lstStyle/>
           <a:p>
+            <a:pPr>
+              <a:defRPr>
+                <a:latin typeface="Roboto"/>
+              </a:defRPr>
+            </a:pPr>
             <a:r>
               <a:rPr sz="1100" b="0">
                 <a:solidFill>
                   <a:srgbClr val="5F6F63"/>
                 </a:solidFill>
-                <a:latin typeface="Arial"/>
+                <a:latin typeface="Roboto"/>
               </a:rPr>
               <a:t>December 17¢</a:t>
             </a:r>
@@ -7175,7 +7630,11 @@
           <a:bodyPr rtlCol="0" anchor="ctr"/>
           <a:lstStyle/>
           <a:p>
-            <a:pPr algn="ctr"/>
+            <a:pPr algn="ctr">
+              <a:defRPr>
+                <a:latin typeface="Roboto"/>
+              </a:defRPr>
+            </a:pPr>
           </a:p>
         </p:txBody>
       </p:sp>
@@ -7201,12 +7660,17 @@
           </a:bodyPr>
           <a:lstStyle/>
           <a:p>
+            <a:pPr>
+              <a:defRPr>
+                <a:latin typeface="Roboto"/>
+              </a:defRPr>
+            </a:pPr>
             <a:r>
               <a:rPr sz="1200" b="0">
                 <a:solidFill>
                   <a:srgbClr val="5F6F63"/>
                 </a:solidFill>
-                <a:latin typeface="Arial"/>
+                <a:latin typeface="Roboto"/>
               </a:rPr>
               <a:t>Year to date (Jul to Jan 2026)</a:t>
             </a:r>
@@ -7235,12 +7699,17 @@
           </a:bodyPr>
           <a:lstStyle/>
           <a:p>
+            <a:pPr>
+              <a:defRPr>
+                <a:latin typeface="Roboto"/>
+              </a:defRPr>
+            </a:pPr>
             <a:r>
               <a:rPr sz="3000" b="1">
                 <a:solidFill>
                   <a:srgbClr val="2F7A5D"/>
                 </a:solidFill>
-                <a:latin typeface="Arial"/>
+                <a:latin typeface="Roboto"/>
               </a:rPr>
               <a:t>15¢</a:t>
             </a:r>
@@ -7269,12 +7738,17 @@
           </a:bodyPr>
           <a:lstStyle/>
           <a:p>
+            <a:pPr>
+              <a:defRPr>
+                <a:latin typeface="Roboto"/>
+              </a:defRPr>
+            </a:pPr>
             <a:r>
               <a:rPr sz="1100" b="0">
                 <a:solidFill>
                   <a:srgbClr val="5F6F63"/>
                 </a:solidFill>
-                <a:latin typeface="Arial"/>
+                <a:latin typeface="Roboto"/>
               </a:rPr>
               <a:t>same period last year: not in the data</a:t>
             </a:r>
@@ -7303,12 +7777,17 @@
           </a:bodyPr>
           <a:lstStyle/>
           <a:p>
+            <a:pPr>
+              <a:defRPr>
+                <a:latin typeface="Roboto"/>
+              </a:defRPr>
+            </a:pPr>
             <a:r>
               <a:rPr sz="900" b="0">
                 <a:solidFill>
                   <a:srgbClr val="5F6F63"/>
                 </a:solidFill>
-                <a:latin typeface="Arial"/>
+                <a:latin typeface="Roboto"/>
               </a:rPr>
               <a:t>cost-to-raise.pptx</a:t>
             </a:r>
@@ -7337,13 +7816,17 @@
           </a:bodyPr>
           <a:lstStyle/>
           <a:p>
-            <a:pPr algn="ctr"/>
+            <a:pPr algn="ctr">
+              <a:defRPr>
+                <a:latin typeface="Roboto"/>
+              </a:defRPr>
+            </a:pPr>
             <a:r>
               <a:rPr sz="900" b="0">
                 <a:solidFill>
                   <a:srgbClr val="5F6F63"/>
                 </a:solidFill>
-                <a:latin typeface="Arial"/>
+                <a:latin typeface="Roboto"/>
               </a:rPr>
               <a:t>Data retrieved 2pm, Tue 6 Oct 2026 · Sample data</a:t>
             </a:r>
@@ -7372,13 +7855,17 @@
           </a:bodyPr>
           <a:lstStyle/>
           <a:p>
-            <a:pPr algn="r"/>
+            <a:pPr algn="r">
+              <a:defRPr>
+                <a:latin typeface="Roboto"/>
+              </a:defRPr>
+            </a:pPr>
             <a:r>
               <a:rPr sz="900" b="0">
                 <a:solidFill>
                   <a:srgbClr val="5F6F63"/>
                 </a:solidFill>
-                <a:latin typeface="Arial"/>
+                <a:latin typeface="Roboto"/>
               </a:rPr>
               <a:t>Slide 7 of 11</a:t>
             </a:r>
@@ -7442,7 +7929,11 @@
           <a:bodyPr rtlCol="0" anchor="ctr"/>
           <a:lstStyle/>
           <a:p>
-            <a:pPr algn="ctr"/>
+            <a:pPr algn="ctr">
+              <a:defRPr>
+                <a:latin typeface="Roboto"/>
+              </a:defRPr>
+            </a:pPr>
           </a:p>
         </p:txBody>
       </p:sp>
@@ -7468,12 +7959,17 @@
           </a:bodyPr>
           <a:lstStyle/>
           <a:p>
+            <a:pPr>
+              <a:defRPr>
+                <a:latin typeface="Roboto"/>
+              </a:defRPr>
+            </a:pPr>
             <a:r>
               <a:rPr sz="1000" b="0">
                 <a:solidFill>
                   <a:srgbClr val="5F6F63"/>
                 </a:solidFill>
-                <a:latin typeface="Arial"/>
+                <a:latin typeface="Roboto"/>
               </a:rPr>
               <a:t>Sample Community Services Ltd · What does it cost to raise a dollar?</a:t>
             </a:r>
@@ -7502,12 +7998,17 @@
           </a:bodyPr>
           <a:lstStyle/>
           <a:p>
+            <a:pPr>
+              <a:defRPr>
+                <a:latin typeface="Roboto"/>
+              </a:defRPr>
+            </a:pPr>
             <a:r>
               <a:rPr sz="2400" b="1">
                 <a:solidFill>
                   <a:srgbClr val="25342A"/>
                 </a:solidFill>
-                <a:latin typeface="Arial"/>
+                <a:latin typeface="Roboto"/>
               </a:rPr>
               <a:t>What it shows · Source: Donations</a:t>
             </a:r>
@@ -7555,7 +8056,11 @@
           <a:bodyPr rtlCol="0" anchor="ctr"/>
           <a:lstStyle/>
           <a:p>
-            <a:pPr algn="ctr"/>
+            <a:pPr algn="ctr">
+              <a:defRPr>
+                <a:latin typeface="Roboto"/>
+              </a:defRPr>
+            </a:pPr>
           </a:p>
         </p:txBody>
       </p:sp>
@@ -7581,12 +8086,17 @@
           </a:bodyPr>
           <a:lstStyle/>
           <a:p>
+            <a:pPr>
+              <a:defRPr>
+                <a:latin typeface="Roboto"/>
+              </a:defRPr>
+            </a:pPr>
             <a:r>
               <a:rPr sz="1100" b="1">
                 <a:solidFill>
                   <a:srgbClr val="5F6F63"/>
                 </a:solidFill>
-                <a:latin typeface="Arial"/>
+                <a:latin typeface="Roboto"/>
               </a:rPr>
               <a:t>WHAT IT SHOWS</a:t>
             </a:r>
@@ -7615,12 +8125,17 @@
           </a:bodyPr>
           <a:lstStyle/>
           <a:p>
+            <a:pPr>
+              <a:defRPr>
+                <a:latin typeface="Roboto"/>
+              </a:defRPr>
+            </a:pPr>
             <a:r>
               <a:rPr sz="1600" b="0">
                 <a:solidFill>
                   <a:srgbClr val="25342A"/>
                 </a:solidFill>
-                <a:latin typeface="Arial"/>
+                <a:latin typeface="Roboto"/>
               </a:rPr>
               <a:t>Donations cost 15¢ to raise each dollar this financial year to date ($18,500 of donor campaigns for $119,700).</a:t>
             </a:r>
@@ -7668,7 +8183,11 @@
           <a:bodyPr rtlCol="0" anchor="ctr"/>
           <a:lstStyle/>
           <a:p>
-            <a:pPr algn="ctr"/>
+            <a:pPr algn="ctr">
+              <a:defRPr>
+                <a:latin typeface="Roboto"/>
+              </a:defRPr>
+            </a:pPr>
           </a:p>
         </p:txBody>
       </p:sp>
@@ -7694,12 +8213,17 @@
           </a:bodyPr>
           <a:lstStyle/>
           <a:p>
+            <a:pPr>
+              <a:defRPr>
+                <a:latin typeface="Roboto"/>
+              </a:defRPr>
+            </a:pPr>
             <a:r>
               <a:rPr sz="1100" b="1">
                 <a:solidFill>
                   <a:srgbClr val="5F6F63"/>
                 </a:solidFill>
-                <a:latin typeface="Arial"/>
+                <a:latin typeface="Roboto"/>
               </a:rPr>
               <a:t>WHAT YOU'D DO ABOUT IT</a:t>
             </a:r>
@@ -7728,12 +8252,17 @@
           </a:bodyPr>
           <a:lstStyle/>
           <a:p>
+            <a:pPr>
+              <a:defRPr>
+                <a:latin typeface="Roboto"/>
+              </a:defRPr>
+            </a:pPr>
             <a:r>
               <a:rPr sz="1600" b="0">
                 <a:solidFill>
                   <a:srgbClr val="25342A"/>
                 </a:solidFill>
-                <a:latin typeface="Arial"/>
+                <a:latin typeface="Roboto"/>
               </a:rPr>
               <a:t>Steady and cheap, and untied: the money that builds reserves.</a:t>
             </a:r>
@@ -7762,12 +8291,17 @@
           </a:bodyPr>
           <a:lstStyle/>
           <a:p>
+            <a:pPr>
+              <a:defRPr>
+                <a:latin typeface="Roboto"/>
+              </a:defRPr>
+            </a:pPr>
             <a:r>
               <a:rPr sz="900" b="0">
                 <a:solidFill>
                   <a:srgbClr val="5F6F63"/>
                 </a:solidFill>
-                <a:latin typeface="Arial"/>
+                <a:latin typeface="Roboto"/>
               </a:rPr>
               <a:t>cost-to-raise.pptx</a:t>
             </a:r>
@@ -7796,13 +8330,17 @@
           </a:bodyPr>
           <a:lstStyle/>
           <a:p>
-            <a:pPr algn="ctr"/>
+            <a:pPr algn="ctr">
+              <a:defRPr>
+                <a:latin typeface="Roboto"/>
+              </a:defRPr>
+            </a:pPr>
             <a:r>
               <a:rPr sz="900" b="0">
                 <a:solidFill>
                   <a:srgbClr val="5F6F63"/>
                 </a:solidFill>
-                <a:latin typeface="Arial"/>
+                <a:latin typeface="Roboto"/>
               </a:rPr>
               <a:t>Data retrieved 2pm, Tue 6 Oct 2026 · Sample data</a:t>
             </a:r>
@@ -7831,13 +8369,17 @@
           </a:bodyPr>
           <a:lstStyle/>
           <a:p>
-            <a:pPr algn="r"/>
+            <a:pPr algn="r">
+              <a:defRPr>
+                <a:latin typeface="Roboto"/>
+              </a:defRPr>
+            </a:pPr>
             <a:r>
               <a:rPr sz="900" b="0">
                 <a:solidFill>
                   <a:srgbClr val="5F6F63"/>
                 </a:solidFill>
-                <a:latin typeface="Arial"/>
+                <a:latin typeface="Roboto"/>
               </a:rPr>
               <a:t>Slide 8 of 11</a:t>
             </a:r>
@@ -7901,7 +8443,11 @@
           <a:bodyPr rtlCol="0" anchor="ctr"/>
           <a:lstStyle/>
           <a:p>
-            <a:pPr algn="ctr"/>
+            <a:pPr algn="ctr">
+              <a:defRPr>
+                <a:latin typeface="Roboto"/>
+              </a:defRPr>
+            </a:pPr>
           </a:p>
         </p:txBody>
       </p:sp>
@@ -7927,12 +8473,17 @@
           </a:bodyPr>
           <a:lstStyle/>
           <a:p>
+            <a:pPr>
+              <a:defRPr>
+                <a:latin typeface="Roboto"/>
+              </a:defRPr>
+            </a:pPr>
             <a:r>
               <a:rPr sz="1000" b="0">
                 <a:solidFill>
                   <a:srgbClr val="5F6F63"/>
                 </a:solidFill>
-                <a:latin typeface="Arial"/>
+                <a:latin typeface="Roboto"/>
               </a:rPr>
               <a:t>Sample Community Services Ltd · What does it cost to raise a dollar?</a:t>
             </a:r>
@@ -7961,12 +8512,17 @@
           </a:bodyPr>
           <a:lstStyle/>
           <a:p>
+            <a:pPr>
+              <a:defRPr>
+                <a:latin typeface="Roboto"/>
+              </a:defRPr>
+            </a:pPr>
             <a:r>
               <a:rPr sz="2400" b="1">
                 <a:solidFill>
                   <a:srgbClr val="25342A"/>
                 </a:solidFill>
-                <a:latin typeface="Arial"/>
+                <a:latin typeface="Roboto"/>
               </a:rPr>
               <a:t>Headline numbers · Source: Fundraising events</a:t>
             </a:r>
@@ -8014,7 +8570,11 @@
           <a:bodyPr rtlCol="0" anchor="ctr"/>
           <a:lstStyle/>
           <a:p>
-            <a:pPr algn="ctr"/>
+            <a:pPr algn="ctr">
+              <a:defRPr>
+                <a:latin typeface="Roboto"/>
+              </a:defRPr>
+            </a:pPr>
           </a:p>
         </p:txBody>
       </p:sp>
@@ -8040,12 +8600,17 @@
           </a:bodyPr>
           <a:lstStyle/>
           <a:p>
+            <a:pPr>
+              <a:defRPr>
+                <a:latin typeface="Roboto"/>
+              </a:defRPr>
+            </a:pPr>
             <a:r>
               <a:rPr sz="1200" b="0">
                 <a:solidFill>
                   <a:srgbClr val="5F6F63"/>
                 </a:solidFill>
-                <a:latin typeface="Arial"/>
+                <a:latin typeface="Roboto"/>
               </a:rPr>
               <a:t>January · Fundraising events</a:t>
             </a:r>
@@ -8074,12 +8639,17 @@
           </a:bodyPr>
           <a:lstStyle/>
           <a:p>
+            <a:pPr>
+              <a:defRPr>
+                <a:latin typeface="Roboto"/>
+              </a:defRPr>
+            </a:pPr>
             <a:r>
               <a:rPr sz="3000" b="1">
                 <a:solidFill>
                   <a:srgbClr val="2F7A5D"/>
                 </a:solidFill>
-                <a:latin typeface="Arial"/>
+                <a:latin typeface="Roboto"/>
               </a:rPr>
               <a:t>–</a:t>
             </a:r>
@@ -8108,12 +8678,17 @@
           </a:bodyPr>
           <a:lstStyle/>
           <a:p>
+            <a:pPr>
+              <a:defRPr>
+                <a:latin typeface="Roboto"/>
+              </a:defRPr>
+            </a:pPr>
             <a:r>
               <a:rPr sz="1100" b="0">
                 <a:solidFill>
                   <a:srgbClr val="5F6F63"/>
                 </a:solidFill>
-                <a:latin typeface="Arial"/>
+                <a:latin typeface="Roboto"/>
               </a:rPr>
               <a:t>December 42¢</a:t>
             </a:r>
@@ -8161,7 +8736,11 @@
           <a:bodyPr rtlCol="0" anchor="ctr"/>
           <a:lstStyle/>
           <a:p>
-            <a:pPr algn="ctr"/>
+            <a:pPr algn="ctr">
+              <a:defRPr>
+                <a:latin typeface="Roboto"/>
+              </a:defRPr>
+            </a:pPr>
           </a:p>
         </p:txBody>
       </p:sp>
@@ -8187,12 +8766,17 @@
           </a:bodyPr>
           <a:lstStyle/>
           <a:p>
+            <a:pPr>
+              <a:defRPr>
+                <a:latin typeface="Roboto"/>
+              </a:defRPr>
+            </a:pPr>
             <a:r>
               <a:rPr sz="1200" b="0">
                 <a:solidFill>
                   <a:srgbClr val="5F6F63"/>
                 </a:solidFill>
-                <a:latin typeface="Arial"/>
+                <a:latin typeface="Roboto"/>
               </a:rPr>
               <a:t>Year to date (Jul to Jan 2026)</a:t>
             </a:r>
@@ -8221,12 +8805,17 @@
           </a:bodyPr>
           <a:lstStyle/>
           <a:p>
+            <a:pPr>
+              <a:defRPr>
+                <a:latin typeface="Roboto"/>
+              </a:defRPr>
+            </a:pPr>
             <a:r>
               <a:rPr sz="3000" b="1">
                 <a:solidFill>
                   <a:srgbClr val="2F7A5D"/>
                 </a:solidFill>
-                <a:latin typeface="Arial"/>
+                <a:latin typeface="Roboto"/>
               </a:rPr>
               <a:t>41¢</a:t>
             </a:r>
@@ -8255,12 +8844,17 @@
           </a:bodyPr>
           <a:lstStyle/>
           <a:p>
+            <a:pPr>
+              <a:defRPr>
+                <a:latin typeface="Roboto"/>
+              </a:defRPr>
+            </a:pPr>
             <a:r>
               <a:rPr sz="1100" b="0">
                 <a:solidFill>
                   <a:srgbClr val="5F6F63"/>
                 </a:solidFill>
-                <a:latin typeface="Arial"/>
+                <a:latin typeface="Roboto"/>
               </a:rPr>
               <a:t>same period last year: not in the data</a:t>
             </a:r>
@@ -8289,12 +8883,17 @@
           </a:bodyPr>
           <a:lstStyle/>
           <a:p>
+            <a:pPr>
+              <a:defRPr>
+                <a:latin typeface="Roboto"/>
+              </a:defRPr>
+            </a:pPr>
             <a:r>
               <a:rPr sz="900" b="0">
                 <a:solidFill>
                   <a:srgbClr val="5F6F63"/>
                 </a:solidFill>
-                <a:latin typeface="Arial"/>
+                <a:latin typeface="Roboto"/>
               </a:rPr>
               <a:t>cost-to-raise.pptx</a:t>
             </a:r>
@@ -8323,13 +8922,17 @@
           </a:bodyPr>
           <a:lstStyle/>
           <a:p>
-            <a:pPr algn="ctr"/>
+            <a:pPr algn="ctr">
+              <a:defRPr>
+                <a:latin typeface="Roboto"/>
+              </a:defRPr>
+            </a:pPr>
             <a:r>
               <a:rPr sz="900" b="0">
                 <a:solidFill>
                   <a:srgbClr val="5F6F63"/>
                 </a:solidFill>
-                <a:latin typeface="Arial"/>
+                <a:latin typeface="Roboto"/>
               </a:rPr>
               <a:t>Data retrieved 2pm, Tue 6 Oct 2026 · Sample data</a:t>
             </a:r>
@@ -8358,13 +8961,17 @@
           </a:bodyPr>
           <a:lstStyle/>
           <a:p>
-            <a:pPr algn="r"/>
+            <a:pPr algn="r">
+              <a:defRPr>
+                <a:latin typeface="Roboto"/>
+              </a:defRPr>
+            </a:pPr>
             <a:r>
               <a:rPr sz="900" b="0">
                 <a:solidFill>
                   <a:srgbClr val="5F6F63"/>
                 </a:solidFill>
-                <a:latin typeface="Arial"/>
+                <a:latin typeface="Roboto"/>
               </a:rPr>
               <a:t>Slide 9 of 11</a:t>
             </a:r>

--- a/media/exports/reports/2026-01/cost-to-raise.pptx
+++ b/media/exports/reports/2026-01/cost-to-raise.pptx
@@ -6,16 +6,10 @@
   </p:sldMasterIdLst>
   <p:sldIdLst>
     <p:sldId id="256" r:id="rId7"/>
-    <p:sldId id="257" r:id="rId8"/>
-    <p:sldId id="258" r:id="rId9"/>
-    <p:sldId id="259" r:id="rId10"/>
-    <p:sldId id="260" r:id="rId11"/>
-    <p:sldId id="261" r:id="rId12"/>
-    <p:sldId id="262" r:id="rId13"/>
-    <p:sldId id="263" r:id="rId14"/>
-    <p:sldId id="264" r:id="rId15"/>
-    <p:sldId id="265" r:id="rId16"/>
-    <p:sldId id="266" r:id="rId17"/>
+    <p:sldId id="257" r:id="rId9"/>
+    <p:sldId id="258" r:id="rId10"/>
+    <p:sldId id="259" r:id="rId11"/>
+    <p:sldId id="260" r:id="rId12"/>
   </p:sldIdLst>
   <p:sldSz cx="12191695" cy="6858000" type="screen4x3"/>
   <p:notesSz cx="6858000" cy="9144000"/>
@@ -121,8 +115,19 @@
 <c:chartSpace xmlns:c="http://schemas.openxmlformats.org/drawingml/2006/chart" xmlns:a="http://schemas.openxmlformats.org/drawingml/2006/main" xmlns:r="http://schemas.openxmlformats.org/officeDocument/2006/relationships">
   <c:date1904 val="0"/>
   <c:chart>
-    <c:autoTitleDeleted val="0"/>
+    <c:autoTitleDeleted val="1"/>
     <c:plotArea>
+      <c:layout>
+        <c:manualLayout>
+          <c:layoutTarget val="inner"/>
+          <c:xMode val="edge"/>
+          <c:yMode val="edge"/>
+          <c:x val="0.3"/>
+          <c:y val="0.03"/>
+          <c:w val="0.58"/>
+          <c:h val="0.88"/>
+        </c:manualLayout>
+      </c:layout>
       <c:barChart>
         <c:barDir val="bar"/>
         <c:grouping val="clustered"/>
@@ -135,7 +140,7 @@
               <c:strCache>
                 <c:ptCount val="1"/>
                 <c:pt idx="0">
-                  <c:v>Value</c:v>
+                  <c:v>Cost to raise a dollar</c:v>
                 </c:pt>
               </c:strCache>
             </c:strRef>
@@ -193,7 +198,7 @@
             <a:lstStyle/>
             <a:p>
               <a:pPr>
-                <a:defRPr sz="1100"/>
+                <a:defRPr sz="1000"/>
               </a:pPr>
             </a:p>
           </c:txPr>
@@ -230,7 +235,7 @@
           <a:lstStyle/>
           <a:p>
             <a:pPr>
-              <a:defRPr sz="1200"/>
+              <a:defRPr sz="1100"/>
             </a:pPr>
           </a:p>
         </c:txPr>
@@ -243,7 +248,10 @@
       </c:catAx>
       <c:valAx>
         <c:axId val="-2113994440"/>
-        <c:scaling/>
+        <c:scaling>
+          <c:max val="19.549999999999997"/>
+          <c:min val="0.0"/>
+        </c:scaling>
         <c:delete/>
         <c:axPos val="b"/>
         <c:majorTickMark val="out"/>
@@ -278,9 +286,19 @@
   <c:date1904 val="0"/>
   <c:roundedCorners val="0"/>
   <c:chart>
-    <c:autoTitleDeleted val="0"/>
+    <c:autoTitleDeleted val="1"/>
     <c:plotArea>
-      <c:layout/>
+      <c:layout>
+        <c:manualLayout>
+          <c:layoutTarget val="inner"/>
+          <c:xMode val="edge"/>
+          <c:yMode val="edge"/>
+          <c:x val="0.11"/>
+          <c:y val="0.05"/>
+          <c:w val="0.86"/>
+          <c:h val="0.8"/>
+        </c:manualLayout>
+      </c:layout>
       <c:areaChart>
         <c:grouping val="standard"/>
         <c:varyColors val="0"/>
@@ -293,7 +311,7 @@
               <c:strCache>
                 <c:ptCount val="1"/>
                 <c:pt idx="0">
-                  <c:v>Value</c:v>
+                  <c:v>Cents per $1</c:v>
                 </c:pt>
               </c:strCache>
             </c:strRef>
@@ -373,16 +391,16 @@
                 <c:formatCode>0"¢";[Red](0"¢")</c:formatCode>
                 <c:ptCount val="16"/>
                 <c:pt idx="0">
-                  <c:v>21</c:v>
+                  <c:v>24</c:v>
                 </c:pt>
                 <c:pt idx="1">
-                  <c:v>19</c:v>
+                  <c:v>20</c:v>
                 </c:pt>
                 <c:pt idx="2">
                   <c:v>22</c:v>
                 </c:pt>
                 <c:pt idx="3">
-                  <c:v>12</c:v>
+                  <c:v>10</c:v>
                 </c:pt>
                 <c:pt idx="4">
                   <c:v>11</c:v>
@@ -397,28 +415,28 @@
                   <c:v>11</c:v>
                 </c:pt>
                 <c:pt idx="8">
-                  <c:v>13</c:v>
+                  <c:v>12</c:v>
                 </c:pt>
                 <c:pt idx="9">
-                  <c:v>13</c:v>
+                  <c:v>12</c:v>
                 </c:pt>
                 <c:pt idx="10">
                   <c:v>12</c:v>
                 </c:pt>
                 <c:pt idx="11">
-                  <c:v>21</c:v>
+                  <c:v>11</c:v>
                 </c:pt>
                 <c:pt idx="12">
-                  <c:v>11</c:v>
+                  <c:v>10</c:v>
                 </c:pt>
                 <c:pt idx="13">
-                  <c:v>11</c:v>
+                  <c:v>10</c:v>
                 </c:pt>
                 <c:pt idx="14">
-                  <c:v>14</c:v>
+                  <c:v>10</c:v>
                 </c:pt>
                 <c:pt idx="15">
-                  <c:v>13</c:v>
+                  <c:v>12</c:v>
                 </c:pt>
               </c:numCache>
             </c:numRef>
@@ -460,12 +478,15 @@
         <c:auto val="1"/>
         <c:lblAlgn val="ctr"/>
         <c:lblOffset val="100"/>
+        <c:tickLblSkip val="2"/>
         <c:noMultiLvlLbl val="0"/>
       </c:catAx>
       <c:valAx>
         <c:axId val="-2100718248"/>
         <c:scaling>
           <c:orientation val="minMax"/>
+          <c:max val="25.0"/>
+          <c:min val="0.0"/>
         </c:scaling>
         <c:delete val="0"/>
         <c:axPos val="l"/>
@@ -499,6 +520,7 @@
         <c:crossAx val="-2101159928"/>
         <c:crosses val="autoZero"/>
         <c:crossBetween val="midCat"/>
+        <c:majorUnit val="5.0"/>
       </c:valAx>
     </c:plotArea>
     <c:plotVisOnly val="1"/>
@@ -521,6 +543,1156 @@
     <c:autoUpdate val="0"/>
   </c:externalData>
 </c:chartSpace>
+</file>
+
+<file path=ppt/charts/chart3.xml><?xml version="1.0" encoding="utf-8"?>
+<c:chartSpace xmlns:c="http://schemas.openxmlformats.org/drawingml/2006/chart" xmlns:a="http://schemas.openxmlformats.org/drawingml/2006/main" xmlns:r="http://schemas.openxmlformats.org/officeDocument/2006/relationships">
+  <c:date1904 val="0"/>
+  <c:roundedCorners val="0"/>
+  <c:chart>
+    <c:autoTitleDeleted val="1"/>
+    <c:plotArea>
+      <c:layout>
+        <c:manualLayout>
+          <c:layoutTarget val="inner"/>
+          <c:xMode val="edge"/>
+          <c:yMode val="edge"/>
+          <c:x val="0.11"/>
+          <c:y val="0.05"/>
+          <c:w val="0.86"/>
+          <c:h val="0.8"/>
+        </c:manualLayout>
+      </c:layout>
+      <c:areaChart>
+        <c:grouping val="standard"/>
+        <c:varyColors val="0"/>
+        <c:ser>
+          <c:idx val="0"/>
+          <c:order val="0"/>
+          <c:tx>
+            <c:strRef>
+              <c:f>Sheet1!$B$1</c:f>
+              <c:strCache>
+                <c:ptCount val="1"/>
+                <c:pt idx="0">
+                  <c:v>Cents per $1</c:v>
+                </c:pt>
+              </c:strCache>
+            </c:strRef>
+          </c:tx>
+          <c:spPr>
+            <a:solidFill>
+              <a:srgbClr val="0E9F6E">
+                <a:alpha val="25000"/>
+              </a:srgbClr>
+            </a:solidFill>
+            <a:ln w="31750">
+              <a:solidFill>
+                <a:srgbClr val="0E9F6E"/>
+              </a:solidFill>
+            </a:ln>
+          </c:spPr>
+          <c:cat>
+            <c:strRef>
+              <c:f>Sheet1!$A$2:$A$17</c:f>
+              <c:strCache>
+                <c:ptCount val="16"/>
+                <c:pt idx="0">
+                  <c:v>Oct 24</c:v>
+                </c:pt>
+                <c:pt idx="1">
+                  <c:v>Nov 24</c:v>
+                </c:pt>
+                <c:pt idx="2">
+                  <c:v>Dec 24</c:v>
+                </c:pt>
+                <c:pt idx="3">
+                  <c:v>Jan 25</c:v>
+                </c:pt>
+                <c:pt idx="4">
+                  <c:v>Feb 25</c:v>
+                </c:pt>
+                <c:pt idx="5">
+                  <c:v>Mar 25</c:v>
+                </c:pt>
+                <c:pt idx="6">
+                  <c:v>Apr 25</c:v>
+                </c:pt>
+                <c:pt idx="7">
+                  <c:v>May 25</c:v>
+                </c:pt>
+                <c:pt idx="8">
+                  <c:v>Jun 25</c:v>
+                </c:pt>
+                <c:pt idx="9">
+                  <c:v>Jul 25</c:v>
+                </c:pt>
+                <c:pt idx="10">
+                  <c:v>Aug 25</c:v>
+                </c:pt>
+                <c:pt idx="11">
+                  <c:v>Sep 25</c:v>
+                </c:pt>
+                <c:pt idx="12">
+                  <c:v>Oct 25</c:v>
+                </c:pt>
+                <c:pt idx="13">
+                  <c:v>Nov 25</c:v>
+                </c:pt>
+                <c:pt idx="14">
+                  <c:v>Dec 25</c:v>
+                </c:pt>
+                <c:pt idx="15">
+                  <c:v>Jan 26</c:v>
+                </c:pt>
+              </c:strCache>
+            </c:strRef>
+          </c:cat>
+          <c:val>
+            <c:numRef>
+              <c:f>Sheet1!$B$2:$B$17</c:f>
+              <c:numCache>
+                <c:formatCode>0"¢";[Red](0"¢")</c:formatCode>
+                <c:ptCount val="16"/>
+                <c:pt idx="0">
+                  <c:v>14</c:v>
+                </c:pt>
+                <c:pt idx="1">
+                  <c:v>18</c:v>
+                </c:pt>
+                <c:pt idx="2">
+                  <c:v>18</c:v>
+                </c:pt>
+                <c:pt idx="3">
+                  <c:v>18</c:v>
+                </c:pt>
+                <c:pt idx="4">
+                  <c:v>14</c:v>
+                </c:pt>
+                <c:pt idx="5">
+                  <c:v>14</c:v>
+                </c:pt>
+                <c:pt idx="6">
+                  <c:v>14</c:v>
+                </c:pt>
+                <c:pt idx="7">
+                  <c:v>14</c:v>
+                </c:pt>
+                <c:pt idx="8">
+                  <c:v>14</c:v>
+                </c:pt>
+                <c:pt idx="9">
+                  <c:v>16</c:v>
+                </c:pt>
+                <c:pt idx="10">
+                  <c:v>14</c:v>
+                </c:pt>
+                <c:pt idx="11">
+                  <c:v>14</c:v>
+                </c:pt>
+                <c:pt idx="12">
+                  <c:v>14</c:v>
+                </c:pt>
+                <c:pt idx="13">
+                  <c:v>17</c:v>
+                </c:pt>
+                <c:pt idx="14">
+                  <c:v>17</c:v>
+                </c:pt>
+                <c:pt idx="15">
+                  <c:v>17</c:v>
+                </c:pt>
+              </c:numCache>
+            </c:numRef>
+          </c:val>
+        </c:ser>
+        <c:dLbls>
+          <c:showLegendKey val="0"/>
+          <c:showVal val="0"/>
+          <c:showCatName val="0"/>
+          <c:showSerName val="0"/>
+          <c:showPercent val="0"/>
+          <c:showBubbleSize val="0"/>
+        </c:dLbls>
+        <c:axId val="-2101159928"/>
+        <c:axId val="-2100718248"/>
+      </c:areaChart>
+      <c:catAx>
+        <c:axId val="-2101159928"/>
+        <c:scaling>
+          <c:orientation val="minMax"/>
+        </c:scaling>
+        <c:delete val="0"/>
+        <c:axPos val="b"/>
+        <c:numFmt formatCode="General" sourceLinked="1"/>
+        <c:majorTickMark val="out"/>
+        <c:minorTickMark val="none"/>
+        <c:tickLblPos val="nextTo"/>
+        <c:txPr>
+          <a:bodyPr/>
+          <a:lstStyle/>
+          <a:p>
+            <a:pPr>
+              <a:defRPr sz="1000"/>
+            </a:pPr>
+          </a:p>
+        </c:txPr>
+        <c:crossAx val="-2100718248"/>
+        <c:crosses val="autoZero"/>
+        <c:auto val="1"/>
+        <c:lblAlgn val="ctr"/>
+        <c:lblOffset val="100"/>
+        <c:tickLblSkip val="2"/>
+        <c:noMultiLvlLbl val="0"/>
+      </c:catAx>
+      <c:valAx>
+        <c:axId val="-2100718248"/>
+        <c:scaling>
+          <c:orientation val="minMax"/>
+          <c:max val="20.0"/>
+          <c:min val="0.0"/>
+        </c:scaling>
+        <c:delete val="0"/>
+        <c:axPos val="l"/>
+        <c:majorGridlines>
+          <c:spPr>
+            <a:ln>
+              <a:solidFill>
+                <a:srgbClr val="E6EAE7"/>
+              </a:solidFill>
+            </a:ln>
+          </c:spPr>
+        </c:majorGridlines>
+        <c:numFmt formatCode="0&quot;¢&quot;;[Red](0&quot;¢&quot;)" sourceLinked="0"/>
+        <c:majorTickMark val="out"/>
+        <c:minorTickMark val="none"/>
+        <c:tickLblPos val="nextTo"/>
+        <c:spPr>
+          <a:ln>
+            <a:noFill/>
+          </a:ln>
+        </c:spPr>
+        <c:txPr>
+          <a:bodyPr/>
+          <a:lstStyle/>
+          <a:p>
+            <a:pPr>
+              <a:defRPr sz="1000"/>
+            </a:pPr>
+          </a:p>
+        </c:txPr>
+        <c:crossAx val="-2101159928"/>
+        <c:crosses val="autoZero"/>
+        <c:crossBetween val="midCat"/>
+        <c:majorUnit val="5.0"/>
+      </c:valAx>
+    </c:plotArea>
+    <c:plotVisOnly val="1"/>
+    <c:dispBlanksAs val="zero"/>
+    <c:showDLblsOverMax val="0"/>
+  </c:chart>
+  <c:txPr>
+    <a:bodyPr/>
+    <a:lstStyle/>
+    <a:p>
+      <a:pPr>
+        <a:defRPr sz="1800">
+          <a:latin typeface="Roboto"/>
+        </a:defRPr>
+      </a:pPr>
+      <a:endParaRPr/>
+    </a:p>
+  </c:txPr>
+  <c:externalData r:id="rId1">
+    <c:autoUpdate val="0"/>
+  </c:externalData>
+</c:chartSpace>
+</file>
+
+<file path=ppt/charts/chart4.xml><?xml version="1.0" encoding="utf-8"?>
+<c:chartSpace xmlns:c="http://schemas.openxmlformats.org/drawingml/2006/chart" xmlns:a="http://schemas.openxmlformats.org/drawingml/2006/main" xmlns:r="http://schemas.openxmlformats.org/officeDocument/2006/relationships">
+  <c:date1904 val="0"/>
+  <c:roundedCorners val="0"/>
+  <c:chart>
+    <c:autoTitleDeleted val="1"/>
+    <c:plotArea>
+      <c:layout>
+        <c:manualLayout>
+          <c:layoutTarget val="inner"/>
+          <c:xMode val="edge"/>
+          <c:yMode val="edge"/>
+          <c:x val="0.11"/>
+          <c:y val="0.05"/>
+          <c:w val="0.86"/>
+          <c:h val="0.8"/>
+        </c:manualLayout>
+      </c:layout>
+      <c:areaChart>
+        <c:grouping val="standard"/>
+        <c:varyColors val="0"/>
+        <c:ser>
+          <c:idx val="0"/>
+          <c:order val="0"/>
+          <c:tx>
+            <c:strRef>
+              <c:f>Sheet1!$B$1</c:f>
+              <c:strCache>
+                <c:ptCount val="1"/>
+                <c:pt idx="0">
+                  <c:v>Cents per $1</c:v>
+                </c:pt>
+              </c:strCache>
+            </c:strRef>
+          </c:tx>
+          <c:spPr>
+            <a:solidFill>
+              <a:srgbClr val="0E9F6E">
+                <a:alpha val="25000"/>
+              </a:srgbClr>
+            </a:solidFill>
+            <a:ln w="31750">
+              <a:solidFill>
+                <a:srgbClr val="0E9F6E"/>
+              </a:solidFill>
+            </a:ln>
+          </c:spPr>
+          <c:cat>
+            <c:strRef>
+              <c:f>Sheet1!$A$2:$A$4</c:f>
+              <c:strCache>
+                <c:ptCount val="3"/>
+                <c:pt idx="0">
+                  <c:v>Dec 24</c:v>
+                </c:pt>
+                <c:pt idx="1">
+                  <c:v>Sep 25</c:v>
+                </c:pt>
+                <c:pt idx="2">
+                  <c:v>Dec 25</c:v>
+                </c:pt>
+              </c:strCache>
+            </c:strRef>
+          </c:cat>
+          <c:val>
+            <c:numRef>
+              <c:f>Sheet1!$B$2:$B$4</c:f>
+              <c:numCache>
+                <c:formatCode>0"¢";[Red](0"¢")</c:formatCode>
+                <c:ptCount val="3"/>
+                <c:pt idx="0">
+                  <c:v>42</c:v>
+                </c:pt>
+                <c:pt idx="1">
+                  <c:v>41</c:v>
+                </c:pt>
+                <c:pt idx="2">
+                  <c:v>42</c:v>
+                </c:pt>
+              </c:numCache>
+            </c:numRef>
+          </c:val>
+        </c:ser>
+        <c:dLbls>
+          <c:showLegendKey val="0"/>
+          <c:showVal val="0"/>
+          <c:showCatName val="0"/>
+          <c:showSerName val="0"/>
+          <c:showPercent val="0"/>
+          <c:showBubbleSize val="0"/>
+        </c:dLbls>
+        <c:axId val="-2101159928"/>
+        <c:axId val="-2100718248"/>
+      </c:areaChart>
+      <c:catAx>
+        <c:axId val="-2101159928"/>
+        <c:scaling>
+          <c:orientation val="minMax"/>
+        </c:scaling>
+        <c:delete val="0"/>
+        <c:axPos val="b"/>
+        <c:numFmt formatCode="General" sourceLinked="1"/>
+        <c:majorTickMark val="out"/>
+        <c:minorTickMark val="none"/>
+        <c:tickLblPos val="nextTo"/>
+        <c:txPr>
+          <a:bodyPr/>
+          <a:lstStyle/>
+          <a:p>
+            <a:pPr>
+              <a:defRPr sz="1000"/>
+            </a:pPr>
+          </a:p>
+        </c:txPr>
+        <c:crossAx val="-2100718248"/>
+        <c:crosses val="autoZero"/>
+        <c:auto val="1"/>
+        <c:lblAlgn val="ctr"/>
+        <c:lblOffset val="100"/>
+        <c:tickLblSkip val="1"/>
+        <c:noMultiLvlLbl val="0"/>
+      </c:catAx>
+      <c:valAx>
+        <c:axId val="-2100718248"/>
+        <c:scaling>
+          <c:orientation val="minMax"/>
+          <c:max val="50.0"/>
+          <c:min val="0.0"/>
+        </c:scaling>
+        <c:delete val="0"/>
+        <c:axPos val="l"/>
+        <c:majorGridlines>
+          <c:spPr>
+            <a:ln>
+              <a:solidFill>
+                <a:srgbClr val="E6EAE7"/>
+              </a:solidFill>
+            </a:ln>
+          </c:spPr>
+        </c:majorGridlines>
+        <c:numFmt formatCode="0&quot;¢&quot;;[Red](0&quot;¢&quot;)" sourceLinked="0"/>
+        <c:majorTickMark val="out"/>
+        <c:minorTickMark val="none"/>
+        <c:tickLblPos val="nextTo"/>
+        <c:spPr>
+          <a:ln>
+            <a:noFill/>
+          </a:ln>
+        </c:spPr>
+        <c:txPr>
+          <a:bodyPr/>
+          <a:lstStyle/>
+          <a:p>
+            <a:pPr>
+              <a:defRPr sz="1000"/>
+            </a:pPr>
+          </a:p>
+        </c:txPr>
+        <c:crossAx val="-2101159928"/>
+        <c:crosses val="autoZero"/>
+        <c:crossBetween val="midCat"/>
+        <c:majorUnit val="10.0"/>
+      </c:valAx>
+    </c:plotArea>
+    <c:plotVisOnly val="1"/>
+    <c:dispBlanksAs val="zero"/>
+    <c:showDLblsOverMax val="0"/>
+  </c:chart>
+  <c:txPr>
+    <a:bodyPr/>
+    <a:lstStyle/>
+    <a:p>
+      <a:pPr>
+        <a:defRPr sz="1800">
+          <a:latin typeface="Roboto"/>
+        </a:defRPr>
+      </a:pPr>
+      <a:endParaRPr/>
+    </a:p>
+  </c:txPr>
+  <c:externalData r:id="rId1">
+    <c:autoUpdate val="0"/>
+  </c:externalData>
+</c:chartSpace>
+</file>
+
+<file path=ppt/notesMasters/notesMaster1.xml><?xml version="1.0" encoding="utf-8"?>
+<p:notesMaster xmlns:a="http://schemas.openxmlformats.org/drawingml/2006/main" xmlns:p="http://schemas.openxmlformats.org/presentationml/2006/main" xmlns:r="http://schemas.openxmlformats.org/officeDocument/2006/relationships">
+  <p:cSld>
+    <p:bg>
+      <p:bgRef idx="1001">
+        <a:schemeClr val="bg1"/>
+      </p:bgRef>
+    </p:bg>
+    <p:spTree>
+      <p:nvGrpSpPr>
+        <p:cNvPr id="1" name=""/>
+        <p:cNvGrpSpPr/>
+        <p:nvPr/>
+      </p:nvGrpSpPr>
+      <p:grpSpPr>
+        <a:xfrm>
+          <a:off x="0" y="0"/>
+          <a:ext cx="0" cy="0"/>
+          <a:chOff x="0" y="0"/>
+          <a:chExt cx="0" cy="0"/>
+        </a:xfrm>
+      </p:grpSpPr>
+      <p:sp>
+        <p:nvSpPr>
+          <p:cNvPr id="2" name="Header Placeholder 1"/>
+          <p:cNvSpPr>
+            <a:spLocks noGrp="1"/>
+          </p:cNvSpPr>
+          <p:nvPr>
+            <p:ph type="hdr" sz="quarter"/>
+          </p:nvPr>
+        </p:nvSpPr>
+        <p:spPr>
+          <a:xfrm>
+            <a:off x="0" y="0"/>
+            <a:ext cx="2971800" cy="457200"/>
+          </a:xfrm>
+          <a:prstGeom prst="rect">
+            <a:avLst/>
+          </a:prstGeom>
+        </p:spPr>
+        <p:txBody>
+          <a:bodyPr vert="horz" lIns="91440" tIns="45720" rIns="91440" bIns="45720" rtlCol="0"/>
+          <a:lstStyle>
+            <a:lvl1pPr algn="l">
+              <a:defRPr sz="1200"/>
+            </a:lvl1pPr>
+          </a:lstStyle>
+          <a:p>
+            <a:endParaRPr lang="en-US"/>
+          </a:p>
+        </p:txBody>
+      </p:sp>
+      <p:sp>
+        <p:nvSpPr>
+          <p:cNvPr id="3" name="Date Placeholder 2"/>
+          <p:cNvSpPr>
+            <a:spLocks noGrp="1"/>
+          </p:cNvSpPr>
+          <p:nvPr>
+            <p:ph type="dt" idx="1"/>
+          </p:nvPr>
+        </p:nvSpPr>
+        <p:spPr>
+          <a:xfrm>
+            <a:off x="3884613" y="0"/>
+            <a:ext cx="2971800" cy="457200"/>
+          </a:xfrm>
+          <a:prstGeom prst="rect">
+            <a:avLst/>
+          </a:prstGeom>
+        </p:spPr>
+        <p:txBody>
+          <a:bodyPr vert="horz" lIns="91440" tIns="45720" rIns="91440" bIns="45720" rtlCol="0"/>
+          <a:lstStyle>
+            <a:lvl1pPr algn="r">
+              <a:defRPr sz="1200"/>
+            </a:lvl1pPr>
+          </a:lstStyle>
+          <a:p>
+            <a:fld id="{0F89C1C7-3DCD-1040-A9CF-14679D8B5DDD}" type="datetimeFigureOut">
+              <a:rPr lang="en-US" smtClean="0"/>
+              <a:t>10/17/16</a:t>
+            </a:fld>
+            <a:endParaRPr lang="en-US"/>
+          </a:p>
+        </p:txBody>
+      </p:sp>
+      <p:sp>
+        <p:nvSpPr>
+          <p:cNvPr id="4" name="Slide Image Placeholder 3"/>
+          <p:cNvSpPr>
+            <a:spLocks noGrp="1" noRot="1" noChangeAspect="1"/>
+          </p:cNvSpPr>
+          <p:nvPr>
+            <p:ph type="sldImg" idx="2"/>
+          </p:nvPr>
+        </p:nvSpPr>
+        <p:spPr>
+          <a:xfrm>
+            <a:off x="1143000" y="685800"/>
+            <a:ext cx="4572000" cy="3429000"/>
+          </a:xfrm>
+          <a:prstGeom prst="rect">
+            <a:avLst/>
+          </a:prstGeom>
+          <a:noFill/>
+          <a:ln w="12700">
+            <a:solidFill>
+              <a:prstClr val="black"/>
+            </a:solidFill>
+          </a:ln>
+        </p:spPr>
+        <p:txBody>
+          <a:bodyPr vert="horz" lIns="91440" tIns="45720" rIns="91440" bIns="45720" rtlCol="0" anchor="ctr"/>
+          <a:lstStyle/>
+          <a:p>
+            <a:endParaRPr lang="en-US"/>
+          </a:p>
+        </p:txBody>
+      </p:sp>
+      <p:sp>
+        <p:nvSpPr>
+          <p:cNvPr id="5" name="Notes Placeholder 4"/>
+          <p:cNvSpPr>
+            <a:spLocks noGrp="1"/>
+          </p:cNvSpPr>
+          <p:nvPr>
+            <p:ph type="body" sz="quarter" idx="3"/>
+          </p:nvPr>
+        </p:nvSpPr>
+        <p:spPr>
+          <a:xfrm>
+            <a:off x="685800" y="4343400"/>
+            <a:ext cx="5486400" cy="4114800"/>
+          </a:xfrm>
+          <a:prstGeom prst="rect">
+            <a:avLst/>
+          </a:prstGeom>
+        </p:spPr>
+        <p:txBody>
+          <a:bodyPr vert="horz" lIns="91440" tIns="45720" rIns="91440" bIns="45720" rtlCol="0"/>
+          <a:lstStyle/>
+          <a:p>
+            <a:pPr lvl="0"/>
+            <a:r>
+              <a:rPr lang="en-US" smtClean="0"/>
+              <a:t>Click to edit Master text styles</a:t>
+            </a:r>
+          </a:p>
+          <a:p>
+            <a:pPr lvl="1"/>
+            <a:r>
+              <a:rPr lang="en-US" smtClean="0"/>
+              <a:t>Second level</a:t>
+            </a:r>
+          </a:p>
+          <a:p>
+            <a:pPr lvl="2"/>
+            <a:r>
+              <a:rPr lang="en-US" smtClean="0"/>
+              <a:t>Third level</a:t>
+            </a:r>
+          </a:p>
+          <a:p>
+            <a:pPr lvl="3"/>
+            <a:r>
+              <a:rPr lang="en-US" smtClean="0"/>
+              <a:t>Fourth level</a:t>
+            </a:r>
+          </a:p>
+          <a:p>
+            <a:pPr lvl="4"/>
+            <a:r>
+              <a:rPr lang="en-US" smtClean="0"/>
+              <a:t>Fifth level</a:t>
+            </a:r>
+            <a:endParaRPr lang="en-US"/>
+          </a:p>
+        </p:txBody>
+      </p:sp>
+      <p:sp>
+        <p:nvSpPr>
+          <p:cNvPr id="6" name="Footer Placeholder 5"/>
+          <p:cNvSpPr>
+            <a:spLocks noGrp="1"/>
+          </p:cNvSpPr>
+          <p:nvPr>
+            <p:ph type="ftr" sz="quarter" idx="4"/>
+          </p:nvPr>
+        </p:nvSpPr>
+        <p:spPr>
+          <a:xfrm>
+            <a:off x="0" y="8685213"/>
+            <a:ext cx="2971800" cy="457200"/>
+          </a:xfrm>
+          <a:prstGeom prst="rect">
+            <a:avLst/>
+          </a:prstGeom>
+        </p:spPr>
+        <p:txBody>
+          <a:bodyPr vert="horz" lIns="91440" tIns="45720" rIns="91440" bIns="45720" rtlCol="0" anchor="b"/>
+          <a:lstStyle>
+            <a:lvl1pPr algn="l">
+              <a:defRPr sz="1200"/>
+            </a:lvl1pPr>
+          </a:lstStyle>
+          <a:p>
+            <a:endParaRPr lang="en-US"/>
+          </a:p>
+        </p:txBody>
+      </p:sp>
+      <p:sp>
+        <p:nvSpPr>
+          <p:cNvPr id="7" name="Slide Number Placeholder 6"/>
+          <p:cNvSpPr>
+            <a:spLocks noGrp="1"/>
+          </p:cNvSpPr>
+          <p:nvPr>
+            <p:ph type="sldNum" sz="quarter" idx="5"/>
+          </p:nvPr>
+        </p:nvSpPr>
+        <p:spPr>
+          <a:xfrm>
+            <a:off x="3884613" y="8685213"/>
+            <a:ext cx="2971800" cy="457200"/>
+          </a:xfrm>
+          <a:prstGeom prst="rect">
+            <a:avLst/>
+          </a:prstGeom>
+        </p:spPr>
+        <p:txBody>
+          <a:bodyPr vert="horz" lIns="91440" tIns="45720" rIns="91440" bIns="45720" rtlCol="0" anchor="b"/>
+          <a:lstStyle>
+            <a:lvl1pPr algn="r">
+              <a:defRPr sz="1200"/>
+            </a:lvl1pPr>
+          </a:lstStyle>
+          <a:p>
+            <a:fld id="{BB5E49A5-4136-284D-997B-48E1D791AD67}" type="slidenum">
+              <a:rPr lang="en-US" smtClean="0"/>
+              <a:t>‹#›</a:t>
+            </a:fld>
+            <a:endParaRPr lang="en-US"/>
+          </a:p>
+        </p:txBody>
+      </p:sp>
+    </p:spTree>
+    <p:extLst>
+      <p:ext uri="{BB962C8B-B14F-4D97-AF65-F5344CB8AC3E}">
+        <p14:creationId xmlns:p14="http://schemas.microsoft.com/office/powerpoint/2010/main" val="2623252185"/>
+      </p:ext>
+    </p:extLst>
+  </p:cSld>
+  <p:clrMap bg1="lt1" tx1="dk1" bg2="lt2" tx2="dk2" accent1="accent1" accent2="accent2" accent3="accent3" accent4="accent4" accent5="accent5" accent6="accent6" hlink="hlink" folHlink="folHlink"/>
+  <p:notesStyle>
+    <a:lvl1pPr marL="0" algn="l" defTabSz="457200" rtl="0" eaLnBrk="1" latinLnBrk="0" hangingPunct="1">
+      <a:defRPr sz="1200" kern="1200">
+        <a:solidFill>
+          <a:schemeClr val="tx1"/>
+        </a:solidFill>
+        <a:latin typeface="+mn-lt"/>
+        <a:ea typeface="+mn-ea"/>
+        <a:cs typeface="+mn-cs"/>
+      </a:defRPr>
+    </a:lvl1pPr>
+    <a:lvl2pPr marL="457200" algn="l" defTabSz="457200" rtl="0" eaLnBrk="1" latinLnBrk="0" hangingPunct="1">
+      <a:defRPr sz="1200" kern="1200">
+        <a:solidFill>
+          <a:schemeClr val="tx1"/>
+        </a:solidFill>
+        <a:latin typeface="+mn-lt"/>
+        <a:ea typeface="+mn-ea"/>
+        <a:cs typeface="+mn-cs"/>
+      </a:defRPr>
+    </a:lvl2pPr>
+    <a:lvl3pPr marL="914400" algn="l" defTabSz="457200" rtl="0" eaLnBrk="1" latinLnBrk="0" hangingPunct="1">
+      <a:defRPr sz="1200" kern="1200">
+        <a:solidFill>
+          <a:schemeClr val="tx1"/>
+        </a:solidFill>
+        <a:latin typeface="+mn-lt"/>
+        <a:ea typeface="+mn-ea"/>
+        <a:cs typeface="+mn-cs"/>
+      </a:defRPr>
+    </a:lvl3pPr>
+    <a:lvl4pPr marL="1371600" algn="l" defTabSz="457200" rtl="0" eaLnBrk="1" latinLnBrk="0" hangingPunct="1">
+      <a:defRPr sz="1200" kern="1200">
+        <a:solidFill>
+          <a:schemeClr val="tx1"/>
+        </a:solidFill>
+        <a:latin typeface="+mn-lt"/>
+        <a:ea typeface="+mn-ea"/>
+        <a:cs typeface="+mn-cs"/>
+      </a:defRPr>
+    </a:lvl4pPr>
+    <a:lvl5pPr marL="1828800" algn="l" defTabSz="457200" rtl="0" eaLnBrk="1" latinLnBrk="0" hangingPunct="1">
+      <a:defRPr sz="1200" kern="1200">
+        <a:solidFill>
+          <a:schemeClr val="tx1"/>
+        </a:solidFill>
+        <a:latin typeface="+mn-lt"/>
+        <a:ea typeface="+mn-ea"/>
+        <a:cs typeface="+mn-cs"/>
+      </a:defRPr>
+    </a:lvl5pPr>
+    <a:lvl6pPr marL="2286000" algn="l" defTabSz="457200" rtl="0" eaLnBrk="1" latinLnBrk="0" hangingPunct="1">
+      <a:defRPr sz="1200" kern="1200">
+        <a:solidFill>
+          <a:schemeClr val="tx1"/>
+        </a:solidFill>
+        <a:latin typeface="+mn-lt"/>
+        <a:ea typeface="+mn-ea"/>
+        <a:cs typeface="+mn-cs"/>
+      </a:defRPr>
+    </a:lvl6pPr>
+    <a:lvl7pPr marL="2743200" algn="l" defTabSz="457200" rtl="0" eaLnBrk="1" latinLnBrk="0" hangingPunct="1">
+      <a:defRPr sz="1200" kern="1200">
+        <a:solidFill>
+          <a:schemeClr val="tx1"/>
+        </a:solidFill>
+        <a:latin typeface="+mn-lt"/>
+        <a:ea typeface="+mn-ea"/>
+        <a:cs typeface="+mn-cs"/>
+      </a:defRPr>
+    </a:lvl7pPr>
+    <a:lvl8pPr marL="3200400" algn="l" defTabSz="457200" rtl="0" eaLnBrk="1" latinLnBrk="0" hangingPunct="1">
+      <a:defRPr sz="1200" kern="1200">
+        <a:solidFill>
+          <a:schemeClr val="tx1"/>
+        </a:solidFill>
+        <a:latin typeface="+mn-lt"/>
+        <a:ea typeface="+mn-ea"/>
+        <a:cs typeface="+mn-cs"/>
+      </a:defRPr>
+    </a:lvl8pPr>
+    <a:lvl9pPr marL="3657600" algn="l" defTabSz="457200" rtl="0" eaLnBrk="1" latinLnBrk="0" hangingPunct="1">
+      <a:defRPr sz="1200" kern="1200">
+        <a:solidFill>
+          <a:schemeClr val="tx1"/>
+        </a:solidFill>
+        <a:latin typeface="+mn-lt"/>
+        <a:ea typeface="+mn-ea"/>
+        <a:cs typeface="+mn-cs"/>
+      </a:defRPr>
+    </a:lvl9pPr>
+  </p:notesStyle>
+</p:notesMaster>
+</file>
+
+<file path=ppt/notesSlides/notesSlide1.xml><?xml version="1.0" encoding="utf-8"?>
+<p:notes xmlns:a="http://schemas.openxmlformats.org/drawingml/2006/main" xmlns:p="http://schemas.openxmlformats.org/presentationml/2006/main" xmlns:r="http://schemas.openxmlformats.org/officeDocument/2006/relationships">
+  <p:cSld>
+    <p:spTree>
+      <p:nvGrpSpPr>
+        <p:cNvPr id="1" name=""/>
+        <p:cNvGrpSpPr/>
+        <p:nvPr/>
+      </p:nvGrpSpPr>
+      <p:grpSpPr>
+        <a:xfrm>
+          <a:off x="0" y="0"/>
+          <a:ext cx="0" cy="0"/>
+          <a:chOff x="0" y="0"/>
+          <a:chExt cx="0" cy="0"/>
+        </a:xfrm>
+      </p:grpSpPr>
+      <p:sp>
+        <p:nvSpPr>
+          <p:cNvPr id="2" name="Slide Image Placeholder 1"/>
+          <p:cNvSpPr>
+            <a:spLocks noGrp="1"/>
+          </p:cNvSpPr>
+          <p:nvPr>
+            <p:ph type="sldImg" idx="2"/>
+          </p:nvPr>
+        </p:nvSpPr>
+        <p:spPr/>
+      </p:sp>
+      <p:sp>
+        <p:nvSpPr>
+          <p:cNvPr id="3" name="Notes Placeholder 2"/>
+          <p:cNvSpPr>
+            <a:spLocks noGrp="1"/>
+          </p:cNvSpPr>
+          <p:nvPr>
+            <p:ph type="body" idx="3" sz="quarter"/>
+          </p:nvPr>
+        </p:nvSpPr>
+        <p:spPr/>
+        <p:txBody>
+          <a:bodyPr/>
+          <a:lstStyle/>
+          <a:p>
+            <a:r>
+              <a:t>What does it cost to raise a dollar?. Sample Community Services Ltd. Period: January 2026. What fundraising costs (grant writing, donor campaigns, events) for every dollar it brings in. Pick a source and every number, chart and note follows it.</a:t>
+            </a:r>
+          </a:p>
+        </p:txBody>
+      </p:sp>
+      <p:sp>
+        <p:nvSpPr>
+          <p:cNvPr id="4" name="Slide Number Placeholder 3"/>
+          <p:cNvSpPr>
+            <a:spLocks noGrp="1"/>
+          </p:cNvSpPr>
+          <p:nvPr>
+            <p:ph type="sldNum" idx="5" sz="quarter"/>
+          </p:nvPr>
+        </p:nvSpPr>
+        <p:spPr/>
+      </p:sp>
+    </p:spTree>
+  </p:cSld>
+  <p:clrMapOvr>
+    <a:masterClrMapping/>
+  </p:clrMapOvr>
+</p:notes>
+</file>
+
+<file path=ppt/notesSlides/notesSlide2.xml><?xml version="1.0" encoding="utf-8"?>
+<p:notes xmlns:a="http://schemas.openxmlformats.org/drawingml/2006/main" xmlns:p="http://schemas.openxmlformats.org/presentationml/2006/main" xmlns:r="http://schemas.openxmlformats.org/officeDocument/2006/relationships">
+  <p:cSld>
+    <p:spTree>
+      <p:nvGrpSpPr>
+        <p:cNvPr id="1" name=""/>
+        <p:cNvGrpSpPr/>
+        <p:nvPr/>
+      </p:nvGrpSpPr>
+      <p:grpSpPr>
+        <a:xfrm>
+          <a:off x="0" y="0"/>
+          <a:ext cx="0" cy="0"/>
+          <a:chOff x="0" y="0"/>
+          <a:chExt cx="0" cy="0"/>
+        </a:xfrm>
+      </p:grpSpPr>
+      <p:sp>
+        <p:nvSpPr>
+          <p:cNvPr id="2" name="Slide Image Placeholder 1"/>
+          <p:cNvSpPr>
+            <a:spLocks noGrp="1"/>
+          </p:cNvSpPr>
+          <p:nvPr>
+            <p:ph type="sldImg" idx="2"/>
+          </p:nvPr>
+        </p:nvSpPr>
+        <p:spPr/>
+      </p:sp>
+      <p:sp>
+        <p:nvSpPr>
+          <p:cNvPr id="3" name="Notes Placeholder 2"/>
+          <p:cNvSpPr>
+            <a:spLocks noGrp="1"/>
+          </p:cNvSpPr>
+          <p:nvPr>
+            <p:ph type="body" idx="3" sz="quarter"/>
+          </p:nvPr>
+        </p:nvSpPr>
+        <p:spPr/>
+        <p:txBody>
+          <a:bodyPr/>
+          <a:lstStyle/>
+          <a:p>
+            <a:r>
+              <a:t>All fundraising. January · all fundraising: 13¢; Year to date (Jul to Jan 2026): 14¢. January cost 13¢ to raise each dollar, against 14¢ in December. This financial year to date it has cost 14¢ a dollar. The year-to-date figure is steadier than single months: events make some months jump. Pick a source above to see which one moves it.</a:t>
+            </a:r>
+          </a:p>
+        </p:txBody>
+      </p:sp>
+      <p:sp>
+        <p:nvSpPr>
+          <p:cNvPr id="4" name="Slide Number Placeholder 3"/>
+          <p:cNvSpPr>
+            <a:spLocks noGrp="1"/>
+          </p:cNvSpPr>
+          <p:nvPr>
+            <p:ph type="sldNum" idx="5" sz="quarter"/>
+          </p:nvPr>
+        </p:nvSpPr>
+        <p:spPr/>
+      </p:sp>
+    </p:spTree>
+  </p:cSld>
+  <p:clrMapOvr>
+    <a:masterClrMapping/>
+  </p:clrMapOvr>
+</p:notes>
+</file>
+
+<file path=ppt/notesSlides/notesSlide3.xml><?xml version="1.0" encoding="utf-8"?>
+<p:notes xmlns:a="http://schemas.openxmlformats.org/drawingml/2006/main" xmlns:p="http://schemas.openxmlformats.org/presentationml/2006/main" xmlns:r="http://schemas.openxmlformats.org/officeDocument/2006/relationships">
+  <p:cSld>
+    <p:spTree>
+      <p:nvGrpSpPr>
+        <p:cNvPr id="1" name=""/>
+        <p:cNvGrpSpPr/>
+        <p:nvPr/>
+      </p:nvGrpSpPr>
+      <p:grpSpPr>
+        <a:xfrm>
+          <a:off x="0" y="0"/>
+          <a:ext cx="0" cy="0"/>
+          <a:chOff x="0" y="0"/>
+          <a:chExt cx="0" cy="0"/>
+        </a:xfrm>
+      </p:grpSpPr>
+      <p:sp>
+        <p:nvSpPr>
+          <p:cNvPr id="2" name="Slide Image Placeholder 1"/>
+          <p:cNvSpPr>
+            <a:spLocks noGrp="1"/>
+          </p:cNvSpPr>
+          <p:nvPr>
+            <p:ph type="sldImg" idx="2"/>
+          </p:nvPr>
+        </p:nvSpPr>
+        <p:spPr/>
+      </p:sp>
+      <p:sp>
+        <p:nvSpPr>
+          <p:cNvPr id="3" name="Notes Placeholder 2"/>
+          <p:cNvSpPr>
+            <a:spLocks noGrp="1"/>
+          </p:cNvSpPr>
+          <p:nvPr>
+            <p:ph type="body" idx="3" sz="quarter"/>
+          </p:nvPr>
+        </p:nvSpPr>
+        <p:spPr/>
+        <p:txBody>
+          <a:bodyPr/>
+          <a:lstStyle/>
+          <a:p>
+            <a:r>
+              <a:t>Grants. January · Grants: 12¢; Year to date (Jul to Jan 2026): 11¢. Grants cost 11¢ to raise each dollar this financial year to date ($49,700 of grant writing and reporting for $450,671). Usually the cheapest money to raise, as long as the time that goes into applications and acquittals is protected.</a:t>
+            </a:r>
+          </a:p>
+        </p:txBody>
+      </p:sp>
+      <p:sp>
+        <p:nvSpPr>
+          <p:cNvPr id="4" name="Slide Number Placeholder 3"/>
+          <p:cNvSpPr>
+            <a:spLocks noGrp="1"/>
+          </p:cNvSpPr>
+          <p:nvPr>
+            <p:ph type="sldNum" idx="5" sz="quarter"/>
+          </p:nvPr>
+        </p:nvSpPr>
+        <p:spPr/>
+      </p:sp>
+    </p:spTree>
+  </p:cSld>
+  <p:clrMapOvr>
+    <a:masterClrMapping/>
+  </p:clrMapOvr>
+</p:notes>
+</file>
+
+<file path=ppt/notesSlides/notesSlide4.xml><?xml version="1.0" encoding="utf-8"?>
+<p:notes xmlns:a="http://schemas.openxmlformats.org/drawingml/2006/main" xmlns:p="http://schemas.openxmlformats.org/presentationml/2006/main" xmlns:r="http://schemas.openxmlformats.org/officeDocument/2006/relationships">
+  <p:cSld>
+    <p:spTree>
+      <p:nvGrpSpPr>
+        <p:cNvPr id="1" name=""/>
+        <p:cNvGrpSpPr/>
+        <p:nvPr/>
+      </p:nvGrpSpPr>
+      <p:grpSpPr>
+        <a:xfrm>
+          <a:off x="0" y="0"/>
+          <a:ext cx="0" cy="0"/>
+          <a:chOff x="0" y="0"/>
+          <a:chExt cx="0" cy="0"/>
+        </a:xfrm>
+      </p:grpSpPr>
+      <p:sp>
+        <p:nvSpPr>
+          <p:cNvPr id="2" name="Slide Image Placeholder 1"/>
+          <p:cNvSpPr>
+            <a:spLocks noGrp="1"/>
+          </p:cNvSpPr>
+          <p:nvPr>
+            <p:ph type="sldImg" idx="2"/>
+          </p:nvPr>
+        </p:nvSpPr>
+        <p:spPr/>
+      </p:sp>
+      <p:sp>
+        <p:nvSpPr>
+          <p:cNvPr id="3" name="Notes Placeholder 2"/>
+          <p:cNvSpPr>
+            <a:spLocks noGrp="1"/>
+          </p:cNvSpPr>
+          <p:nvPr>
+            <p:ph type="body" idx="3" sz="quarter"/>
+          </p:nvPr>
+        </p:nvSpPr>
+        <p:spPr/>
+        <p:txBody>
+          <a:bodyPr/>
+          <a:lstStyle/>
+          <a:p>
+            <a:r>
+              <a:t>Donations. January · Donations: 17¢; Year to date (Jul to Jan 2026): 15¢. Donations cost 15¢ to raise each dollar this financial year to date ($18,500 of donor campaigns for $119,700). Steady and cheap, and untied: the money that builds reserves.</a:t>
+            </a:r>
+          </a:p>
+        </p:txBody>
+      </p:sp>
+      <p:sp>
+        <p:nvSpPr>
+          <p:cNvPr id="4" name="Slide Number Placeholder 3"/>
+          <p:cNvSpPr>
+            <a:spLocks noGrp="1"/>
+          </p:cNvSpPr>
+          <p:nvPr>
+            <p:ph type="sldNum" idx="5" sz="quarter"/>
+          </p:nvPr>
+        </p:nvSpPr>
+        <p:spPr/>
+      </p:sp>
+    </p:spTree>
+  </p:cSld>
+  <p:clrMapOvr>
+    <a:masterClrMapping/>
+  </p:clrMapOvr>
+</p:notes>
+</file>
+
+<file path=ppt/notesSlides/notesSlide5.xml><?xml version="1.0" encoding="utf-8"?>
+<p:notes xmlns:a="http://schemas.openxmlformats.org/drawingml/2006/main" xmlns:p="http://schemas.openxmlformats.org/presentationml/2006/main" xmlns:r="http://schemas.openxmlformats.org/officeDocument/2006/relationships">
+  <p:cSld>
+    <p:spTree>
+      <p:nvGrpSpPr>
+        <p:cNvPr id="1" name=""/>
+        <p:cNvGrpSpPr/>
+        <p:nvPr/>
+      </p:nvGrpSpPr>
+      <p:grpSpPr>
+        <a:xfrm>
+          <a:off x="0" y="0"/>
+          <a:ext cx="0" cy="0"/>
+          <a:chOff x="0" y="0"/>
+          <a:chExt cx="0" cy="0"/>
+        </a:xfrm>
+      </p:grpSpPr>
+      <p:sp>
+        <p:nvSpPr>
+          <p:cNvPr id="2" name="Slide Image Placeholder 1"/>
+          <p:cNvSpPr>
+            <a:spLocks noGrp="1"/>
+          </p:cNvSpPr>
+          <p:nvPr>
+            <p:ph type="sldImg" idx="2"/>
+          </p:nvPr>
+        </p:nvSpPr>
+        <p:spPr/>
+      </p:sp>
+      <p:sp>
+        <p:nvSpPr>
+          <p:cNvPr id="3" name="Notes Placeholder 2"/>
+          <p:cNvSpPr>
+            <a:spLocks noGrp="1"/>
+          </p:cNvSpPr>
+          <p:nvPr>
+            <p:ph type="body" idx="3" sz="quarter"/>
+          </p:nvPr>
+        </p:nvSpPr>
+        <p:spPr/>
+        <p:txBody>
+          <a:bodyPr/>
+          <a:lstStyle/>
+          <a:p>
+            <a:r>
+              <a:t>Fundraising events. January · Fundraising events: –; Year to date (Jul to Jan 2026): 41¢. Fundraising events cost 41¢ to raise each dollar this financial year to date ($17,800 of event costs for $43,000). Usually the dearest money to raise: events are worth counting for what else they bring too (new donors, profile).</a:t>
+            </a:r>
+          </a:p>
+        </p:txBody>
+      </p:sp>
+      <p:sp>
+        <p:nvSpPr>
+          <p:cNvPr id="4" name="Slide Number Placeholder 3"/>
+          <p:cNvSpPr>
+            <a:spLocks noGrp="1"/>
+          </p:cNvSpPr>
+          <p:nvPr>
+            <p:ph type="sldNum" idx="5" sz="quarter"/>
+          </p:nvPr>
+        </p:nvSpPr>
+        <p:spPr/>
+      </p:sp>
+    </p:spTree>
+  </p:cSld>
+  <p:clrMapOvr>
+    <a:masterClrMapping/>
+  </p:clrMapOvr>
+</p:notes>
 </file>
 
 <file path=ppt/slideLayouts/slideLayout1.xml><?xml version="1.0" encoding="utf-8"?>
@@ -3506,7 +4678,44 @@
       <p:grpSpPr/>
       <p:sp>
         <p:nvSpPr>
-          <p:cNvPr id="2" name="Rectangle 1"/>
+          <p:cNvPr id="2" name="Title 1"/>
+          <p:cNvSpPr>
+            <a:spLocks noGrp="1"/>
+          </p:cNvSpPr>
+          <p:nvPr>
+            <p:ph type="ctrTitle"/>
+          </p:nvPr>
+        </p:nvSpPr>
+        <p:spPr>
+          <a:xfrm>
+            <a:off x="457200" y="1965960"/>
+            <a:ext cx="11277295" cy="1097280"/>
+          </a:xfrm>
+        </p:spPr>
+        <p:txBody>
+          <a:bodyPr wrap="square"/>
+          <a:lstStyle/>
+          <a:p>
+            <a:pPr algn="l">
+              <a:defRPr>
+                <a:latin typeface="Roboto"/>
+              </a:defRPr>
+            </a:pPr>
+            <a:r>
+              <a:rPr sz="3400" b="1">
+                <a:solidFill>
+                  <a:srgbClr val="25342A"/>
+                </a:solidFill>
+                <a:latin typeface="Roboto"/>
+              </a:rPr>
+              <a:t>What does it cost to raise a dollar?</a:t>
+            </a:r>
+          </a:p>
+        </p:txBody>
+      </p:sp>
+      <p:sp>
+        <p:nvSpPr>
+          <p:cNvPr id="3" name="Rectangle 2"/>
           <p:cNvSpPr/>
           <p:nvPr/>
         </p:nvSpPr>
@@ -3562,53 +4771,14 @@
       </p:sp>
       <p:sp>
         <p:nvSpPr>
-          <p:cNvPr id="3" name="TextBox 2"/>
-          <p:cNvSpPr txBox="1"/>
-          <p:nvPr/>
-        </p:nvSpPr>
-        <p:spPr>
-          <a:xfrm>
-            <a:off x="1234440" y="658368"/>
-            <a:ext cx="5486400" cy="457200"/>
-          </a:xfrm>
-          <a:prstGeom prst="rect">
-            <a:avLst/>
-          </a:prstGeom>
-          <a:noFill/>
-        </p:spPr>
-        <p:txBody>
-          <a:bodyPr wrap="square">
-            <a:spAutoFit/>
-          </a:bodyPr>
-          <a:lstStyle/>
-          <a:p>
-            <a:pPr>
-              <a:defRPr>
-                <a:latin typeface="Roboto"/>
-              </a:defRPr>
-            </a:pPr>
-            <a:r>
-              <a:rPr sz="1800" b="1">
-                <a:solidFill>
-                  <a:srgbClr val="25342A"/>
-                </a:solidFill>
-                <a:latin typeface="Roboto"/>
-              </a:rPr>
-              <a:t>The Fourth Sheet</a:t>
-            </a:r>
-          </a:p>
-        </p:txBody>
-      </p:sp>
-      <p:sp>
-        <p:nvSpPr>
           <p:cNvPr id="4" name="TextBox 3"/>
           <p:cNvSpPr txBox="1"/>
           <p:nvPr/>
         </p:nvSpPr>
         <p:spPr>
           <a:xfrm>
-            <a:off x="457200" y="1554480"/>
-            <a:ext cx="10972800" cy="365760"/>
+            <a:off x="1234440" y="658368"/>
+            <a:ext cx="5486400" cy="457200"/>
           </a:xfrm>
           <a:prstGeom prst="rect">
             <a:avLst/>
@@ -3616,7 +4786,7 @@
           <a:noFill/>
         </p:spPr>
         <p:txBody>
-          <a:bodyPr wrap="square">
+          <a:bodyPr wrap="square" lIns="45720" rIns="45720">
             <a:spAutoFit/>
           </a:bodyPr>
           <a:lstStyle/>
@@ -3627,13 +4797,13 @@
               </a:defRPr>
             </a:pPr>
             <a:r>
-              <a:rPr sz="1100" b="1">
-                <a:solidFill>
-                  <a:srgbClr val="8A7A52"/>
+              <a:rPr sz="1800" b="1">
+                <a:solidFill>
+                  <a:srgbClr val="25342A"/>
                 </a:solidFill>
                 <a:latin typeface="Roboto"/>
               </a:rPr>
-              <a:t>SAMPLE DATA · invented figures for demonstration</a:t>
+              <a:t>The Fourth Sheet</a:t>
             </a:r>
           </a:p>
         </p:txBody>
@@ -3646,8 +4816,8 @@
         </p:nvSpPr>
         <p:spPr>
           <a:xfrm>
-            <a:off x="457200" y="2011680"/>
-            <a:ext cx="11247120" cy="1097280"/>
+            <a:off x="457200" y="1554480"/>
+            <a:ext cx="10972800" cy="365760"/>
           </a:xfrm>
           <a:prstGeom prst="rect">
             <a:avLst/>
@@ -3655,7 +4825,7 @@
           <a:noFill/>
         </p:spPr>
         <p:txBody>
-          <a:bodyPr wrap="square">
+          <a:bodyPr wrap="square" lIns="45720" rIns="45720">
             <a:spAutoFit/>
           </a:bodyPr>
           <a:lstStyle/>
@@ -3666,13 +4836,13 @@
               </a:defRPr>
             </a:pPr>
             <a:r>
-              <a:rPr sz="3400" b="1">
-                <a:solidFill>
-                  <a:srgbClr val="25342A"/>
+              <a:rPr sz="1100" b="1">
+                <a:solidFill>
+                  <a:srgbClr val="8A7A52"/>
                 </a:solidFill>
                 <a:latin typeface="Roboto"/>
               </a:rPr>
-              <a:t>What does it cost to raise a dollar?</a:t>
+              <a:t>SAMPLE DATA · invented figures for demonstration</a:t>
             </a:r>
           </a:p>
         </p:txBody>
@@ -3686,7 +4856,7 @@
         <p:spPr>
           <a:xfrm>
             <a:off x="457200" y="3154680"/>
-            <a:ext cx="11247120" cy="457200"/>
+            <a:ext cx="11277295" cy="457200"/>
           </a:xfrm>
           <a:prstGeom prst="rect">
             <a:avLst/>
@@ -3694,7 +4864,7 @@
           <a:noFill/>
         </p:spPr>
         <p:txBody>
-          <a:bodyPr wrap="square">
+          <a:bodyPr wrap="square" lIns="45720" rIns="45720">
             <a:spAutoFit/>
           </a:bodyPr>
           <a:lstStyle/>
@@ -3725,7 +4895,7 @@
         <p:spPr>
           <a:xfrm>
             <a:off x="457200" y="3703320"/>
-            <a:ext cx="11247120" cy="1097280"/>
+            <a:ext cx="11277295" cy="535940"/>
           </a:xfrm>
           <a:prstGeom prst="rect">
             <a:avLst/>
@@ -3733,7 +4903,7 @@
           <a:noFill/>
         </p:spPr>
         <p:txBody>
-          <a:bodyPr wrap="square">
+          <a:bodyPr wrap="square" lIns="45720" rIns="45720">
             <a:spAutoFit/>
           </a:bodyPr>
           <a:lstStyle/>
@@ -3763,8 +4933,8 @@
         </p:nvSpPr>
         <p:spPr>
           <a:xfrm>
-            <a:off x="457200" y="4937760"/>
-            <a:ext cx="11247120" cy="1097280"/>
+            <a:off x="457200" y="4330700"/>
+            <a:ext cx="11277295" cy="1097280"/>
           </a:xfrm>
           <a:prstGeom prst="rect">
             <a:avLst/>
@@ -3772,7 +4942,7 @@
           <a:noFill/>
         </p:spPr>
         <p:txBody>
-          <a:bodyPr wrap="square">
+          <a:bodyPr wrap="square" lIns="45720" rIns="45720">
             <a:spAutoFit/>
           </a:bodyPr>
           <a:lstStyle/>
@@ -3851,7 +5021,7 @@
         <p:spPr>
           <a:xfrm>
             <a:off x="457200" y="6492240"/>
-            <a:ext cx="3657600" cy="274320"/>
+            <a:ext cx="2926080" cy="274320"/>
           </a:xfrm>
           <a:prstGeom prst="rect">
             <a:avLst/>
@@ -3859,7 +5029,7 @@
           <a:noFill/>
         </p:spPr>
         <p:txBody>
-          <a:bodyPr wrap="square">
+          <a:bodyPr wrap="square" lIns="45720" rIns="45720">
             <a:spAutoFit/>
           </a:bodyPr>
           <a:lstStyle/>
@@ -3889,8 +5059,8 @@
         </p:nvSpPr>
         <p:spPr>
           <a:xfrm>
-            <a:off x="4297680" y="6492240"/>
-            <a:ext cx="3657600" cy="274320"/>
+            <a:off x="3108960" y="6492240"/>
+            <a:ext cx="5943600" cy="274320"/>
           </a:xfrm>
           <a:prstGeom prst="rect">
             <a:avLst/>
@@ -3898,7 +5068,7 @@
           <a:noFill/>
         </p:spPr>
         <p:txBody>
-          <a:bodyPr wrap="square">
+          <a:bodyPr wrap="square" lIns="45720" rIns="45720">
             <a:spAutoFit/>
           </a:bodyPr>
           <a:lstStyle/>
@@ -3915,7 +5085,7 @@
                 </a:solidFill>
                 <a:latin typeface="Roboto"/>
               </a:rPr>
-              <a:t>Data retrieved 2pm, Tue 6 Oct 2026 · Sample data</a:t>
+              <a:t>Data retrieved 2pm, Tue 6 Oct 2026 · Generated 8 Oct 2026, 9:35am · Sample data · Made with Python (python-pptx)</a:t>
             </a:r>
           </a:p>
         </p:txBody>
@@ -3937,7 +5107,7 @@
           <a:noFill/>
         </p:spPr>
         <p:txBody>
-          <a:bodyPr wrap="square">
+          <a:bodyPr wrap="square" lIns="45720" rIns="45720">
             <a:spAutoFit/>
           </a:bodyPr>
           <a:lstStyle/>
@@ -3954,838 +5124,7 @@
                 </a:solidFill>
                 <a:latin typeface="Roboto"/>
               </a:rPr>
-              <a:t>Slide 1 of 11</a:t>
-            </a:r>
-          </a:p>
-        </p:txBody>
-      </p:sp>
-    </p:spTree>
-  </p:cSld>
-  <p:clrMapOvr>
-    <a:masterClrMapping/>
-  </p:clrMapOvr>
-</p:sld>
-</file>
-
-<file path=ppt/slides/slide10.xml><?xml version="1.0" encoding="utf-8"?>
-<p:sld xmlns:a="http://schemas.openxmlformats.org/drawingml/2006/main" xmlns:p="http://schemas.openxmlformats.org/presentationml/2006/main" xmlns:r="http://schemas.openxmlformats.org/officeDocument/2006/relationships">
-  <p:cSld>
-    <p:spTree>
-      <p:nvGrpSpPr>
-        <p:cNvPr id="1" name=""/>
-        <p:cNvGrpSpPr/>
-        <p:nvPr/>
-      </p:nvGrpSpPr>
-      <p:grpSpPr/>
-      <p:sp>
-        <p:nvSpPr>
-          <p:cNvPr id="2" name="Rectangle 1"/>
-          <p:cNvSpPr/>
-          <p:nvPr/>
-        </p:nvSpPr>
-        <p:spPr>
-          <a:xfrm>
-            <a:off x="0" y="0"/>
-            <a:ext cx="12191695" cy="73152"/>
-          </a:xfrm>
-          <a:prstGeom prst="rect">
-            <a:avLst/>
-          </a:prstGeom>
-          <a:solidFill>
-            <a:srgbClr val="2F7A5D"/>
-          </a:solidFill>
-          <a:ln>
-            <a:noFill/>
-          </a:ln>
-        </p:spPr>
-        <p:style>
-          <a:lnRef idx="1">
-            <a:schemeClr val="accent1"/>
-          </a:lnRef>
-          <a:fillRef idx="3">
-            <a:schemeClr val="accent1"/>
-          </a:fillRef>
-          <a:effectRef idx="2">
-            <a:schemeClr val="accent1"/>
-          </a:effectRef>
-          <a:fontRef idx="minor">
-            <a:schemeClr val="lt1"/>
-          </a:fontRef>
-        </p:style>
-        <p:txBody>
-          <a:bodyPr rtlCol="0" anchor="ctr"/>
-          <a:lstStyle/>
-          <a:p>
-            <a:pPr algn="ctr">
-              <a:defRPr>
-                <a:latin typeface="Roboto"/>
-              </a:defRPr>
-            </a:pPr>
-          </a:p>
-        </p:txBody>
-      </p:sp>
-      <p:sp>
-        <p:nvSpPr>
-          <p:cNvPr id="3" name="TextBox 2"/>
-          <p:cNvSpPr txBox="1"/>
-          <p:nvPr/>
-        </p:nvSpPr>
-        <p:spPr>
-          <a:xfrm>
-            <a:off x="457200" y="164592"/>
-            <a:ext cx="7315200" cy="274320"/>
-          </a:xfrm>
-          <a:prstGeom prst="rect">
-            <a:avLst/>
-          </a:prstGeom>
-          <a:noFill/>
-        </p:spPr>
-        <p:txBody>
-          <a:bodyPr wrap="square">
-            <a:spAutoFit/>
-          </a:bodyPr>
-          <a:lstStyle/>
-          <a:p>
-            <a:pPr>
-              <a:defRPr>
-                <a:latin typeface="Roboto"/>
-              </a:defRPr>
-            </a:pPr>
-            <a:r>
-              <a:rPr sz="1000" b="0">
-                <a:solidFill>
-                  <a:srgbClr val="5F6F63"/>
-                </a:solidFill>
-                <a:latin typeface="Roboto"/>
-              </a:rPr>
-              <a:t>Sample Community Services Ltd · What does it cost to raise a dollar?</a:t>
-            </a:r>
-          </a:p>
-        </p:txBody>
-      </p:sp>
-      <p:sp>
-        <p:nvSpPr>
-          <p:cNvPr id="4" name="TextBox 3"/>
-          <p:cNvSpPr txBox="1"/>
-          <p:nvPr/>
-        </p:nvSpPr>
-        <p:spPr>
-          <a:xfrm>
-            <a:off x="457200" y="411480"/>
-            <a:ext cx="11247120" cy="548640"/>
-          </a:xfrm>
-          <a:prstGeom prst="rect">
-            <a:avLst/>
-          </a:prstGeom>
-          <a:noFill/>
-        </p:spPr>
-        <p:txBody>
-          <a:bodyPr wrap="square">
-            <a:spAutoFit/>
-          </a:bodyPr>
-          <a:lstStyle/>
-          <a:p>
-            <a:pPr>
-              <a:defRPr>
-                <a:latin typeface="Roboto"/>
-              </a:defRPr>
-            </a:pPr>
-            <a:r>
-              <a:rPr sz="2400" b="1">
-                <a:solidFill>
-                  <a:srgbClr val="25342A"/>
-                </a:solidFill>
-                <a:latin typeface="Roboto"/>
-              </a:rPr>
-              <a:t>What it shows · Source: Fundraising events</a:t>
-            </a:r>
-          </a:p>
-        </p:txBody>
-      </p:sp>
-      <p:sp>
-        <p:nvSpPr>
-          <p:cNvPr id="5" name="Rectangle 4"/>
-          <p:cNvSpPr/>
-          <p:nvPr/>
-        </p:nvSpPr>
-        <p:spPr>
-          <a:xfrm>
-            <a:off x="457200" y="1554480"/>
-            <a:ext cx="5501487" cy="4389120"/>
-          </a:xfrm>
-          <a:prstGeom prst="rect">
-            <a:avLst/>
-          </a:prstGeom>
-          <a:solidFill>
-            <a:srgbClr val="FFFFFF"/>
-          </a:solidFill>
-          <a:ln>
-            <a:solidFill>
-              <a:srgbClr val="DCE8DC"/>
-            </a:solidFill>
-          </a:ln>
-        </p:spPr>
-        <p:style>
-          <a:lnRef idx="1">
-            <a:schemeClr val="accent1"/>
-          </a:lnRef>
-          <a:fillRef idx="3">
-            <a:schemeClr val="accent1"/>
-          </a:fillRef>
-          <a:effectRef idx="2">
-            <a:schemeClr val="accent1"/>
-          </a:effectRef>
-          <a:fontRef idx="minor">
-            <a:schemeClr val="lt1"/>
-          </a:fontRef>
-        </p:style>
-        <p:txBody>
-          <a:bodyPr rtlCol="0" anchor="ctr"/>
-          <a:lstStyle/>
-          <a:p>
-            <a:pPr algn="ctr">
-              <a:defRPr>
-                <a:latin typeface="Roboto"/>
-              </a:defRPr>
-            </a:pPr>
-          </a:p>
-        </p:txBody>
-      </p:sp>
-      <p:sp>
-        <p:nvSpPr>
-          <p:cNvPr id="6" name="TextBox 5"/>
-          <p:cNvSpPr txBox="1"/>
-          <p:nvPr/>
-        </p:nvSpPr>
-        <p:spPr>
-          <a:xfrm>
-            <a:off x="685800" y="1691640"/>
-            <a:ext cx="5044287" cy="365760"/>
-          </a:xfrm>
-          <a:prstGeom prst="rect">
-            <a:avLst/>
-          </a:prstGeom>
-          <a:noFill/>
-        </p:spPr>
-        <p:txBody>
-          <a:bodyPr wrap="square">
-            <a:spAutoFit/>
-          </a:bodyPr>
-          <a:lstStyle/>
-          <a:p>
-            <a:pPr>
-              <a:defRPr>
-                <a:latin typeface="Roboto"/>
-              </a:defRPr>
-            </a:pPr>
-            <a:r>
-              <a:rPr sz="1100" b="1">
-                <a:solidFill>
-                  <a:srgbClr val="5F6F63"/>
-                </a:solidFill>
-                <a:latin typeface="Roboto"/>
-              </a:rPr>
-              <a:t>WHAT IT SHOWS</a:t>
-            </a:r>
-          </a:p>
-        </p:txBody>
-      </p:sp>
-      <p:sp>
-        <p:nvSpPr>
-          <p:cNvPr id="7" name="TextBox 6"/>
-          <p:cNvSpPr txBox="1"/>
-          <p:nvPr/>
-        </p:nvSpPr>
-        <p:spPr>
-          <a:xfrm>
-            <a:off x="685800" y="2103120"/>
-            <a:ext cx="5044287" cy="3749039"/>
-          </a:xfrm>
-          <a:prstGeom prst="rect">
-            <a:avLst/>
-          </a:prstGeom>
-          <a:noFill/>
-        </p:spPr>
-        <p:txBody>
-          <a:bodyPr wrap="square">
-            <a:spAutoFit/>
-          </a:bodyPr>
-          <a:lstStyle/>
-          <a:p>
-            <a:pPr>
-              <a:defRPr>
-                <a:latin typeface="Roboto"/>
-              </a:defRPr>
-            </a:pPr>
-            <a:r>
-              <a:rPr sz="1600" b="0">
-                <a:solidFill>
-                  <a:srgbClr val="25342A"/>
-                </a:solidFill>
-                <a:latin typeface="Roboto"/>
-              </a:rPr>
-              <a:t>Fundraising events cost 41¢ to raise each dollar this financial year to date ($17,800 of event costs for $43,000).</a:t>
-            </a:r>
-          </a:p>
-        </p:txBody>
-      </p:sp>
-      <p:sp>
-        <p:nvSpPr>
-          <p:cNvPr id="8" name="Rectangle 7"/>
-          <p:cNvSpPr/>
-          <p:nvPr/>
-        </p:nvSpPr>
-        <p:spPr>
-          <a:xfrm>
-            <a:off x="6233007" y="1554480"/>
-            <a:ext cx="5501487" cy="4389120"/>
-          </a:xfrm>
-          <a:prstGeom prst="rect">
-            <a:avLst/>
-          </a:prstGeom>
-          <a:solidFill>
-            <a:srgbClr val="EEF5F0"/>
-          </a:solidFill>
-          <a:ln>
-            <a:solidFill>
-              <a:srgbClr val="DCE8DC"/>
-            </a:solidFill>
-          </a:ln>
-        </p:spPr>
-        <p:style>
-          <a:lnRef idx="1">
-            <a:schemeClr val="accent1"/>
-          </a:lnRef>
-          <a:fillRef idx="3">
-            <a:schemeClr val="accent1"/>
-          </a:fillRef>
-          <a:effectRef idx="2">
-            <a:schemeClr val="accent1"/>
-          </a:effectRef>
-          <a:fontRef idx="minor">
-            <a:schemeClr val="lt1"/>
-          </a:fontRef>
-        </p:style>
-        <p:txBody>
-          <a:bodyPr rtlCol="0" anchor="ctr"/>
-          <a:lstStyle/>
-          <a:p>
-            <a:pPr algn="ctr">
-              <a:defRPr>
-                <a:latin typeface="Roboto"/>
-              </a:defRPr>
-            </a:pPr>
-          </a:p>
-        </p:txBody>
-      </p:sp>
-      <p:sp>
-        <p:nvSpPr>
-          <p:cNvPr id="9" name="TextBox 8"/>
-          <p:cNvSpPr txBox="1"/>
-          <p:nvPr/>
-        </p:nvSpPr>
-        <p:spPr>
-          <a:xfrm>
-            <a:off x="6461607" y="1691640"/>
-            <a:ext cx="5044287" cy="365760"/>
-          </a:xfrm>
-          <a:prstGeom prst="rect">
-            <a:avLst/>
-          </a:prstGeom>
-          <a:noFill/>
-        </p:spPr>
-        <p:txBody>
-          <a:bodyPr wrap="square">
-            <a:spAutoFit/>
-          </a:bodyPr>
-          <a:lstStyle/>
-          <a:p>
-            <a:pPr>
-              <a:defRPr>
-                <a:latin typeface="Roboto"/>
-              </a:defRPr>
-            </a:pPr>
-            <a:r>
-              <a:rPr sz="1100" b="1">
-                <a:solidFill>
-                  <a:srgbClr val="5F6F63"/>
-                </a:solidFill>
-                <a:latin typeface="Roboto"/>
-              </a:rPr>
-              <a:t>WHAT YOU'D DO ABOUT IT</a:t>
-            </a:r>
-          </a:p>
-        </p:txBody>
-      </p:sp>
-      <p:sp>
-        <p:nvSpPr>
-          <p:cNvPr id="10" name="TextBox 9"/>
-          <p:cNvSpPr txBox="1"/>
-          <p:nvPr/>
-        </p:nvSpPr>
-        <p:spPr>
-          <a:xfrm>
-            <a:off x="6461607" y="2103120"/>
-            <a:ext cx="5044287" cy="3749039"/>
-          </a:xfrm>
-          <a:prstGeom prst="rect">
-            <a:avLst/>
-          </a:prstGeom>
-          <a:noFill/>
-        </p:spPr>
-        <p:txBody>
-          <a:bodyPr wrap="square">
-            <a:spAutoFit/>
-          </a:bodyPr>
-          <a:lstStyle/>
-          <a:p>
-            <a:pPr>
-              <a:defRPr>
-                <a:latin typeface="Roboto"/>
-              </a:defRPr>
-            </a:pPr>
-            <a:r>
-              <a:rPr sz="1600" b="0">
-                <a:solidFill>
-                  <a:srgbClr val="25342A"/>
-                </a:solidFill>
-                <a:latin typeface="Roboto"/>
-              </a:rPr>
-              <a:t>Usually the dearest money to raise: events are worth counting for what else they bring too (new donors, profile).</a:t>
-            </a:r>
-          </a:p>
-        </p:txBody>
-      </p:sp>
-      <p:sp>
-        <p:nvSpPr>
-          <p:cNvPr id="11" name="TextBox 10"/>
-          <p:cNvSpPr txBox="1"/>
-          <p:nvPr/>
-        </p:nvSpPr>
-        <p:spPr>
-          <a:xfrm>
-            <a:off x="457200" y="6492240"/>
-            <a:ext cx="3657600" cy="274320"/>
-          </a:xfrm>
-          <a:prstGeom prst="rect">
-            <a:avLst/>
-          </a:prstGeom>
-          <a:noFill/>
-        </p:spPr>
-        <p:txBody>
-          <a:bodyPr wrap="square">
-            <a:spAutoFit/>
-          </a:bodyPr>
-          <a:lstStyle/>
-          <a:p>
-            <a:pPr>
-              <a:defRPr>
-                <a:latin typeface="Roboto"/>
-              </a:defRPr>
-            </a:pPr>
-            <a:r>
-              <a:rPr sz="900" b="0">
-                <a:solidFill>
-                  <a:srgbClr val="5F6F63"/>
-                </a:solidFill>
-                <a:latin typeface="Roboto"/>
-              </a:rPr>
-              <a:t>cost-to-raise.pptx</a:t>
-            </a:r>
-          </a:p>
-        </p:txBody>
-      </p:sp>
-      <p:sp>
-        <p:nvSpPr>
-          <p:cNvPr id="12" name="TextBox 11"/>
-          <p:cNvSpPr txBox="1"/>
-          <p:nvPr/>
-        </p:nvSpPr>
-        <p:spPr>
-          <a:xfrm>
-            <a:off x="4297680" y="6492240"/>
-            <a:ext cx="3657600" cy="274320"/>
-          </a:xfrm>
-          <a:prstGeom prst="rect">
-            <a:avLst/>
-          </a:prstGeom>
-          <a:noFill/>
-        </p:spPr>
-        <p:txBody>
-          <a:bodyPr wrap="square">
-            <a:spAutoFit/>
-          </a:bodyPr>
-          <a:lstStyle/>
-          <a:p>
-            <a:pPr algn="ctr">
-              <a:defRPr>
-                <a:latin typeface="Roboto"/>
-              </a:defRPr>
-            </a:pPr>
-            <a:r>
-              <a:rPr sz="900" b="0">
-                <a:solidFill>
-                  <a:srgbClr val="5F6F63"/>
-                </a:solidFill>
-                <a:latin typeface="Roboto"/>
-              </a:rPr>
-              <a:t>Data retrieved 2pm, Tue 6 Oct 2026 · Sample data</a:t>
-            </a:r>
-          </a:p>
-        </p:txBody>
-      </p:sp>
-      <p:sp>
-        <p:nvSpPr>
-          <p:cNvPr id="13" name="TextBox 12"/>
-          <p:cNvSpPr txBox="1"/>
-          <p:nvPr/>
-        </p:nvSpPr>
-        <p:spPr>
-          <a:xfrm>
-            <a:off x="8503920" y="6492240"/>
-            <a:ext cx="3200400" cy="274320"/>
-          </a:xfrm>
-          <a:prstGeom prst="rect">
-            <a:avLst/>
-          </a:prstGeom>
-          <a:noFill/>
-        </p:spPr>
-        <p:txBody>
-          <a:bodyPr wrap="square">
-            <a:spAutoFit/>
-          </a:bodyPr>
-          <a:lstStyle/>
-          <a:p>
-            <a:pPr algn="r">
-              <a:defRPr>
-                <a:latin typeface="Roboto"/>
-              </a:defRPr>
-            </a:pPr>
-            <a:r>
-              <a:rPr sz="900" b="0">
-                <a:solidFill>
-                  <a:srgbClr val="5F6F63"/>
-                </a:solidFill>
-                <a:latin typeface="Roboto"/>
-              </a:rPr>
-              <a:t>Slide 10 of 11</a:t>
-            </a:r>
-          </a:p>
-        </p:txBody>
-      </p:sp>
-    </p:spTree>
-  </p:cSld>
-  <p:clrMapOvr>
-    <a:masterClrMapping/>
-  </p:clrMapOvr>
-</p:sld>
-</file>
-
-<file path=ppt/slides/slide11.xml><?xml version="1.0" encoding="utf-8"?>
-<p:sld xmlns:a="http://schemas.openxmlformats.org/drawingml/2006/main" xmlns:p="http://schemas.openxmlformats.org/presentationml/2006/main" xmlns:r="http://schemas.openxmlformats.org/officeDocument/2006/relationships">
-  <p:cSld>
-    <p:spTree>
-      <p:nvGrpSpPr>
-        <p:cNvPr id="1" name=""/>
-        <p:cNvGrpSpPr/>
-        <p:nvPr/>
-      </p:nvGrpSpPr>
-      <p:grpSpPr/>
-      <p:sp>
-        <p:nvSpPr>
-          <p:cNvPr id="2" name="Rectangle 1"/>
-          <p:cNvSpPr/>
-          <p:nvPr/>
-        </p:nvSpPr>
-        <p:spPr>
-          <a:xfrm>
-            <a:off x="0" y="0"/>
-            <a:ext cx="12191695" cy="73152"/>
-          </a:xfrm>
-          <a:prstGeom prst="rect">
-            <a:avLst/>
-          </a:prstGeom>
-          <a:solidFill>
-            <a:srgbClr val="2F7A5D"/>
-          </a:solidFill>
-          <a:ln>
-            <a:noFill/>
-          </a:ln>
-        </p:spPr>
-        <p:style>
-          <a:lnRef idx="1">
-            <a:schemeClr val="accent1"/>
-          </a:lnRef>
-          <a:fillRef idx="3">
-            <a:schemeClr val="accent1"/>
-          </a:fillRef>
-          <a:effectRef idx="2">
-            <a:schemeClr val="accent1"/>
-          </a:effectRef>
-          <a:fontRef idx="minor">
-            <a:schemeClr val="lt1"/>
-          </a:fontRef>
-        </p:style>
-        <p:txBody>
-          <a:bodyPr rtlCol="0" anchor="ctr"/>
-          <a:lstStyle/>
-          <a:p>
-            <a:pPr algn="ctr">
-              <a:defRPr>
-                <a:latin typeface="Roboto"/>
-              </a:defRPr>
-            </a:pPr>
-          </a:p>
-        </p:txBody>
-      </p:sp>
-      <p:sp>
-        <p:nvSpPr>
-          <p:cNvPr id="3" name="TextBox 2"/>
-          <p:cNvSpPr txBox="1"/>
-          <p:nvPr/>
-        </p:nvSpPr>
-        <p:spPr>
-          <a:xfrm>
-            <a:off x="457200" y="164592"/>
-            <a:ext cx="7315200" cy="274320"/>
-          </a:xfrm>
-          <a:prstGeom prst="rect">
-            <a:avLst/>
-          </a:prstGeom>
-          <a:noFill/>
-        </p:spPr>
-        <p:txBody>
-          <a:bodyPr wrap="square">
-            <a:spAutoFit/>
-          </a:bodyPr>
-          <a:lstStyle/>
-          <a:p>
-            <a:pPr>
-              <a:defRPr>
-                <a:latin typeface="Roboto"/>
-              </a:defRPr>
-            </a:pPr>
-            <a:r>
-              <a:rPr sz="1000" b="0">
-                <a:solidFill>
-                  <a:srgbClr val="5F6F63"/>
-                </a:solidFill>
-                <a:latin typeface="Roboto"/>
-              </a:rPr>
-              <a:t>Sample Community Services Ltd · What does it cost to raise a dollar?</a:t>
-            </a:r>
-          </a:p>
-        </p:txBody>
-      </p:sp>
-      <p:sp>
-        <p:nvSpPr>
-          <p:cNvPr id="4" name="TextBox 3"/>
-          <p:cNvSpPr txBox="1"/>
-          <p:nvPr/>
-        </p:nvSpPr>
-        <p:spPr>
-          <a:xfrm>
-            <a:off x="457200" y="411480"/>
-            <a:ext cx="11247120" cy="548640"/>
-          </a:xfrm>
-          <a:prstGeom prst="rect">
-            <a:avLst/>
-          </a:prstGeom>
-          <a:noFill/>
-        </p:spPr>
-        <p:txBody>
-          <a:bodyPr wrap="square">
-            <a:spAutoFit/>
-          </a:bodyPr>
-          <a:lstStyle/>
-          <a:p>
-            <a:pPr>
-              <a:defRPr>
-                <a:latin typeface="Roboto"/>
-              </a:defRPr>
-            </a:pPr>
-            <a:r>
-              <a:rPr sz="2400" b="1">
-                <a:solidFill>
-                  <a:srgbClr val="25342A"/>
-                </a:solidFill>
-                <a:latin typeface="Roboto"/>
-              </a:rPr>
-              <a:t>Cost to raise a dollar, by month (cents) · Cents per $1 · Every source at once</a:t>
-            </a:r>
-          </a:p>
-        </p:txBody>
-      </p:sp>
-      <p:sp>
-        <p:nvSpPr>
-          <p:cNvPr id="5" name="TextBox 4"/>
-          <p:cNvSpPr txBox="1"/>
-          <p:nvPr/>
-        </p:nvSpPr>
-        <p:spPr>
-          <a:xfrm>
-            <a:off x="457200" y="960120"/>
-            <a:ext cx="11247120" cy="457200"/>
-          </a:xfrm>
-          <a:prstGeom prst="rect">
-            <a:avLst/>
-          </a:prstGeom>
-          <a:noFill/>
-        </p:spPr>
-        <p:txBody>
-          <a:bodyPr wrap="square">
-            <a:spAutoFit/>
-          </a:bodyPr>
-          <a:lstStyle/>
-          <a:p>
-            <a:pPr>
-              <a:defRPr>
-                <a:latin typeface="Roboto"/>
-              </a:defRPr>
-            </a:pPr>
-            <a:r>
-              <a:rPr sz="1200" b="0">
-                <a:solidFill>
-                  <a:srgbClr val="5F6F63"/>
-                </a:solidFill>
-                <a:latin typeface="Roboto"/>
-              </a:rPr>
-              <a:t>Months with an event (the gala, the Christmas appeal) jump. A gap means nothing was raised that month.</a:t>
-            </a:r>
-          </a:p>
-        </p:txBody>
-      </p:sp>
-      <p:graphicFrame>
-        <p:nvGraphicFramePr>
-          <p:cNvPr id="6" name="Chart 5"/>
-          <p:cNvGraphicFramePr>
-            <a:graphicFrameLocks noGrp="1"/>
-          </p:cNvGraphicFramePr>
-          <p:nvPr/>
-        </p:nvGraphicFramePr>
-        <p:xfrm>
-          <a:off x="457200" y="1463040"/>
-          <a:ext cx="11247120" cy="4754880"/>
-        </p:xfrm>
-        <a:graphic>
-          <a:graphicData uri="http://schemas.openxmlformats.org/drawingml/2006/chart">
-            <c:chart xmlns:c="http://schemas.openxmlformats.org/drawingml/2006/chart" r:id="rId2"/>
-          </a:graphicData>
-        </a:graphic>
-      </p:graphicFrame>
-      <p:sp>
-        <p:nvSpPr>
-          <p:cNvPr id="7" name="TextBox 6"/>
-          <p:cNvSpPr txBox="1"/>
-          <p:nvPr/>
-        </p:nvSpPr>
-        <p:spPr>
-          <a:xfrm>
-            <a:off x="457200" y="6492240"/>
-            <a:ext cx="3657600" cy="274320"/>
-          </a:xfrm>
-          <a:prstGeom prst="rect">
-            <a:avLst/>
-          </a:prstGeom>
-          <a:noFill/>
-        </p:spPr>
-        <p:txBody>
-          <a:bodyPr wrap="square">
-            <a:spAutoFit/>
-          </a:bodyPr>
-          <a:lstStyle/>
-          <a:p>
-            <a:pPr>
-              <a:defRPr>
-                <a:latin typeface="Roboto"/>
-              </a:defRPr>
-            </a:pPr>
-            <a:r>
-              <a:rPr sz="900" b="0">
-                <a:solidFill>
-                  <a:srgbClr val="5F6F63"/>
-                </a:solidFill>
-                <a:latin typeface="Roboto"/>
-              </a:rPr>
-              <a:t>cost-to-raise.pptx</a:t>
-            </a:r>
-          </a:p>
-        </p:txBody>
-      </p:sp>
-      <p:sp>
-        <p:nvSpPr>
-          <p:cNvPr id="8" name="TextBox 7"/>
-          <p:cNvSpPr txBox="1"/>
-          <p:nvPr/>
-        </p:nvSpPr>
-        <p:spPr>
-          <a:xfrm>
-            <a:off x="4297680" y="6492240"/>
-            <a:ext cx="3657600" cy="274320"/>
-          </a:xfrm>
-          <a:prstGeom prst="rect">
-            <a:avLst/>
-          </a:prstGeom>
-          <a:noFill/>
-        </p:spPr>
-        <p:txBody>
-          <a:bodyPr wrap="square">
-            <a:spAutoFit/>
-          </a:bodyPr>
-          <a:lstStyle/>
-          <a:p>
-            <a:pPr algn="ctr">
-              <a:defRPr>
-                <a:latin typeface="Roboto"/>
-              </a:defRPr>
-            </a:pPr>
-            <a:r>
-              <a:rPr sz="900" b="0">
-                <a:solidFill>
-                  <a:srgbClr val="5F6F63"/>
-                </a:solidFill>
-                <a:latin typeface="Roboto"/>
-              </a:rPr>
-              <a:t>Data retrieved 2pm, Tue 6 Oct 2026 · Sample data</a:t>
-            </a:r>
-          </a:p>
-        </p:txBody>
-      </p:sp>
-      <p:sp>
-        <p:nvSpPr>
-          <p:cNvPr id="9" name="TextBox 8"/>
-          <p:cNvSpPr txBox="1"/>
-          <p:nvPr/>
-        </p:nvSpPr>
-        <p:spPr>
-          <a:xfrm>
-            <a:off x="8503920" y="6492240"/>
-            <a:ext cx="3200400" cy="274320"/>
-          </a:xfrm>
-          <a:prstGeom prst="rect">
-            <a:avLst/>
-          </a:prstGeom>
-          <a:noFill/>
-        </p:spPr>
-        <p:txBody>
-          <a:bodyPr wrap="square">
-            <a:spAutoFit/>
-          </a:bodyPr>
-          <a:lstStyle/>
-          <a:p>
-            <a:pPr algn="r">
-              <a:defRPr>
-                <a:latin typeface="Roboto"/>
-              </a:defRPr>
-            </a:pPr>
-            <a:r>
-              <a:rPr sz="900" b="0">
-                <a:solidFill>
-                  <a:srgbClr val="5F6F63"/>
-                </a:solidFill>
-                <a:latin typeface="Roboto"/>
-              </a:rPr>
-              <a:t>Slide 11 of 11</a:t>
+              <a:t>Slide 1 of 5</a:t>
             </a:r>
           </a:p>
         </p:txBody>
@@ -4810,7 +5149,44 @@
       <p:grpSpPr/>
       <p:sp>
         <p:nvSpPr>
-          <p:cNvPr id="2" name="Rectangle 1"/>
+          <p:cNvPr id="2" name="Title 1"/>
+          <p:cNvSpPr>
+            <a:spLocks noGrp="1"/>
+          </p:cNvSpPr>
+          <p:nvPr>
+            <p:ph type="title"/>
+          </p:nvPr>
+        </p:nvSpPr>
+        <p:spPr>
+          <a:xfrm>
+            <a:off x="457200" y="384048"/>
+            <a:ext cx="11277295" cy="475488"/>
+          </a:xfrm>
+        </p:spPr>
+        <p:txBody>
+          <a:bodyPr wrap="square" lIns="45720" rIns="45720" tIns="0" bIns="0" anchor="t"/>
+          <a:lstStyle/>
+          <a:p>
+            <a:pPr algn="l">
+              <a:defRPr>
+                <a:latin typeface="Roboto"/>
+              </a:defRPr>
+            </a:pPr>
+            <a:r>
+              <a:rPr sz="2400" b="1">
+                <a:solidFill>
+                  <a:srgbClr val="25342A"/>
+                </a:solidFill>
+                <a:latin typeface="Roboto"/>
+              </a:rPr>
+              <a:t>All fundraising</a:t>
+            </a:r>
+          </a:p>
+        </p:txBody>
+      </p:sp>
+      <p:sp>
+        <p:nvSpPr>
+          <p:cNvPr id="3" name="Rectangle 2"/>
           <p:cNvSpPr/>
           <p:nvPr/>
         </p:nvSpPr>
@@ -4857,53 +5233,14 @@
       </p:sp>
       <p:sp>
         <p:nvSpPr>
-          <p:cNvPr id="3" name="TextBox 2"/>
-          <p:cNvSpPr txBox="1"/>
-          <p:nvPr/>
-        </p:nvSpPr>
-        <p:spPr>
-          <a:xfrm>
-            <a:off x="457200" y="164592"/>
-            <a:ext cx="7315200" cy="274320"/>
-          </a:xfrm>
-          <a:prstGeom prst="rect">
-            <a:avLst/>
-          </a:prstGeom>
-          <a:noFill/>
-        </p:spPr>
-        <p:txBody>
-          <a:bodyPr wrap="square">
-            <a:spAutoFit/>
-          </a:bodyPr>
-          <a:lstStyle/>
-          <a:p>
-            <a:pPr>
-              <a:defRPr>
-                <a:latin typeface="Roboto"/>
-              </a:defRPr>
-            </a:pPr>
-            <a:r>
-              <a:rPr sz="1000" b="0">
-                <a:solidFill>
-                  <a:srgbClr val="5F6F63"/>
-                </a:solidFill>
-                <a:latin typeface="Roboto"/>
-              </a:rPr>
-              <a:t>Sample Community Services Ltd · What does it cost to raise a dollar?</a:t>
-            </a:r>
-          </a:p>
-        </p:txBody>
-      </p:sp>
-      <p:sp>
-        <p:nvSpPr>
           <p:cNvPr id="4" name="TextBox 3"/>
           <p:cNvSpPr txBox="1"/>
           <p:nvPr/>
         </p:nvSpPr>
         <p:spPr>
           <a:xfrm>
-            <a:off x="457200" y="411480"/>
-            <a:ext cx="11247120" cy="548640"/>
+            <a:off x="457200" y="146304"/>
+            <a:ext cx="8229600" cy="256032"/>
           </a:xfrm>
           <a:prstGeom prst="rect">
             <a:avLst/>
@@ -4911,7 +5248,7 @@
           <a:noFill/>
         </p:spPr>
         <p:txBody>
-          <a:bodyPr wrap="square">
+          <a:bodyPr wrap="square" lIns="45720" rIns="45720">
             <a:spAutoFit/>
           </a:bodyPr>
           <a:lstStyle/>
@@ -4922,27 +5259,66 @@
               </a:defRPr>
             </a:pPr>
             <a:r>
-              <a:rPr sz="2400" b="1">
-                <a:solidFill>
-                  <a:srgbClr val="25342A"/>
+              <a:rPr sz="1000" b="0">
+                <a:solidFill>
+                  <a:srgbClr val="5F6F63"/>
                 </a:solidFill>
                 <a:latin typeface="Roboto"/>
               </a:rPr>
-              <a:t>Headline numbers · Source: All fundraising</a:t>
-            </a:r>
-          </a:p>
-        </p:txBody>
-      </p:sp>
-      <p:sp>
-        <p:nvSpPr>
-          <p:cNvPr id="5" name="Rectangle 4"/>
+              <a:t>Sample Community Services Ltd · What does it cost to raise a dollar?</a:t>
+            </a:r>
+          </a:p>
+        </p:txBody>
+      </p:sp>
+      <p:sp>
+        <p:nvSpPr>
+          <p:cNvPr id="5" name="TextBox 4"/>
+          <p:cNvSpPr txBox="1"/>
+          <p:nvPr/>
+        </p:nvSpPr>
+        <p:spPr>
+          <a:xfrm>
+            <a:off x="457200" y="914400"/>
+            <a:ext cx="11277295" cy="263652"/>
+          </a:xfrm>
+          <a:prstGeom prst="rect">
+            <a:avLst/>
+          </a:prstGeom>
+          <a:noFill/>
+        </p:spPr>
+        <p:txBody>
+          <a:bodyPr wrap="square" lIns="45720" rIns="45720">
+            <a:spAutoFit/>
+          </a:bodyPr>
+          <a:lstStyle/>
+          <a:p>
+            <a:pPr>
+              <a:defRPr>
+                <a:latin typeface="Roboto"/>
+              </a:defRPr>
+            </a:pPr>
+            <a:r>
+              <a:rPr sz="1200" b="0">
+                <a:solidFill>
+                  <a:srgbClr val="5F6F63"/>
+                </a:solidFill>
+                <a:latin typeface="Roboto"/>
+              </a:rPr>
+              <a:t>Cost to raise a dollar, by source, January 2026 (cents)</a:t>
+            </a:r>
+          </a:p>
+        </p:txBody>
+      </p:sp>
+      <p:sp>
+        <p:nvSpPr>
+          <p:cNvPr id="6" name="Rectangle 5"/>
           <p:cNvSpPr/>
           <p:nvPr/>
         </p:nvSpPr>
         <p:spPr>
           <a:xfrm>
-            <a:off x="457200" y="1645920"/>
-            <a:ext cx="5501487" cy="2011680"/>
+            <a:off x="457200" y="1278636"/>
+            <a:ext cx="5524347" cy="1188720"/>
           </a:xfrm>
           <a:prstGeom prst="rect">
             <a:avLst/>
@@ -4984,53 +5360,14 @@
       </p:sp>
       <p:sp>
         <p:nvSpPr>
-          <p:cNvPr id="6" name="TextBox 5"/>
-          <p:cNvSpPr txBox="1"/>
-          <p:nvPr/>
-        </p:nvSpPr>
-        <p:spPr>
-          <a:xfrm>
-            <a:off x="640080" y="1783080"/>
-            <a:ext cx="5135727" cy="457200"/>
-          </a:xfrm>
-          <a:prstGeom prst="rect">
-            <a:avLst/>
-          </a:prstGeom>
-          <a:noFill/>
-        </p:spPr>
-        <p:txBody>
-          <a:bodyPr wrap="square">
-            <a:spAutoFit/>
-          </a:bodyPr>
-          <a:lstStyle/>
-          <a:p>
-            <a:pPr>
-              <a:defRPr>
-                <a:latin typeface="Roboto"/>
-              </a:defRPr>
-            </a:pPr>
-            <a:r>
-              <a:rPr sz="1200" b="0">
-                <a:solidFill>
-                  <a:srgbClr val="5F6F63"/>
-                </a:solidFill>
-                <a:latin typeface="Roboto"/>
-              </a:rPr>
-              <a:t>January · all fundraising</a:t>
-            </a:r>
-          </a:p>
-        </p:txBody>
-      </p:sp>
-      <p:sp>
-        <p:nvSpPr>
           <p:cNvPr id="7" name="TextBox 6"/>
           <p:cNvSpPr txBox="1"/>
           <p:nvPr/>
         </p:nvSpPr>
         <p:spPr>
           <a:xfrm>
-            <a:off x="640080" y="2240280"/>
-            <a:ext cx="5135727" cy="731520"/>
+            <a:off x="594360" y="1351788"/>
+            <a:ext cx="5250027" cy="384048"/>
           </a:xfrm>
           <a:prstGeom prst="rect">
             <a:avLst/>
@@ -5038,7 +5375,7 @@
           <a:noFill/>
         </p:spPr>
         <p:txBody>
-          <a:bodyPr wrap="square">
+          <a:bodyPr wrap="square" lIns="45720" rIns="45720">
             <a:spAutoFit/>
           </a:bodyPr>
           <a:lstStyle/>
@@ -5049,13 +5386,13 @@
               </a:defRPr>
             </a:pPr>
             <a:r>
-              <a:rPr sz="3000" b="1">
-                <a:solidFill>
-                  <a:srgbClr val="2F7A5D"/>
+              <a:rPr sz="1100" b="0">
+                <a:solidFill>
+                  <a:srgbClr val="5F6F63"/>
                 </a:solidFill>
                 <a:latin typeface="Roboto"/>
               </a:rPr>
-              <a:t>13¢</a:t>
+              <a:t>January · all fundraising</a:t>
             </a:r>
           </a:p>
         </p:txBody>
@@ -5068,8 +5405,8 @@
         </p:nvSpPr>
         <p:spPr>
           <a:xfrm>
-            <a:off x="640080" y="3017520"/>
-            <a:ext cx="5135727" cy="548640"/>
+            <a:off x="594360" y="1717548"/>
+            <a:ext cx="5250027" cy="502920"/>
           </a:xfrm>
           <a:prstGeom prst="rect">
             <a:avLst/>
@@ -5077,7 +5414,7 @@
           <a:noFill/>
         </p:spPr>
         <p:txBody>
-          <a:bodyPr wrap="square">
+          <a:bodyPr wrap="square" lIns="45720" rIns="45720">
             <a:spAutoFit/>
           </a:bodyPr>
           <a:lstStyle/>
@@ -5088,7 +5425,46 @@
               </a:defRPr>
             </a:pPr>
             <a:r>
-              <a:rPr sz="1100" b="0">
+              <a:rPr sz="2200" b="1">
+                <a:solidFill>
+                  <a:srgbClr val="2F7A5D"/>
+                </a:solidFill>
+                <a:latin typeface="Roboto"/>
+              </a:rPr>
+              <a:t>13¢</a:t>
+            </a:r>
+          </a:p>
+        </p:txBody>
+      </p:sp>
+      <p:sp>
+        <p:nvSpPr>
+          <p:cNvPr id="9" name="TextBox 8"/>
+          <p:cNvSpPr txBox="1"/>
+          <p:nvPr/>
+        </p:nvSpPr>
+        <p:spPr>
+          <a:xfrm>
+            <a:off x="594360" y="2083308"/>
+            <a:ext cx="5250027" cy="329184"/>
+          </a:xfrm>
+          <a:prstGeom prst="rect">
+            <a:avLst/>
+          </a:prstGeom>
+          <a:noFill/>
+        </p:spPr>
+        <p:txBody>
+          <a:bodyPr wrap="square" lIns="45720" rIns="45720">
+            <a:spAutoFit/>
+          </a:bodyPr>
+          <a:lstStyle/>
+          <a:p>
+            <a:pPr>
+              <a:defRPr>
+                <a:latin typeface="Roboto"/>
+              </a:defRPr>
+            </a:pPr>
+            <a:r>
+              <a:rPr sz="1000" b="0">
                 <a:solidFill>
                   <a:srgbClr val="5F6F63"/>
                 </a:solidFill>
@@ -5101,14 +5477,14 @@
       </p:sp>
       <p:sp>
         <p:nvSpPr>
-          <p:cNvPr id="9" name="Rectangle 8"/>
+          <p:cNvPr id="10" name="Rectangle 9"/>
           <p:cNvSpPr/>
           <p:nvPr/>
         </p:nvSpPr>
         <p:spPr>
           <a:xfrm>
-            <a:off x="6233007" y="1645920"/>
-            <a:ext cx="5501487" cy="2011680"/>
+            <a:off x="6210147" y="1278636"/>
+            <a:ext cx="5524347" cy="1188720"/>
           </a:xfrm>
           <a:prstGeom prst="rect">
             <a:avLst/>
@@ -5150,53 +5526,14 @@
       </p:sp>
       <p:sp>
         <p:nvSpPr>
-          <p:cNvPr id="10" name="TextBox 9"/>
-          <p:cNvSpPr txBox="1"/>
-          <p:nvPr/>
-        </p:nvSpPr>
-        <p:spPr>
-          <a:xfrm>
-            <a:off x="6415887" y="1783080"/>
-            <a:ext cx="5135727" cy="457200"/>
-          </a:xfrm>
-          <a:prstGeom prst="rect">
-            <a:avLst/>
-          </a:prstGeom>
-          <a:noFill/>
-        </p:spPr>
-        <p:txBody>
-          <a:bodyPr wrap="square">
-            <a:spAutoFit/>
-          </a:bodyPr>
-          <a:lstStyle/>
-          <a:p>
-            <a:pPr>
-              <a:defRPr>
-                <a:latin typeface="Roboto"/>
-              </a:defRPr>
-            </a:pPr>
-            <a:r>
-              <a:rPr sz="1200" b="0">
-                <a:solidFill>
-                  <a:srgbClr val="5F6F63"/>
-                </a:solidFill>
-                <a:latin typeface="Roboto"/>
-              </a:rPr>
-              <a:t>Year to date (Jul to Jan 2026)</a:t>
-            </a:r>
-          </a:p>
-        </p:txBody>
-      </p:sp>
-      <p:sp>
-        <p:nvSpPr>
           <p:cNvPr id="11" name="TextBox 10"/>
           <p:cNvSpPr txBox="1"/>
           <p:nvPr/>
         </p:nvSpPr>
         <p:spPr>
           <a:xfrm>
-            <a:off x="6415887" y="2240280"/>
-            <a:ext cx="5135727" cy="731520"/>
+            <a:off x="6347307" y="1351788"/>
+            <a:ext cx="5250027" cy="384048"/>
           </a:xfrm>
           <a:prstGeom prst="rect">
             <a:avLst/>
@@ -5204,7 +5541,7 @@
           <a:noFill/>
         </p:spPr>
         <p:txBody>
-          <a:bodyPr wrap="square">
+          <a:bodyPr wrap="square" lIns="45720" rIns="45720">
             <a:spAutoFit/>
           </a:bodyPr>
           <a:lstStyle/>
@@ -5215,13 +5552,13 @@
               </a:defRPr>
             </a:pPr>
             <a:r>
-              <a:rPr sz="3000" b="1">
-                <a:solidFill>
-                  <a:srgbClr val="2F7A5D"/>
+              <a:rPr sz="1100" b="0">
+                <a:solidFill>
+                  <a:srgbClr val="5F6F63"/>
                 </a:solidFill>
                 <a:latin typeface="Roboto"/>
               </a:rPr>
-              <a:t>14¢</a:t>
+              <a:t>Year to date (Jul to Jan 2026)</a:t>
             </a:r>
           </a:p>
         </p:txBody>
@@ -5234,8 +5571,8 @@
         </p:nvSpPr>
         <p:spPr>
           <a:xfrm>
-            <a:off x="6415887" y="3017520"/>
-            <a:ext cx="5135727" cy="548640"/>
+            <a:off x="6347307" y="1717548"/>
+            <a:ext cx="5250027" cy="502920"/>
           </a:xfrm>
           <a:prstGeom prst="rect">
             <a:avLst/>
@@ -5243,7 +5580,7 @@
           <a:noFill/>
         </p:spPr>
         <p:txBody>
-          <a:bodyPr wrap="square">
+          <a:bodyPr wrap="square" lIns="45720" rIns="45720">
             <a:spAutoFit/>
           </a:bodyPr>
           <a:lstStyle/>
@@ -5254,13 +5591,13 @@
               </a:defRPr>
             </a:pPr>
             <a:r>
-              <a:rPr sz="1100" b="0">
-                <a:solidFill>
-                  <a:srgbClr val="5F6F63"/>
+              <a:rPr sz="2200" b="1">
+                <a:solidFill>
+                  <a:srgbClr val="2F7A5D"/>
                 </a:solidFill>
                 <a:latin typeface="Roboto"/>
               </a:rPr>
-              <a:t>same period last year: not in the data</a:t>
+              <a:t>14¢</a:t>
             </a:r>
           </a:p>
         </p:txBody>
@@ -5273,8 +5610,8 @@
         </p:nvSpPr>
         <p:spPr>
           <a:xfrm>
-            <a:off x="457200" y="6492240"/>
-            <a:ext cx="3657600" cy="274320"/>
+            <a:off x="6347307" y="2083308"/>
+            <a:ext cx="5250027" cy="329184"/>
           </a:xfrm>
           <a:prstGeom prst="rect">
             <a:avLst/>
@@ -5282,7 +5619,7 @@
           <a:noFill/>
         </p:spPr>
         <p:txBody>
-          <a:bodyPr wrap="square">
+          <a:bodyPr wrap="square" lIns="45720" rIns="45720">
             <a:spAutoFit/>
           </a:bodyPr>
           <a:lstStyle/>
@@ -5293,6 +5630,317 @@
               </a:defRPr>
             </a:pPr>
             <a:r>
+              <a:rPr sz="1000" b="0">
+                <a:solidFill>
+                  <a:srgbClr val="5F6F63"/>
+                </a:solidFill>
+                <a:latin typeface="Roboto"/>
+              </a:rPr>
+              <a:t>same period last year: not in the data</a:t>
+            </a:r>
+          </a:p>
+        </p:txBody>
+      </p:sp>
+      <p:graphicFrame>
+        <p:nvGraphicFramePr>
+          <p:cNvPr id="14" name="Chart 13"/>
+          <p:cNvGraphicFramePr>
+            <a:graphicFrameLocks noGrp="1"/>
+          </p:cNvGraphicFramePr>
+          <p:nvPr/>
+        </p:nvGraphicFramePr>
+        <p:xfrm>
+          <a:off x="457200" y="2604516"/>
+          <a:ext cx="11277295" cy="1499616"/>
+        </p:xfrm>
+        <a:graphic>
+          <a:graphicData uri="http://schemas.openxmlformats.org/drawingml/2006/chart">
+            <c:chart xmlns:c="http://schemas.openxmlformats.org/drawingml/2006/chart" r:id="rId3"/>
+          </a:graphicData>
+        </a:graphic>
+      </p:graphicFrame>
+      <p:sp>
+        <p:nvSpPr>
+          <p:cNvPr id="15" name="Rectangle 14"/>
+          <p:cNvSpPr/>
+          <p:nvPr/>
+        </p:nvSpPr>
+        <p:spPr>
+          <a:xfrm>
+            <a:off x="457200" y="4195572"/>
+            <a:ext cx="5501487" cy="899160"/>
+          </a:xfrm>
+          <a:prstGeom prst="rect">
+            <a:avLst/>
+          </a:prstGeom>
+          <a:solidFill>
+            <a:srgbClr val="FFFFFF"/>
+          </a:solidFill>
+          <a:ln>
+            <a:solidFill>
+              <a:srgbClr val="DCE8DC"/>
+            </a:solidFill>
+          </a:ln>
+        </p:spPr>
+        <p:style>
+          <a:lnRef idx="1">
+            <a:schemeClr val="accent1"/>
+          </a:lnRef>
+          <a:fillRef idx="3">
+            <a:schemeClr val="accent1"/>
+          </a:fillRef>
+          <a:effectRef idx="2">
+            <a:schemeClr val="accent1"/>
+          </a:effectRef>
+          <a:fontRef idx="minor">
+            <a:schemeClr val="lt1"/>
+          </a:fontRef>
+        </p:style>
+        <p:txBody>
+          <a:bodyPr rtlCol="0" anchor="ctr"/>
+          <a:lstStyle/>
+          <a:p>
+            <a:pPr algn="ctr">
+              <a:defRPr>
+                <a:latin typeface="Roboto"/>
+              </a:defRPr>
+            </a:pPr>
+          </a:p>
+        </p:txBody>
+      </p:sp>
+      <p:sp>
+        <p:nvSpPr>
+          <p:cNvPr id="16" name="TextBox 15"/>
+          <p:cNvSpPr txBox="1"/>
+          <p:nvPr/>
+        </p:nvSpPr>
+        <p:spPr>
+          <a:xfrm>
+            <a:off x="594360" y="4250436"/>
+            <a:ext cx="5227167" cy="274320"/>
+          </a:xfrm>
+          <a:prstGeom prst="rect">
+            <a:avLst/>
+          </a:prstGeom>
+          <a:noFill/>
+        </p:spPr>
+        <p:txBody>
+          <a:bodyPr wrap="square" lIns="45720" rIns="45720">
+            <a:spAutoFit/>
+          </a:bodyPr>
+          <a:lstStyle/>
+          <a:p>
+            <a:pPr>
+              <a:defRPr>
+                <a:latin typeface="Roboto"/>
+              </a:defRPr>
+            </a:pPr>
+            <a:r>
+              <a:rPr sz="1000" b="1">
+                <a:solidFill>
+                  <a:srgbClr val="5F6F63"/>
+                </a:solidFill>
+                <a:latin typeface="Roboto"/>
+              </a:rPr>
+              <a:t>WHAT IT SHOWS</a:t>
+            </a:r>
+          </a:p>
+        </p:txBody>
+      </p:sp>
+      <p:sp>
+        <p:nvSpPr>
+          <p:cNvPr id="17" name="TextBox 16"/>
+          <p:cNvSpPr txBox="1"/>
+          <p:nvPr/>
+        </p:nvSpPr>
+        <p:spPr>
+          <a:xfrm>
+            <a:off x="594360" y="4524756"/>
+            <a:ext cx="5227167" cy="533400"/>
+          </a:xfrm>
+          <a:prstGeom prst="rect">
+            <a:avLst/>
+          </a:prstGeom>
+          <a:noFill/>
+        </p:spPr>
+        <p:txBody>
+          <a:bodyPr wrap="square" lIns="45720" rIns="45720">
+            <a:spAutoFit/>
+          </a:bodyPr>
+          <a:lstStyle/>
+          <a:p>
+            <a:pPr>
+              <a:defRPr>
+                <a:latin typeface="Roboto"/>
+              </a:defRPr>
+            </a:pPr>
+            <a:r>
+              <a:rPr sz="1200" b="0">
+                <a:solidFill>
+                  <a:srgbClr val="25342A"/>
+                </a:solidFill>
+                <a:latin typeface="Roboto"/>
+              </a:rPr>
+              <a:t>January cost 13¢ to raise each dollar, against 14¢ in December. This financial year to date it has cost 14¢ a dollar.</a:t>
+            </a:r>
+          </a:p>
+        </p:txBody>
+      </p:sp>
+      <p:sp>
+        <p:nvSpPr>
+          <p:cNvPr id="18" name="Rectangle 17"/>
+          <p:cNvSpPr/>
+          <p:nvPr/>
+        </p:nvSpPr>
+        <p:spPr>
+          <a:xfrm>
+            <a:off x="6233007" y="4195572"/>
+            <a:ext cx="5501487" cy="899160"/>
+          </a:xfrm>
+          <a:prstGeom prst="rect">
+            <a:avLst/>
+          </a:prstGeom>
+          <a:solidFill>
+            <a:srgbClr val="EEF5F0"/>
+          </a:solidFill>
+          <a:ln>
+            <a:solidFill>
+              <a:srgbClr val="DCE8DC"/>
+            </a:solidFill>
+          </a:ln>
+        </p:spPr>
+        <p:style>
+          <a:lnRef idx="1">
+            <a:schemeClr val="accent1"/>
+          </a:lnRef>
+          <a:fillRef idx="3">
+            <a:schemeClr val="accent1"/>
+          </a:fillRef>
+          <a:effectRef idx="2">
+            <a:schemeClr val="accent1"/>
+          </a:effectRef>
+          <a:fontRef idx="minor">
+            <a:schemeClr val="lt1"/>
+          </a:fontRef>
+        </p:style>
+        <p:txBody>
+          <a:bodyPr rtlCol="0" anchor="ctr"/>
+          <a:lstStyle/>
+          <a:p>
+            <a:pPr algn="ctr">
+              <a:defRPr>
+                <a:latin typeface="Roboto"/>
+              </a:defRPr>
+            </a:pPr>
+          </a:p>
+        </p:txBody>
+      </p:sp>
+      <p:sp>
+        <p:nvSpPr>
+          <p:cNvPr id="19" name="TextBox 18"/>
+          <p:cNvSpPr txBox="1"/>
+          <p:nvPr/>
+        </p:nvSpPr>
+        <p:spPr>
+          <a:xfrm>
+            <a:off x="6370167" y="4250436"/>
+            <a:ext cx="5227167" cy="274320"/>
+          </a:xfrm>
+          <a:prstGeom prst="rect">
+            <a:avLst/>
+          </a:prstGeom>
+          <a:noFill/>
+        </p:spPr>
+        <p:txBody>
+          <a:bodyPr wrap="square" lIns="45720" rIns="45720">
+            <a:spAutoFit/>
+          </a:bodyPr>
+          <a:lstStyle/>
+          <a:p>
+            <a:pPr>
+              <a:defRPr>
+                <a:latin typeface="Roboto"/>
+              </a:defRPr>
+            </a:pPr>
+            <a:r>
+              <a:rPr sz="1000" b="1">
+                <a:solidFill>
+                  <a:srgbClr val="5F6F63"/>
+                </a:solidFill>
+                <a:latin typeface="Roboto"/>
+              </a:rPr>
+              <a:t>WHAT YOU'D DO ABOUT IT</a:t>
+            </a:r>
+          </a:p>
+        </p:txBody>
+      </p:sp>
+      <p:sp>
+        <p:nvSpPr>
+          <p:cNvPr id="20" name="TextBox 19"/>
+          <p:cNvSpPr txBox="1"/>
+          <p:nvPr/>
+        </p:nvSpPr>
+        <p:spPr>
+          <a:xfrm>
+            <a:off x="6370167" y="4524756"/>
+            <a:ext cx="5227167" cy="533400"/>
+          </a:xfrm>
+          <a:prstGeom prst="rect">
+            <a:avLst/>
+          </a:prstGeom>
+          <a:noFill/>
+        </p:spPr>
+        <p:txBody>
+          <a:bodyPr wrap="square" lIns="45720" rIns="45720">
+            <a:spAutoFit/>
+          </a:bodyPr>
+          <a:lstStyle/>
+          <a:p>
+            <a:pPr>
+              <a:defRPr>
+                <a:latin typeface="Roboto"/>
+              </a:defRPr>
+            </a:pPr>
+            <a:r>
+              <a:rPr sz="1200" b="0">
+                <a:solidFill>
+                  <a:srgbClr val="25342A"/>
+                </a:solidFill>
+                <a:latin typeface="Roboto"/>
+              </a:rPr>
+              <a:t>The year-to-date figure is steadier than single months: events make some months jump. Pick a source above to see which one moves it.</a:t>
+            </a:r>
+          </a:p>
+        </p:txBody>
+      </p:sp>
+      <p:sp>
+        <p:nvSpPr>
+          <p:cNvPr id="21" name="TextBox 20"/>
+          <p:cNvSpPr txBox="1"/>
+          <p:nvPr/>
+        </p:nvSpPr>
+        <p:spPr>
+          <a:xfrm>
+            <a:off x="457200" y="6492240"/>
+            <a:ext cx="2926080" cy="274320"/>
+          </a:xfrm>
+          <a:prstGeom prst="rect">
+            <a:avLst/>
+          </a:prstGeom>
+          <a:noFill/>
+        </p:spPr>
+        <p:txBody>
+          <a:bodyPr wrap="square" lIns="45720" rIns="45720">
+            <a:spAutoFit/>
+          </a:bodyPr>
+          <a:lstStyle/>
+          <a:p>
+            <a:pPr>
+              <a:defRPr>
+                <a:latin typeface="Roboto"/>
+              </a:defRPr>
+            </a:pPr>
+            <a:r>
               <a:rPr sz="900" b="0">
                 <a:solidFill>
                   <a:srgbClr val="5F6F63"/>
@@ -5306,14 +5954,14 @@
       </p:sp>
       <p:sp>
         <p:nvSpPr>
-          <p:cNvPr id="14" name="TextBox 13"/>
+          <p:cNvPr id="22" name="TextBox 21"/>
           <p:cNvSpPr txBox="1"/>
           <p:nvPr/>
         </p:nvSpPr>
         <p:spPr>
           <a:xfrm>
-            <a:off x="4297680" y="6492240"/>
-            <a:ext cx="3657600" cy="274320"/>
+            <a:off x="3108960" y="6492240"/>
+            <a:ext cx="5943600" cy="274320"/>
           </a:xfrm>
           <a:prstGeom prst="rect">
             <a:avLst/>
@@ -5321,7 +5969,7 @@
           <a:noFill/>
         </p:spPr>
         <p:txBody>
-          <a:bodyPr wrap="square">
+          <a:bodyPr wrap="square" lIns="45720" rIns="45720">
             <a:spAutoFit/>
           </a:bodyPr>
           <a:lstStyle/>
@@ -5338,14 +5986,14 @@
                 </a:solidFill>
                 <a:latin typeface="Roboto"/>
               </a:rPr>
-              <a:t>Data retrieved 2pm, Tue 6 Oct 2026 · Sample data</a:t>
-            </a:r>
-          </a:p>
-        </p:txBody>
-      </p:sp>
-      <p:sp>
-        <p:nvSpPr>
-          <p:cNvPr id="15" name="TextBox 14"/>
+              <a:t>Data retrieved 2pm, Tue 6 Oct 2026 · Generated 8 Oct 2026, 9:35am · Sample data · Made with Python (python-pptx)</a:t>
+            </a:r>
+          </a:p>
+        </p:txBody>
+      </p:sp>
+      <p:sp>
+        <p:nvSpPr>
+          <p:cNvPr id="23" name="TextBox 22"/>
           <p:cNvSpPr txBox="1"/>
           <p:nvPr/>
         </p:nvSpPr>
@@ -5360,7 +6008,7 @@
           <a:noFill/>
         </p:spPr>
         <p:txBody>
-          <a:bodyPr wrap="square">
+          <a:bodyPr wrap="square" lIns="45720" rIns="45720">
             <a:spAutoFit/>
           </a:bodyPr>
           <a:lstStyle/>
@@ -5377,7 +6025,7 @@
                 </a:solidFill>
                 <a:latin typeface="Roboto"/>
               </a:rPr>
-              <a:t>Slide 2 of 11</a:t>
+              <a:t>Slide 2 of 5</a:t>
             </a:r>
           </a:p>
         </p:txBody>
@@ -5402,7 +6050,44 @@
       <p:grpSpPr/>
       <p:sp>
         <p:nvSpPr>
-          <p:cNvPr id="2" name="Rectangle 1"/>
+          <p:cNvPr id="2" name="Title 1"/>
+          <p:cNvSpPr>
+            <a:spLocks noGrp="1"/>
+          </p:cNvSpPr>
+          <p:nvPr>
+            <p:ph type="title"/>
+          </p:nvPr>
+        </p:nvSpPr>
+        <p:spPr>
+          <a:xfrm>
+            <a:off x="457200" y="384048"/>
+            <a:ext cx="11277295" cy="475488"/>
+          </a:xfrm>
+        </p:spPr>
+        <p:txBody>
+          <a:bodyPr wrap="square" lIns="45720" rIns="45720" tIns="0" bIns="0" anchor="t"/>
+          <a:lstStyle/>
+          <a:p>
+            <a:pPr algn="l">
+              <a:defRPr>
+                <a:latin typeface="Roboto"/>
+              </a:defRPr>
+            </a:pPr>
+            <a:r>
+              <a:rPr sz="2400" b="1">
+                <a:solidFill>
+                  <a:srgbClr val="25342A"/>
+                </a:solidFill>
+                <a:latin typeface="Roboto"/>
+              </a:rPr>
+              <a:t>Grants</a:t>
+            </a:r>
+          </a:p>
+        </p:txBody>
+      </p:sp>
+      <p:sp>
+        <p:nvSpPr>
+          <p:cNvPr id="3" name="Rectangle 2"/>
           <p:cNvSpPr/>
           <p:nvPr/>
         </p:nvSpPr>
@@ -5449,53 +6134,14 @@
       </p:sp>
       <p:sp>
         <p:nvSpPr>
-          <p:cNvPr id="3" name="TextBox 2"/>
-          <p:cNvSpPr txBox="1"/>
-          <p:nvPr/>
-        </p:nvSpPr>
-        <p:spPr>
-          <a:xfrm>
-            <a:off x="457200" y="164592"/>
-            <a:ext cx="7315200" cy="274320"/>
-          </a:xfrm>
-          <a:prstGeom prst="rect">
-            <a:avLst/>
-          </a:prstGeom>
-          <a:noFill/>
-        </p:spPr>
-        <p:txBody>
-          <a:bodyPr wrap="square">
-            <a:spAutoFit/>
-          </a:bodyPr>
-          <a:lstStyle/>
-          <a:p>
-            <a:pPr>
-              <a:defRPr>
-                <a:latin typeface="Roboto"/>
-              </a:defRPr>
-            </a:pPr>
-            <a:r>
-              <a:rPr sz="1000" b="0">
-                <a:solidFill>
-                  <a:srgbClr val="5F6F63"/>
-                </a:solidFill>
-                <a:latin typeface="Roboto"/>
-              </a:rPr>
-              <a:t>Sample Community Services Ltd · What does it cost to raise a dollar?</a:t>
-            </a:r>
-          </a:p>
-        </p:txBody>
-      </p:sp>
-      <p:sp>
-        <p:nvSpPr>
           <p:cNvPr id="4" name="TextBox 3"/>
           <p:cNvSpPr txBox="1"/>
           <p:nvPr/>
         </p:nvSpPr>
         <p:spPr>
           <a:xfrm>
-            <a:off x="457200" y="411480"/>
-            <a:ext cx="11247120" cy="548640"/>
+            <a:off x="457200" y="146304"/>
+            <a:ext cx="8229600" cy="256032"/>
           </a:xfrm>
           <a:prstGeom prst="rect">
             <a:avLst/>
@@ -5503,7 +6149,7 @@
           <a:noFill/>
         </p:spPr>
         <p:txBody>
-          <a:bodyPr wrap="square">
+          <a:bodyPr wrap="square" lIns="45720" rIns="45720">
             <a:spAutoFit/>
           </a:bodyPr>
           <a:lstStyle/>
@@ -5514,45 +6160,465 @@
               </a:defRPr>
             </a:pPr>
             <a:r>
-              <a:rPr sz="2400" b="1">
-                <a:solidFill>
-                  <a:srgbClr val="25342A"/>
+              <a:rPr sz="1000" b="0">
+                <a:solidFill>
+                  <a:srgbClr val="5F6F63"/>
                 </a:solidFill>
                 <a:latin typeface="Roboto"/>
               </a:rPr>
-              <a:t>Cost to raise a dollar, by source, January 2026 (cents) · Source: All fundraising</a:t>
+              <a:t>Sample Community Services Ltd · What does it cost to raise a dollar?</a:t>
+            </a:r>
+          </a:p>
+        </p:txBody>
+      </p:sp>
+      <p:sp>
+        <p:nvSpPr>
+          <p:cNvPr id="5" name="TextBox 4"/>
+          <p:cNvSpPr txBox="1"/>
+          <p:nvPr/>
+        </p:nvSpPr>
+        <p:spPr>
+          <a:xfrm>
+            <a:off x="457200" y="914400"/>
+            <a:ext cx="11277295" cy="263652"/>
+          </a:xfrm>
+          <a:prstGeom prst="rect">
+            <a:avLst/>
+          </a:prstGeom>
+          <a:noFill/>
+        </p:spPr>
+        <p:txBody>
+          <a:bodyPr wrap="square" lIns="45720" rIns="45720">
+            <a:spAutoFit/>
+          </a:bodyPr>
+          <a:lstStyle/>
+          <a:p>
+            <a:pPr>
+              <a:defRPr>
+                <a:latin typeface="Roboto"/>
+              </a:defRPr>
+            </a:pPr>
+            <a:r>
+              <a:rPr sz="1200" b="0">
+                <a:solidFill>
+                  <a:srgbClr val="5F6F63"/>
+                </a:solidFill>
+                <a:latin typeface="Roboto"/>
+              </a:rPr>
+              <a:t>Cost to raise a dollar, by month (cents) · Grants</a:t>
+            </a:r>
+          </a:p>
+        </p:txBody>
+      </p:sp>
+      <p:sp>
+        <p:nvSpPr>
+          <p:cNvPr id="6" name="Rectangle 5"/>
+          <p:cNvSpPr/>
+          <p:nvPr/>
+        </p:nvSpPr>
+        <p:spPr>
+          <a:xfrm>
+            <a:off x="457200" y="1278636"/>
+            <a:ext cx="5524347" cy="1188720"/>
+          </a:xfrm>
+          <a:prstGeom prst="rect">
+            <a:avLst/>
+          </a:prstGeom>
+          <a:solidFill>
+            <a:srgbClr val="F7FAF7"/>
+          </a:solidFill>
+          <a:ln>
+            <a:solidFill>
+              <a:srgbClr val="DCE8DC"/>
+            </a:solidFill>
+          </a:ln>
+        </p:spPr>
+        <p:style>
+          <a:lnRef idx="1">
+            <a:schemeClr val="accent1"/>
+          </a:lnRef>
+          <a:fillRef idx="3">
+            <a:schemeClr val="accent1"/>
+          </a:fillRef>
+          <a:effectRef idx="2">
+            <a:schemeClr val="accent1"/>
+          </a:effectRef>
+          <a:fontRef idx="minor">
+            <a:schemeClr val="lt1"/>
+          </a:fontRef>
+        </p:style>
+        <p:txBody>
+          <a:bodyPr rtlCol="0" anchor="ctr"/>
+          <a:lstStyle/>
+          <a:p>
+            <a:pPr algn="ctr">
+              <a:defRPr>
+                <a:latin typeface="Roboto"/>
+              </a:defRPr>
+            </a:pPr>
+          </a:p>
+        </p:txBody>
+      </p:sp>
+      <p:sp>
+        <p:nvSpPr>
+          <p:cNvPr id="7" name="TextBox 6"/>
+          <p:cNvSpPr txBox="1"/>
+          <p:nvPr/>
+        </p:nvSpPr>
+        <p:spPr>
+          <a:xfrm>
+            <a:off x="594360" y="1351788"/>
+            <a:ext cx="5250027" cy="384048"/>
+          </a:xfrm>
+          <a:prstGeom prst="rect">
+            <a:avLst/>
+          </a:prstGeom>
+          <a:noFill/>
+        </p:spPr>
+        <p:txBody>
+          <a:bodyPr wrap="square" lIns="45720" rIns="45720">
+            <a:spAutoFit/>
+          </a:bodyPr>
+          <a:lstStyle/>
+          <a:p>
+            <a:pPr>
+              <a:defRPr>
+                <a:latin typeface="Roboto"/>
+              </a:defRPr>
+            </a:pPr>
+            <a:r>
+              <a:rPr sz="1100" b="0">
+                <a:solidFill>
+                  <a:srgbClr val="5F6F63"/>
+                </a:solidFill>
+                <a:latin typeface="Roboto"/>
+              </a:rPr>
+              <a:t>January · Grants</a:t>
+            </a:r>
+          </a:p>
+        </p:txBody>
+      </p:sp>
+      <p:sp>
+        <p:nvSpPr>
+          <p:cNvPr id="8" name="TextBox 7"/>
+          <p:cNvSpPr txBox="1"/>
+          <p:nvPr/>
+        </p:nvSpPr>
+        <p:spPr>
+          <a:xfrm>
+            <a:off x="594360" y="1717548"/>
+            <a:ext cx="5250027" cy="502920"/>
+          </a:xfrm>
+          <a:prstGeom prst="rect">
+            <a:avLst/>
+          </a:prstGeom>
+          <a:noFill/>
+        </p:spPr>
+        <p:txBody>
+          <a:bodyPr wrap="square" lIns="45720" rIns="45720">
+            <a:spAutoFit/>
+          </a:bodyPr>
+          <a:lstStyle/>
+          <a:p>
+            <a:pPr>
+              <a:defRPr>
+                <a:latin typeface="Roboto"/>
+              </a:defRPr>
+            </a:pPr>
+            <a:r>
+              <a:rPr sz="2200" b="1">
+                <a:solidFill>
+                  <a:srgbClr val="2F7A5D"/>
+                </a:solidFill>
+                <a:latin typeface="Roboto"/>
+              </a:rPr>
+              <a:t>12¢</a:t>
+            </a:r>
+          </a:p>
+        </p:txBody>
+      </p:sp>
+      <p:sp>
+        <p:nvSpPr>
+          <p:cNvPr id="9" name="TextBox 8"/>
+          <p:cNvSpPr txBox="1"/>
+          <p:nvPr/>
+        </p:nvSpPr>
+        <p:spPr>
+          <a:xfrm>
+            <a:off x="594360" y="2083308"/>
+            <a:ext cx="5250027" cy="329184"/>
+          </a:xfrm>
+          <a:prstGeom prst="rect">
+            <a:avLst/>
+          </a:prstGeom>
+          <a:noFill/>
+        </p:spPr>
+        <p:txBody>
+          <a:bodyPr wrap="square" lIns="45720" rIns="45720">
+            <a:spAutoFit/>
+          </a:bodyPr>
+          <a:lstStyle/>
+          <a:p>
+            <a:pPr>
+              <a:defRPr>
+                <a:latin typeface="Roboto"/>
+              </a:defRPr>
+            </a:pPr>
+            <a:r>
+              <a:rPr sz="1000" b="0">
+                <a:solidFill>
+                  <a:srgbClr val="5F6F63"/>
+                </a:solidFill>
+                <a:latin typeface="Roboto"/>
+              </a:rPr>
+              <a:t>December 10¢</a:t>
+            </a:r>
+          </a:p>
+        </p:txBody>
+      </p:sp>
+      <p:sp>
+        <p:nvSpPr>
+          <p:cNvPr id="10" name="Rectangle 9"/>
+          <p:cNvSpPr/>
+          <p:nvPr/>
+        </p:nvSpPr>
+        <p:spPr>
+          <a:xfrm>
+            <a:off x="6210147" y="1278636"/>
+            <a:ext cx="5524347" cy="1188720"/>
+          </a:xfrm>
+          <a:prstGeom prst="rect">
+            <a:avLst/>
+          </a:prstGeom>
+          <a:solidFill>
+            <a:srgbClr val="F7FAF7"/>
+          </a:solidFill>
+          <a:ln>
+            <a:solidFill>
+              <a:srgbClr val="DCE8DC"/>
+            </a:solidFill>
+          </a:ln>
+        </p:spPr>
+        <p:style>
+          <a:lnRef idx="1">
+            <a:schemeClr val="accent1"/>
+          </a:lnRef>
+          <a:fillRef idx="3">
+            <a:schemeClr val="accent1"/>
+          </a:fillRef>
+          <a:effectRef idx="2">
+            <a:schemeClr val="accent1"/>
+          </a:effectRef>
+          <a:fontRef idx="minor">
+            <a:schemeClr val="lt1"/>
+          </a:fontRef>
+        </p:style>
+        <p:txBody>
+          <a:bodyPr rtlCol="0" anchor="ctr"/>
+          <a:lstStyle/>
+          <a:p>
+            <a:pPr algn="ctr">
+              <a:defRPr>
+                <a:latin typeface="Roboto"/>
+              </a:defRPr>
+            </a:pPr>
+          </a:p>
+        </p:txBody>
+      </p:sp>
+      <p:sp>
+        <p:nvSpPr>
+          <p:cNvPr id="11" name="TextBox 10"/>
+          <p:cNvSpPr txBox="1"/>
+          <p:nvPr/>
+        </p:nvSpPr>
+        <p:spPr>
+          <a:xfrm>
+            <a:off x="6347307" y="1351788"/>
+            <a:ext cx="5250027" cy="384048"/>
+          </a:xfrm>
+          <a:prstGeom prst="rect">
+            <a:avLst/>
+          </a:prstGeom>
+          <a:noFill/>
+        </p:spPr>
+        <p:txBody>
+          <a:bodyPr wrap="square" lIns="45720" rIns="45720">
+            <a:spAutoFit/>
+          </a:bodyPr>
+          <a:lstStyle/>
+          <a:p>
+            <a:pPr>
+              <a:defRPr>
+                <a:latin typeface="Roboto"/>
+              </a:defRPr>
+            </a:pPr>
+            <a:r>
+              <a:rPr sz="1100" b="0">
+                <a:solidFill>
+                  <a:srgbClr val="5F6F63"/>
+                </a:solidFill>
+                <a:latin typeface="Roboto"/>
+              </a:rPr>
+              <a:t>Year to date (Jul to Jan 2026)</a:t>
+            </a:r>
+          </a:p>
+        </p:txBody>
+      </p:sp>
+      <p:sp>
+        <p:nvSpPr>
+          <p:cNvPr id="12" name="TextBox 11"/>
+          <p:cNvSpPr txBox="1"/>
+          <p:nvPr/>
+        </p:nvSpPr>
+        <p:spPr>
+          <a:xfrm>
+            <a:off x="6347307" y="1717548"/>
+            <a:ext cx="5250027" cy="502920"/>
+          </a:xfrm>
+          <a:prstGeom prst="rect">
+            <a:avLst/>
+          </a:prstGeom>
+          <a:noFill/>
+        </p:spPr>
+        <p:txBody>
+          <a:bodyPr wrap="square" lIns="45720" rIns="45720">
+            <a:spAutoFit/>
+          </a:bodyPr>
+          <a:lstStyle/>
+          <a:p>
+            <a:pPr>
+              <a:defRPr>
+                <a:latin typeface="Roboto"/>
+              </a:defRPr>
+            </a:pPr>
+            <a:r>
+              <a:rPr sz="2200" b="1">
+                <a:solidFill>
+                  <a:srgbClr val="2F7A5D"/>
+                </a:solidFill>
+                <a:latin typeface="Roboto"/>
+              </a:rPr>
+              <a:t>11¢</a:t>
+            </a:r>
+          </a:p>
+        </p:txBody>
+      </p:sp>
+      <p:sp>
+        <p:nvSpPr>
+          <p:cNvPr id="13" name="TextBox 12"/>
+          <p:cNvSpPr txBox="1"/>
+          <p:nvPr/>
+        </p:nvSpPr>
+        <p:spPr>
+          <a:xfrm>
+            <a:off x="6347307" y="2083308"/>
+            <a:ext cx="5250027" cy="329184"/>
+          </a:xfrm>
+          <a:prstGeom prst="rect">
+            <a:avLst/>
+          </a:prstGeom>
+          <a:noFill/>
+        </p:spPr>
+        <p:txBody>
+          <a:bodyPr wrap="square" lIns="45720" rIns="45720">
+            <a:spAutoFit/>
+          </a:bodyPr>
+          <a:lstStyle/>
+          <a:p>
+            <a:pPr>
+              <a:defRPr>
+                <a:latin typeface="Roboto"/>
+              </a:defRPr>
+            </a:pPr>
+            <a:r>
+              <a:rPr sz="1000" b="0">
+                <a:solidFill>
+                  <a:srgbClr val="5F6F63"/>
+                </a:solidFill>
+                <a:latin typeface="Roboto"/>
+              </a:rPr>
+              <a:t>same period last year: not in the data</a:t>
             </a:r>
           </a:p>
         </p:txBody>
       </p:sp>
       <p:graphicFrame>
         <p:nvGraphicFramePr>
-          <p:cNvPr id="5" name="Chart 4"/>
+          <p:cNvPr id="14" name="Chart 13"/>
           <p:cNvGraphicFramePr>
             <a:graphicFrameLocks noGrp="1"/>
           </p:cNvGraphicFramePr>
           <p:nvPr/>
         </p:nvGraphicFramePr>
         <p:xfrm>
-          <a:off x="457200" y="1188720"/>
-          <a:ext cx="11247120" cy="5029200"/>
+          <a:off x="457200" y="2604516"/>
+          <a:ext cx="11277295" cy="2714244"/>
         </p:xfrm>
         <a:graphic>
           <a:graphicData uri="http://schemas.openxmlformats.org/drawingml/2006/chart">
-            <c:chart xmlns:c="http://schemas.openxmlformats.org/drawingml/2006/chart" r:id="rId2"/>
+            <c:chart xmlns:c="http://schemas.openxmlformats.org/drawingml/2006/chart" r:id="rId3"/>
           </a:graphicData>
         </a:graphic>
       </p:graphicFrame>
       <p:sp>
         <p:nvSpPr>
-          <p:cNvPr id="6" name="TextBox 5"/>
+          <p:cNvPr id="15" name="Rectangle 14"/>
+          <p:cNvSpPr/>
+          <p:nvPr/>
+        </p:nvSpPr>
+        <p:spPr>
+          <a:xfrm>
+            <a:off x="457200" y="5410200"/>
+            <a:ext cx="5501487" cy="899160"/>
+          </a:xfrm>
+          <a:prstGeom prst="rect">
+            <a:avLst/>
+          </a:prstGeom>
+          <a:solidFill>
+            <a:srgbClr val="FFFFFF"/>
+          </a:solidFill>
+          <a:ln>
+            <a:solidFill>
+              <a:srgbClr val="DCE8DC"/>
+            </a:solidFill>
+          </a:ln>
+        </p:spPr>
+        <p:style>
+          <a:lnRef idx="1">
+            <a:schemeClr val="accent1"/>
+          </a:lnRef>
+          <a:fillRef idx="3">
+            <a:schemeClr val="accent1"/>
+          </a:fillRef>
+          <a:effectRef idx="2">
+            <a:schemeClr val="accent1"/>
+          </a:effectRef>
+          <a:fontRef idx="minor">
+            <a:schemeClr val="lt1"/>
+          </a:fontRef>
+        </p:style>
+        <p:txBody>
+          <a:bodyPr rtlCol="0" anchor="ctr"/>
+          <a:lstStyle/>
+          <a:p>
+            <a:pPr algn="ctr">
+              <a:defRPr>
+                <a:latin typeface="Roboto"/>
+              </a:defRPr>
+            </a:pPr>
+          </a:p>
+        </p:txBody>
+      </p:sp>
+      <p:sp>
+        <p:nvSpPr>
+          <p:cNvPr id="16" name="TextBox 15"/>
           <p:cNvSpPr txBox="1"/>
           <p:nvPr/>
         </p:nvSpPr>
         <p:spPr>
           <a:xfrm>
-            <a:off x="457200" y="6492240"/>
-            <a:ext cx="3657600" cy="274320"/>
+            <a:off x="594360" y="5465064"/>
+            <a:ext cx="5227167" cy="274320"/>
           </a:xfrm>
           <a:prstGeom prst="rect">
             <a:avLst/>
@@ -5560,7 +6626,7 @@
           <a:noFill/>
         </p:spPr>
         <p:txBody>
-          <a:bodyPr wrap="square">
+          <a:bodyPr wrap="square" lIns="45720" rIns="45720">
             <a:spAutoFit/>
           </a:bodyPr>
           <a:lstStyle/>
@@ -5571,6 +6637,211 @@
               </a:defRPr>
             </a:pPr>
             <a:r>
+              <a:rPr sz="1000" b="1">
+                <a:solidFill>
+                  <a:srgbClr val="5F6F63"/>
+                </a:solidFill>
+                <a:latin typeface="Roboto"/>
+              </a:rPr>
+              <a:t>WHAT IT SHOWS</a:t>
+            </a:r>
+          </a:p>
+        </p:txBody>
+      </p:sp>
+      <p:sp>
+        <p:nvSpPr>
+          <p:cNvPr id="17" name="TextBox 16"/>
+          <p:cNvSpPr txBox="1"/>
+          <p:nvPr/>
+        </p:nvSpPr>
+        <p:spPr>
+          <a:xfrm>
+            <a:off x="594360" y="5739384"/>
+            <a:ext cx="5227167" cy="533400"/>
+          </a:xfrm>
+          <a:prstGeom prst="rect">
+            <a:avLst/>
+          </a:prstGeom>
+          <a:noFill/>
+        </p:spPr>
+        <p:txBody>
+          <a:bodyPr wrap="square" lIns="45720" rIns="45720">
+            <a:spAutoFit/>
+          </a:bodyPr>
+          <a:lstStyle/>
+          <a:p>
+            <a:pPr>
+              <a:defRPr>
+                <a:latin typeface="Roboto"/>
+              </a:defRPr>
+            </a:pPr>
+            <a:r>
+              <a:rPr sz="1200" b="0">
+                <a:solidFill>
+                  <a:srgbClr val="25342A"/>
+                </a:solidFill>
+                <a:latin typeface="Roboto"/>
+              </a:rPr>
+              <a:t>Grants cost 11¢ to raise each dollar this financial year to date ($49,700 of grant writing and reporting for $450,671).</a:t>
+            </a:r>
+          </a:p>
+        </p:txBody>
+      </p:sp>
+      <p:sp>
+        <p:nvSpPr>
+          <p:cNvPr id="18" name="Rectangle 17"/>
+          <p:cNvSpPr/>
+          <p:nvPr/>
+        </p:nvSpPr>
+        <p:spPr>
+          <a:xfrm>
+            <a:off x="6233007" y="5410200"/>
+            <a:ext cx="5501487" cy="899160"/>
+          </a:xfrm>
+          <a:prstGeom prst="rect">
+            <a:avLst/>
+          </a:prstGeom>
+          <a:solidFill>
+            <a:srgbClr val="EEF5F0"/>
+          </a:solidFill>
+          <a:ln>
+            <a:solidFill>
+              <a:srgbClr val="DCE8DC"/>
+            </a:solidFill>
+          </a:ln>
+        </p:spPr>
+        <p:style>
+          <a:lnRef idx="1">
+            <a:schemeClr val="accent1"/>
+          </a:lnRef>
+          <a:fillRef idx="3">
+            <a:schemeClr val="accent1"/>
+          </a:fillRef>
+          <a:effectRef idx="2">
+            <a:schemeClr val="accent1"/>
+          </a:effectRef>
+          <a:fontRef idx="minor">
+            <a:schemeClr val="lt1"/>
+          </a:fontRef>
+        </p:style>
+        <p:txBody>
+          <a:bodyPr rtlCol="0" anchor="ctr"/>
+          <a:lstStyle/>
+          <a:p>
+            <a:pPr algn="ctr">
+              <a:defRPr>
+                <a:latin typeface="Roboto"/>
+              </a:defRPr>
+            </a:pPr>
+          </a:p>
+        </p:txBody>
+      </p:sp>
+      <p:sp>
+        <p:nvSpPr>
+          <p:cNvPr id="19" name="TextBox 18"/>
+          <p:cNvSpPr txBox="1"/>
+          <p:nvPr/>
+        </p:nvSpPr>
+        <p:spPr>
+          <a:xfrm>
+            <a:off x="6370167" y="5465064"/>
+            <a:ext cx="5227167" cy="274320"/>
+          </a:xfrm>
+          <a:prstGeom prst="rect">
+            <a:avLst/>
+          </a:prstGeom>
+          <a:noFill/>
+        </p:spPr>
+        <p:txBody>
+          <a:bodyPr wrap="square" lIns="45720" rIns="45720">
+            <a:spAutoFit/>
+          </a:bodyPr>
+          <a:lstStyle/>
+          <a:p>
+            <a:pPr>
+              <a:defRPr>
+                <a:latin typeface="Roboto"/>
+              </a:defRPr>
+            </a:pPr>
+            <a:r>
+              <a:rPr sz="1000" b="1">
+                <a:solidFill>
+                  <a:srgbClr val="5F6F63"/>
+                </a:solidFill>
+                <a:latin typeface="Roboto"/>
+              </a:rPr>
+              <a:t>WHAT YOU'D DO ABOUT IT</a:t>
+            </a:r>
+          </a:p>
+        </p:txBody>
+      </p:sp>
+      <p:sp>
+        <p:nvSpPr>
+          <p:cNvPr id="20" name="TextBox 19"/>
+          <p:cNvSpPr txBox="1"/>
+          <p:nvPr/>
+        </p:nvSpPr>
+        <p:spPr>
+          <a:xfrm>
+            <a:off x="6370167" y="5739384"/>
+            <a:ext cx="5227167" cy="533400"/>
+          </a:xfrm>
+          <a:prstGeom prst="rect">
+            <a:avLst/>
+          </a:prstGeom>
+          <a:noFill/>
+        </p:spPr>
+        <p:txBody>
+          <a:bodyPr wrap="square" lIns="45720" rIns="45720">
+            <a:spAutoFit/>
+          </a:bodyPr>
+          <a:lstStyle/>
+          <a:p>
+            <a:pPr>
+              <a:defRPr>
+                <a:latin typeface="Roboto"/>
+              </a:defRPr>
+            </a:pPr>
+            <a:r>
+              <a:rPr sz="1200" b="0">
+                <a:solidFill>
+                  <a:srgbClr val="25342A"/>
+                </a:solidFill>
+                <a:latin typeface="Roboto"/>
+              </a:rPr>
+              <a:t>Usually the cheapest money to raise, as long as the time that goes into applications and acquittals is protected.</a:t>
+            </a:r>
+          </a:p>
+        </p:txBody>
+      </p:sp>
+      <p:sp>
+        <p:nvSpPr>
+          <p:cNvPr id="21" name="TextBox 20"/>
+          <p:cNvSpPr txBox="1"/>
+          <p:nvPr/>
+        </p:nvSpPr>
+        <p:spPr>
+          <a:xfrm>
+            <a:off x="457200" y="6492240"/>
+            <a:ext cx="2926080" cy="274320"/>
+          </a:xfrm>
+          <a:prstGeom prst="rect">
+            <a:avLst/>
+          </a:prstGeom>
+          <a:noFill/>
+        </p:spPr>
+        <p:txBody>
+          <a:bodyPr wrap="square" lIns="45720" rIns="45720">
+            <a:spAutoFit/>
+          </a:bodyPr>
+          <a:lstStyle/>
+          <a:p>
+            <a:pPr>
+              <a:defRPr>
+                <a:latin typeface="Roboto"/>
+              </a:defRPr>
+            </a:pPr>
+            <a:r>
               <a:rPr sz="900" b="0">
                 <a:solidFill>
                   <a:srgbClr val="5F6F63"/>
@@ -5584,14 +6855,14 @@
       </p:sp>
       <p:sp>
         <p:nvSpPr>
-          <p:cNvPr id="7" name="TextBox 6"/>
+          <p:cNvPr id="22" name="TextBox 21"/>
           <p:cNvSpPr txBox="1"/>
           <p:nvPr/>
         </p:nvSpPr>
         <p:spPr>
           <a:xfrm>
-            <a:off x="4297680" y="6492240"/>
-            <a:ext cx="3657600" cy="274320"/>
+            <a:off x="3108960" y="6492240"/>
+            <a:ext cx="5943600" cy="274320"/>
           </a:xfrm>
           <a:prstGeom prst="rect">
             <a:avLst/>
@@ -5599,7 +6870,7 @@
           <a:noFill/>
         </p:spPr>
         <p:txBody>
-          <a:bodyPr wrap="square">
+          <a:bodyPr wrap="square" lIns="45720" rIns="45720">
             <a:spAutoFit/>
           </a:bodyPr>
           <a:lstStyle/>
@@ -5616,14 +6887,14 @@
                 </a:solidFill>
                 <a:latin typeface="Roboto"/>
               </a:rPr>
-              <a:t>Data retrieved 2pm, Tue 6 Oct 2026 · Sample data</a:t>
-            </a:r>
-          </a:p>
-        </p:txBody>
-      </p:sp>
-      <p:sp>
-        <p:nvSpPr>
-          <p:cNvPr id="8" name="TextBox 7"/>
+              <a:t>Data retrieved 2pm, Tue 6 Oct 2026 · Generated 8 Oct 2026, 9:35am · Sample data · Made with Python (python-pptx)</a:t>
+            </a:r>
+          </a:p>
+        </p:txBody>
+      </p:sp>
+      <p:sp>
+        <p:nvSpPr>
+          <p:cNvPr id="23" name="TextBox 22"/>
           <p:cNvSpPr txBox="1"/>
           <p:nvPr/>
         </p:nvSpPr>
@@ -5638,7 +6909,7 @@
           <a:noFill/>
         </p:spPr>
         <p:txBody>
-          <a:bodyPr wrap="square">
+          <a:bodyPr wrap="square" lIns="45720" rIns="45720">
             <a:spAutoFit/>
           </a:bodyPr>
           <a:lstStyle/>
@@ -5655,7 +6926,7 @@
                 </a:solidFill>
                 <a:latin typeface="Roboto"/>
               </a:rPr>
-              <a:t>Slide 3 of 11</a:t>
+              <a:t>Slide 3 of 5</a:t>
             </a:r>
           </a:p>
         </p:txBody>
@@ -5680,7 +6951,44 @@
       <p:grpSpPr/>
       <p:sp>
         <p:nvSpPr>
-          <p:cNvPr id="2" name="Rectangle 1"/>
+          <p:cNvPr id="2" name="Title 1"/>
+          <p:cNvSpPr>
+            <a:spLocks noGrp="1"/>
+          </p:cNvSpPr>
+          <p:nvPr>
+            <p:ph type="title"/>
+          </p:nvPr>
+        </p:nvSpPr>
+        <p:spPr>
+          <a:xfrm>
+            <a:off x="457200" y="384048"/>
+            <a:ext cx="11277295" cy="475488"/>
+          </a:xfrm>
+        </p:spPr>
+        <p:txBody>
+          <a:bodyPr wrap="square" lIns="45720" rIns="45720" tIns="0" bIns="0" anchor="t"/>
+          <a:lstStyle/>
+          <a:p>
+            <a:pPr algn="l">
+              <a:defRPr>
+                <a:latin typeface="Roboto"/>
+              </a:defRPr>
+            </a:pPr>
+            <a:r>
+              <a:rPr sz="2400" b="1">
+                <a:solidFill>
+                  <a:srgbClr val="25342A"/>
+                </a:solidFill>
+                <a:latin typeface="Roboto"/>
+              </a:rPr>
+              <a:t>Donations</a:t>
+            </a:r>
+          </a:p>
+        </p:txBody>
+      </p:sp>
+      <p:sp>
+        <p:nvSpPr>
+          <p:cNvPr id="3" name="Rectangle 2"/>
           <p:cNvSpPr/>
           <p:nvPr/>
         </p:nvSpPr>
@@ -5727,53 +7035,14 @@
       </p:sp>
       <p:sp>
         <p:nvSpPr>
-          <p:cNvPr id="3" name="TextBox 2"/>
-          <p:cNvSpPr txBox="1"/>
-          <p:nvPr/>
-        </p:nvSpPr>
-        <p:spPr>
-          <a:xfrm>
-            <a:off x="457200" y="164592"/>
-            <a:ext cx="7315200" cy="274320"/>
-          </a:xfrm>
-          <a:prstGeom prst="rect">
-            <a:avLst/>
-          </a:prstGeom>
-          <a:noFill/>
-        </p:spPr>
-        <p:txBody>
-          <a:bodyPr wrap="square">
-            <a:spAutoFit/>
-          </a:bodyPr>
-          <a:lstStyle/>
-          <a:p>
-            <a:pPr>
-              <a:defRPr>
-                <a:latin typeface="Roboto"/>
-              </a:defRPr>
-            </a:pPr>
-            <a:r>
-              <a:rPr sz="1000" b="0">
-                <a:solidFill>
-                  <a:srgbClr val="5F6F63"/>
-                </a:solidFill>
-                <a:latin typeface="Roboto"/>
-              </a:rPr>
-              <a:t>Sample Community Services Ltd · What does it cost to raise a dollar?</a:t>
-            </a:r>
-          </a:p>
-        </p:txBody>
-      </p:sp>
-      <p:sp>
-        <p:nvSpPr>
           <p:cNvPr id="4" name="TextBox 3"/>
           <p:cNvSpPr txBox="1"/>
           <p:nvPr/>
         </p:nvSpPr>
         <p:spPr>
           <a:xfrm>
-            <a:off x="457200" y="411480"/>
-            <a:ext cx="11247120" cy="548640"/>
+            <a:off x="457200" y="146304"/>
+            <a:ext cx="8229600" cy="256032"/>
           </a:xfrm>
           <a:prstGeom prst="rect">
             <a:avLst/>
@@ -5781,7 +7050,7 @@
           <a:noFill/>
         </p:spPr>
         <p:txBody>
-          <a:bodyPr wrap="square">
+          <a:bodyPr wrap="square" lIns="45720" rIns="45720">
             <a:spAutoFit/>
           </a:bodyPr>
           <a:lstStyle/>
@@ -5792,33 +7061,72 @@
               </a:defRPr>
             </a:pPr>
             <a:r>
-              <a:rPr sz="2400" b="1">
-                <a:solidFill>
-                  <a:srgbClr val="25342A"/>
+              <a:rPr sz="1000" b="0">
+                <a:solidFill>
+                  <a:srgbClr val="5F6F63"/>
                 </a:solidFill>
                 <a:latin typeface="Roboto"/>
               </a:rPr>
-              <a:t>What it shows · Source: All fundraising</a:t>
-            </a:r>
-          </a:p>
-        </p:txBody>
-      </p:sp>
-      <p:sp>
-        <p:nvSpPr>
-          <p:cNvPr id="5" name="Rectangle 4"/>
+              <a:t>Sample Community Services Ltd · What does it cost to raise a dollar?</a:t>
+            </a:r>
+          </a:p>
+        </p:txBody>
+      </p:sp>
+      <p:sp>
+        <p:nvSpPr>
+          <p:cNvPr id="5" name="TextBox 4"/>
+          <p:cNvSpPr txBox="1"/>
+          <p:nvPr/>
+        </p:nvSpPr>
+        <p:spPr>
+          <a:xfrm>
+            <a:off x="457200" y="914400"/>
+            <a:ext cx="11277295" cy="263652"/>
+          </a:xfrm>
+          <a:prstGeom prst="rect">
+            <a:avLst/>
+          </a:prstGeom>
+          <a:noFill/>
+        </p:spPr>
+        <p:txBody>
+          <a:bodyPr wrap="square" lIns="45720" rIns="45720">
+            <a:spAutoFit/>
+          </a:bodyPr>
+          <a:lstStyle/>
+          <a:p>
+            <a:pPr>
+              <a:defRPr>
+                <a:latin typeface="Roboto"/>
+              </a:defRPr>
+            </a:pPr>
+            <a:r>
+              <a:rPr sz="1200" b="0">
+                <a:solidFill>
+                  <a:srgbClr val="5F6F63"/>
+                </a:solidFill>
+                <a:latin typeface="Roboto"/>
+              </a:rPr>
+              <a:t>Cost to raise a dollar, by month (cents) · Donations</a:t>
+            </a:r>
+          </a:p>
+        </p:txBody>
+      </p:sp>
+      <p:sp>
+        <p:nvSpPr>
+          <p:cNvPr id="6" name="Rectangle 5"/>
           <p:cNvSpPr/>
           <p:nvPr/>
         </p:nvSpPr>
         <p:spPr>
           <a:xfrm>
-            <a:off x="457200" y="1554480"/>
-            <a:ext cx="5501487" cy="4389120"/>
+            <a:off x="457200" y="1278636"/>
+            <a:ext cx="5524347" cy="1188720"/>
           </a:xfrm>
           <a:prstGeom prst="rect">
             <a:avLst/>
           </a:prstGeom>
           <a:solidFill>
-            <a:srgbClr val="FFFFFF"/>
+            <a:srgbClr val="F7FAF7"/>
           </a:solidFill>
           <a:ln>
             <a:solidFill>
@@ -5854,53 +7162,14 @@
       </p:sp>
       <p:sp>
         <p:nvSpPr>
-          <p:cNvPr id="6" name="TextBox 5"/>
-          <p:cNvSpPr txBox="1"/>
-          <p:nvPr/>
-        </p:nvSpPr>
-        <p:spPr>
-          <a:xfrm>
-            <a:off x="685800" y="1691640"/>
-            <a:ext cx="5044287" cy="365760"/>
-          </a:xfrm>
-          <a:prstGeom prst="rect">
-            <a:avLst/>
-          </a:prstGeom>
-          <a:noFill/>
-        </p:spPr>
-        <p:txBody>
-          <a:bodyPr wrap="square">
-            <a:spAutoFit/>
-          </a:bodyPr>
-          <a:lstStyle/>
-          <a:p>
-            <a:pPr>
-              <a:defRPr>
-                <a:latin typeface="Roboto"/>
-              </a:defRPr>
-            </a:pPr>
-            <a:r>
-              <a:rPr sz="1100" b="1">
-                <a:solidFill>
-                  <a:srgbClr val="5F6F63"/>
-                </a:solidFill>
-                <a:latin typeface="Roboto"/>
-              </a:rPr>
-              <a:t>WHAT IT SHOWS</a:t>
-            </a:r>
-          </a:p>
-        </p:txBody>
-      </p:sp>
-      <p:sp>
-        <p:nvSpPr>
           <p:cNvPr id="7" name="TextBox 6"/>
           <p:cNvSpPr txBox="1"/>
           <p:nvPr/>
         </p:nvSpPr>
         <p:spPr>
           <a:xfrm>
-            <a:off x="685800" y="2103120"/>
-            <a:ext cx="5044287" cy="3749039"/>
+            <a:off x="594360" y="1351788"/>
+            <a:ext cx="5250027" cy="384048"/>
           </a:xfrm>
           <a:prstGeom prst="rect">
             <a:avLst/>
@@ -5908,7 +7177,7 @@
           <a:noFill/>
         </p:spPr>
         <p:txBody>
-          <a:bodyPr wrap="square">
+          <a:bodyPr wrap="square" lIns="45720" rIns="45720">
             <a:spAutoFit/>
           </a:bodyPr>
           <a:lstStyle/>
@@ -5919,33 +7188,111 @@
               </a:defRPr>
             </a:pPr>
             <a:r>
-              <a:rPr sz="1600" b="0">
-                <a:solidFill>
-                  <a:srgbClr val="25342A"/>
+              <a:rPr sz="1100" b="0">
+                <a:solidFill>
+                  <a:srgbClr val="5F6F63"/>
                 </a:solidFill>
                 <a:latin typeface="Roboto"/>
               </a:rPr>
-              <a:t>January cost 13¢ to raise each dollar, against 14¢ in December. This financial year to date it has cost 14¢ a dollar.</a:t>
-            </a:r>
-          </a:p>
-        </p:txBody>
-      </p:sp>
-      <p:sp>
-        <p:nvSpPr>
-          <p:cNvPr id="8" name="Rectangle 7"/>
+              <a:t>January · Donations</a:t>
+            </a:r>
+          </a:p>
+        </p:txBody>
+      </p:sp>
+      <p:sp>
+        <p:nvSpPr>
+          <p:cNvPr id="8" name="TextBox 7"/>
+          <p:cNvSpPr txBox="1"/>
+          <p:nvPr/>
+        </p:nvSpPr>
+        <p:spPr>
+          <a:xfrm>
+            <a:off x="594360" y="1717548"/>
+            <a:ext cx="5250027" cy="502920"/>
+          </a:xfrm>
+          <a:prstGeom prst="rect">
+            <a:avLst/>
+          </a:prstGeom>
+          <a:noFill/>
+        </p:spPr>
+        <p:txBody>
+          <a:bodyPr wrap="square" lIns="45720" rIns="45720">
+            <a:spAutoFit/>
+          </a:bodyPr>
+          <a:lstStyle/>
+          <a:p>
+            <a:pPr>
+              <a:defRPr>
+                <a:latin typeface="Roboto"/>
+              </a:defRPr>
+            </a:pPr>
+            <a:r>
+              <a:rPr sz="2200" b="1">
+                <a:solidFill>
+                  <a:srgbClr val="2F7A5D"/>
+                </a:solidFill>
+                <a:latin typeface="Roboto"/>
+              </a:rPr>
+              <a:t>17¢</a:t>
+            </a:r>
+          </a:p>
+        </p:txBody>
+      </p:sp>
+      <p:sp>
+        <p:nvSpPr>
+          <p:cNvPr id="9" name="TextBox 8"/>
+          <p:cNvSpPr txBox="1"/>
+          <p:nvPr/>
+        </p:nvSpPr>
+        <p:spPr>
+          <a:xfrm>
+            <a:off x="594360" y="2083308"/>
+            <a:ext cx="5250027" cy="329184"/>
+          </a:xfrm>
+          <a:prstGeom prst="rect">
+            <a:avLst/>
+          </a:prstGeom>
+          <a:noFill/>
+        </p:spPr>
+        <p:txBody>
+          <a:bodyPr wrap="square" lIns="45720" rIns="45720">
+            <a:spAutoFit/>
+          </a:bodyPr>
+          <a:lstStyle/>
+          <a:p>
+            <a:pPr>
+              <a:defRPr>
+                <a:latin typeface="Roboto"/>
+              </a:defRPr>
+            </a:pPr>
+            <a:r>
+              <a:rPr sz="1000" b="0">
+                <a:solidFill>
+                  <a:srgbClr val="5F6F63"/>
+                </a:solidFill>
+                <a:latin typeface="Roboto"/>
+              </a:rPr>
+              <a:t>December 17¢</a:t>
+            </a:r>
+          </a:p>
+        </p:txBody>
+      </p:sp>
+      <p:sp>
+        <p:nvSpPr>
+          <p:cNvPr id="10" name="Rectangle 9"/>
           <p:cNvSpPr/>
           <p:nvPr/>
         </p:nvSpPr>
         <p:spPr>
           <a:xfrm>
-            <a:off x="6233007" y="1554480"/>
-            <a:ext cx="5501487" cy="4389120"/>
+            <a:off x="6210147" y="1278636"/>
+            <a:ext cx="5524347" cy="1188720"/>
           </a:xfrm>
           <a:prstGeom prst="rect">
             <a:avLst/>
           </a:prstGeom>
           <a:solidFill>
-            <a:srgbClr val="EEF5F0"/>
+            <a:srgbClr val="F7FAF7"/>
           </a:solidFill>
           <a:ln>
             <a:solidFill>
@@ -5981,92 +7328,14 @@
       </p:sp>
       <p:sp>
         <p:nvSpPr>
-          <p:cNvPr id="9" name="TextBox 8"/>
-          <p:cNvSpPr txBox="1"/>
-          <p:nvPr/>
-        </p:nvSpPr>
-        <p:spPr>
-          <a:xfrm>
-            <a:off x="6461607" y="1691640"/>
-            <a:ext cx="5044287" cy="365760"/>
-          </a:xfrm>
-          <a:prstGeom prst="rect">
-            <a:avLst/>
-          </a:prstGeom>
-          <a:noFill/>
-        </p:spPr>
-        <p:txBody>
-          <a:bodyPr wrap="square">
-            <a:spAutoFit/>
-          </a:bodyPr>
-          <a:lstStyle/>
-          <a:p>
-            <a:pPr>
-              <a:defRPr>
-                <a:latin typeface="Roboto"/>
-              </a:defRPr>
-            </a:pPr>
-            <a:r>
-              <a:rPr sz="1100" b="1">
-                <a:solidFill>
-                  <a:srgbClr val="5F6F63"/>
-                </a:solidFill>
-                <a:latin typeface="Roboto"/>
-              </a:rPr>
-              <a:t>WHAT YOU'D DO ABOUT IT</a:t>
-            </a:r>
-          </a:p>
-        </p:txBody>
-      </p:sp>
-      <p:sp>
-        <p:nvSpPr>
-          <p:cNvPr id="10" name="TextBox 9"/>
-          <p:cNvSpPr txBox="1"/>
-          <p:nvPr/>
-        </p:nvSpPr>
-        <p:spPr>
-          <a:xfrm>
-            <a:off x="6461607" y="2103120"/>
-            <a:ext cx="5044287" cy="3749039"/>
-          </a:xfrm>
-          <a:prstGeom prst="rect">
-            <a:avLst/>
-          </a:prstGeom>
-          <a:noFill/>
-        </p:spPr>
-        <p:txBody>
-          <a:bodyPr wrap="square">
-            <a:spAutoFit/>
-          </a:bodyPr>
-          <a:lstStyle/>
-          <a:p>
-            <a:pPr>
-              <a:defRPr>
-                <a:latin typeface="Roboto"/>
-              </a:defRPr>
-            </a:pPr>
-            <a:r>
-              <a:rPr sz="1600" b="0">
-                <a:solidFill>
-                  <a:srgbClr val="25342A"/>
-                </a:solidFill>
-                <a:latin typeface="Roboto"/>
-              </a:rPr>
-              <a:t>The year-to-date figure is steadier than single months: events make some months jump. Pick a source above to see which one moves it.</a:t>
-            </a:r>
-          </a:p>
-        </p:txBody>
-      </p:sp>
-      <p:sp>
-        <p:nvSpPr>
           <p:cNvPr id="11" name="TextBox 10"/>
           <p:cNvSpPr txBox="1"/>
           <p:nvPr/>
         </p:nvSpPr>
         <p:spPr>
           <a:xfrm>
-            <a:off x="457200" y="6492240"/>
-            <a:ext cx="3657600" cy="274320"/>
+            <a:off x="6347307" y="1351788"/>
+            <a:ext cx="5250027" cy="384048"/>
           </a:xfrm>
           <a:prstGeom prst="rect">
             <a:avLst/>
@@ -6074,7 +7343,7 @@
           <a:noFill/>
         </p:spPr>
         <p:txBody>
-          <a:bodyPr wrap="square">
+          <a:bodyPr wrap="square" lIns="45720" rIns="45720">
             <a:spAutoFit/>
           </a:bodyPr>
           <a:lstStyle/>
@@ -6085,13 +7354,13 @@
               </a:defRPr>
             </a:pPr>
             <a:r>
-              <a:rPr sz="900" b="0">
+              <a:rPr sz="1100" b="0">
                 <a:solidFill>
                   <a:srgbClr val="5F6F63"/>
                 </a:solidFill>
                 <a:latin typeface="Roboto"/>
               </a:rPr>
-              <a:t>cost-to-raise.pptx</a:t>
+              <a:t>Year to date (Jul to Jan 2026)</a:t>
             </a:r>
           </a:p>
         </p:txBody>
@@ -6104,8 +7373,8 @@
         </p:nvSpPr>
         <p:spPr>
           <a:xfrm>
-            <a:off x="4297680" y="6492240"/>
-            <a:ext cx="3657600" cy="274320"/>
+            <a:off x="6347307" y="1717548"/>
+            <a:ext cx="5250027" cy="502920"/>
           </a:xfrm>
           <a:prstGeom prst="rect">
             <a:avLst/>
@@ -6113,24 +7382,24 @@
           <a:noFill/>
         </p:spPr>
         <p:txBody>
-          <a:bodyPr wrap="square">
+          <a:bodyPr wrap="square" lIns="45720" rIns="45720">
             <a:spAutoFit/>
           </a:bodyPr>
           <a:lstStyle/>
           <a:p>
-            <a:pPr algn="ctr">
-              <a:defRPr>
-                <a:latin typeface="Roboto"/>
-              </a:defRPr>
-            </a:pPr>
-            <a:r>
-              <a:rPr sz="900" b="0">
-                <a:solidFill>
-                  <a:srgbClr val="5F6F63"/>
+            <a:pPr>
+              <a:defRPr>
+                <a:latin typeface="Roboto"/>
+              </a:defRPr>
+            </a:pPr>
+            <a:r>
+              <a:rPr sz="2200" b="1">
+                <a:solidFill>
+                  <a:srgbClr val="2F7A5D"/>
                 </a:solidFill>
                 <a:latin typeface="Roboto"/>
               </a:rPr>
-              <a:t>Data retrieved 2pm, Tue 6 Oct 2026 · Sample data</a:t>
+              <a:t>15¢</a:t>
             </a:r>
           </a:p>
         </p:txBody>
@@ -6143,6 +7412,395 @@
         </p:nvSpPr>
         <p:spPr>
           <a:xfrm>
+            <a:off x="6347307" y="2083308"/>
+            <a:ext cx="5250027" cy="329184"/>
+          </a:xfrm>
+          <a:prstGeom prst="rect">
+            <a:avLst/>
+          </a:prstGeom>
+          <a:noFill/>
+        </p:spPr>
+        <p:txBody>
+          <a:bodyPr wrap="square" lIns="45720" rIns="45720">
+            <a:spAutoFit/>
+          </a:bodyPr>
+          <a:lstStyle/>
+          <a:p>
+            <a:pPr>
+              <a:defRPr>
+                <a:latin typeface="Roboto"/>
+              </a:defRPr>
+            </a:pPr>
+            <a:r>
+              <a:rPr sz="1000" b="0">
+                <a:solidFill>
+                  <a:srgbClr val="5F6F63"/>
+                </a:solidFill>
+                <a:latin typeface="Roboto"/>
+              </a:rPr>
+              <a:t>same period last year: not in the data</a:t>
+            </a:r>
+          </a:p>
+        </p:txBody>
+      </p:sp>
+      <p:graphicFrame>
+        <p:nvGraphicFramePr>
+          <p:cNvPr id="14" name="Chart 13"/>
+          <p:cNvGraphicFramePr>
+            <a:graphicFrameLocks noGrp="1"/>
+          </p:cNvGraphicFramePr>
+          <p:nvPr/>
+        </p:nvGraphicFramePr>
+        <p:xfrm>
+          <a:off x="457200" y="2604516"/>
+          <a:ext cx="11277295" cy="2714244"/>
+        </p:xfrm>
+        <a:graphic>
+          <a:graphicData uri="http://schemas.openxmlformats.org/drawingml/2006/chart">
+            <c:chart xmlns:c="http://schemas.openxmlformats.org/drawingml/2006/chart" r:id="rId3"/>
+          </a:graphicData>
+        </a:graphic>
+      </p:graphicFrame>
+      <p:sp>
+        <p:nvSpPr>
+          <p:cNvPr id="15" name="Rectangle 14"/>
+          <p:cNvSpPr/>
+          <p:nvPr/>
+        </p:nvSpPr>
+        <p:spPr>
+          <a:xfrm>
+            <a:off x="457200" y="5410200"/>
+            <a:ext cx="5501487" cy="899160"/>
+          </a:xfrm>
+          <a:prstGeom prst="rect">
+            <a:avLst/>
+          </a:prstGeom>
+          <a:solidFill>
+            <a:srgbClr val="FFFFFF"/>
+          </a:solidFill>
+          <a:ln>
+            <a:solidFill>
+              <a:srgbClr val="DCE8DC"/>
+            </a:solidFill>
+          </a:ln>
+        </p:spPr>
+        <p:style>
+          <a:lnRef idx="1">
+            <a:schemeClr val="accent1"/>
+          </a:lnRef>
+          <a:fillRef idx="3">
+            <a:schemeClr val="accent1"/>
+          </a:fillRef>
+          <a:effectRef idx="2">
+            <a:schemeClr val="accent1"/>
+          </a:effectRef>
+          <a:fontRef idx="minor">
+            <a:schemeClr val="lt1"/>
+          </a:fontRef>
+        </p:style>
+        <p:txBody>
+          <a:bodyPr rtlCol="0" anchor="ctr"/>
+          <a:lstStyle/>
+          <a:p>
+            <a:pPr algn="ctr">
+              <a:defRPr>
+                <a:latin typeface="Roboto"/>
+              </a:defRPr>
+            </a:pPr>
+          </a:p>
+        </p:txBody>
+      </p:sp>
+      <p:sp>
+        <p:nvSpPr>
+          <p:cNvPr id="16" name="TextBox 15"/>
+          <p:cNvSpPr txBox="1"/>
+          <p:nvPr/>
+        </p:nvSpPr>
+        <p:spPr>
+          <a:xfrm>
+            <a:off x="594360" y="5465064"/>
+            <a:ext cx="5227167" cy="274320"/>
+          </a:xfrm>
+          <a:prstGeom prst="rect">
+            <a:avLst/>
+          </a:prstGeom>
+          <a:noFill/>
+        </p:spPr>
+        <p:txBody>
+          <a:bodyPr wrap="square" lIns="45720" rIns="45720">
+            <a:spAutoFit/>
+          </a:bodyPr>
+          <a:lstStyle/>
+          <a:p>
+            <a:pPr>
+              <a:defRPr>
+                <a:latin typeface="Roboto"/>
+              </a:defRPr>
+            </a:pPr>
+            <a:r>
+              <a:rPr sz="1000" b="1">
+                <a:solidFill>
+                  <a:srgbClr val="5F6F63"/>
+                </a:solidFill>
+                <a:latin typeface="Roboto"/>
+              </a:rPr>
+              <a:t>WHAT IT SHOWS</a:t>
+            </a:r>
+          </a:p>
+        </p:txBody>
+      </p:sp>
+      <p:sp>
+        <p:nvSpPr>
+          <p:cNvPr id="17" name="TextBox 16"/>
+          <p:cNvSpPr txBox="1"/>
+          <p:nvPr/>
+        </p:nvSpPr>
+        <p:spPr>
+          <a:xfrm>
+            <a:off x="594360" y="5739384"/>
+            <a:ext cx="5227167" cy="533400"/>
+          </a:xfrm>
+          <a:prstGeom prst="rect">
+            <a:avLst/>
+          </a:prstGeom>
+          <a:noFill/>
+        </p:spPr>
+        <p:txBody>
+          <a:bodyPr wrap="square" lIns="45720" rIns="45720">
+            <a:spAutoFit/>
+          </a:bodyPr>
+          <a:lstStyle/>
+          <a:p>
+            <a:pPr>
+              <a:defRPr>
+                <a:latin typeface="Roboto"/>
+              </a:defRPr>
+            </a:pPr>
+            <a:r>
+              <a:rPr sz="1200" b="0">
+                <a:solidFill>
+                  <a:srgbClr val="25342A"/>
+                </a:solidFill>
+                <a:latin typeface="Roboto"/>
+              </a:rPr>
+              <a:t>Donations cost 15¢ to raise each dollar this financial year to date ($18,500 of donor campaigns for $119,700).</a:t>
+            </a:r>
+          </a:p>
+        </p:txBody>
+      </p:sp>
+      <p:sp>
+        <p:nvSpPr>
+          <p:cNvPr id="18" name="Rectangle 17"/>
+          <p:cNvSpPr/>
+          <p:nvPr/>
+        </p:nvSpPr>
+        <p:spPr>
+          <a:xfrm>
+            <a:off x="6233007" y="5410200"/>
+            <a:ext cx="5501487" cy="899160"/>
+          </a:xfrm>
+          <a:prstGeom prst="rect">
+            <a:avLst/>
+          </a:prstGeom>
+          <a:solidFill>
+            <a:srgbClr val="EEF5F0"/>
+          </a:solidFill>
+          <a:ln>
+            <a:solidFill>
+              <a:srgbClr val="DCE8DC"/>
+            </a:solidFill>
+          </a:ln>
+        </p:spPr>
+        <p:style>
+          <a:lnRef idx="1">
+            <a:schemeClr val="accent1"/>
+          </a:lnRef>
+          <a:fillRef idx="3">
+            <a:schemeClr val="accent1"/>
+          </a:fillRef>
+          <a:effectRef idx="2">
+            <a:schemeClr val="accent1"/>
+          </a:effectRef>
+          <a:fontRef idx="minor">
+            <a:schemeClr val="lt1"/>
+          </a:fontRef>
+        </p:style>
+        <p:txBody>
+          <a:bodyPr rtlCol="0" anchor="ctr"/>
+          <a:lstStyle/>
+          <a:p>
+            <a:pPr algn="ctr">
+              <a:defRPr>
+                <a:latin typeface="Roboto"/>
+              </a:defRPr>
+            </a:pPr>
+          </a:p>
+        </p:txBody>
+      </p:sp>
+      <p:sp>
+        <p:nvSpPr>
+          <p:cNvPr id="19" name="TextBox 18"/>
+          <p:cNvSpPr txBox="1"/>
+          <p:nvPr/>
+        </p:nvSpPr>
+        <p:spPr>
+          <a:xfrm>
+            <a:off x="6370167" y="5465064"/>
+            <a:ext cx="5227167" cy="274320"/>
+          </a:xfrm>
+          <a:prstGeom prst="rect">
+            <a:avLst/>
+          </a:prstGeom>
+          <a:noFill/>
+        </p:spPr>
+        <p:txBody>
+          <a:bodyPr wrap="square" lIns="45720" rIns="45720">
+            <a:spAutoFit/>
+          </a:bodyPr>
+          <a:lstStyle/>
+          <a:p>
+            <a:pPr>
+              <a:defRPr>
+                <a:latin typeface="Roboto"/>
+              </a:defRPr>
+            </a:pPr>
+            <a:r>
+              <a:rPr sz="1000" b="1">
+                <a:solidFill>
+                  <a:srgbClr val="5F6F63"/>
+                </a:solidFill>
+                <a:latin typeface="Roboto"/>
+              </a:rPr>
+              <a:t>WHAT YOU'D DO ABOUT IT</a:t>
+            </a:r>
+          </a:p>
+        </p:txBody>
+      </p:sp>
+      <p:sp>
+        <p:nvSpPr>
+          <p:cNvPr id="20" name="TextBox 19"/>
+          <p:cNvSpPr txBox="1"/>
+          <p:nvPr/>
+        </p:nvSpPr>
+        <p:spPr>
+          <a:xfrm>
+            <a:off x="6370167" y="5739384"/>
+            <a:ext cx="5227167" cy="533400"/>
+          </a:xfrm>
+          <a:prstGeom prst="rect">
+            <a:avLst/>
+          </a:prstGeom>
+          <a:noFill/>
+        </p:spPr>
+        <p:txBody>
+          <a:bodyPr wrap="square" lIns="45720" rIns="45720">
+            <a:spAutoFit/>
+          </a:bodyPr>
+          <a:lstStyle/>
+          <a:p>
+            <a:pPr>
+              <a:defRPr>
+                <a:latin typeface="Roboto"/>
+              </a:defRPr>
+            </a:pPr>
+            <a:r>
+              <a:rPr sz="1200" b="0">
+                <a:solidFill>
+                  <a:srgbClr val="25342A"/>
+                </a:solidFill>
+                <a:latin typeface="Roboto"/>
+              </a:rPr>
+              <a:t>Steady and cheap, and untied: the money that builds reserves.</a:t>
+            </a:r>
+          </a:p>
+        </p:txBody>
+      </p:sp>
+      <p:sp>
+        <p:nvSpPr>
+          <p:cNvPr id="21" name="TextBox 20"/>
+          <p:cNvSpPr txBox="1"/>
+          <p:nvPr/>
+        </p:nvSpPr>
+        <p:spPr>
+          <a:xfrm>
+            <a:off x="457200" y="6492240"/>
+            <a:ext cx="2926080" cy="274320"/>
+          </a:xfrm>
+          <a:prstGeom prst="rect">
+            <a:avLst/>
+          </a:prstGeom>
+          <a:noFill/>
+        </p:spPr>
+        <p:txBody>
+          <a:bodyPr wrap="square" lIns="45720" rIns="45720">
+            <a:spAutoFit/>
+          </a:bodyPr>
+          <a:lstStyle/>
+          <a:p>
+            <a:pPr>
+              <a:defRPr>
+                <a:latin typeface="Roboto"/>
+              </a:defRPr>
+            </a:pPr>
+            <a:r>
+              <a:rPr sz="900" b="0">
+                <a:solidFill>
+                  <a:srgbClr val="5F6F63"/>
+                </a:solidFill>
+                <a:latin typeface="Roboto"/>
+              </a:rPr>
+              <a:t>cost-to-raise.pptx</a:t>
+            </a:r>
+          </a:p>
+        </p:txBody>
+      </p:sp>
+      <p:sp>
+        <p:nvSpPr>
+          <p:cNvPr id="22" name="TextBox 21"/>
+          <p:cNvSpPr txBox="1"/>
+          <p:nvPr/>
+        </p:nvSpPr>
+        <p:spPr>
+          <a:xfrm>
+            <a:off x="3108960" y="6492240"/>
+            <a:ext cx="5943600" cy="274320"/>
+          </a:xfrm>
+          <a:prstGeom prst="rect">
+            <a:avLst/>
+          </a:prstGeom>
+          <a:noFill/>
+        </p:spPr>
+        <p:txBody>
+          <a:bodyPr wrap="square" lIns="45720" rIns="45720">
+            <a:spAutoFit/>
+          </a:bodyPr>
+          <a:lstStyle/>
+          <a:p>
+            <a:pPr algn="ctr">
+              <a:defRPr>
+                <a:latin typeface="Roboto"/>
+              </a:defRPr>
+            </a:pPr>
+            <a:r>
+              <a:rPr sz="900" b="0">
+                <a:solidFill>
+                  <a:srgbClr val="5F6F63"/>
+                </a:solidFill>
+                <a:latin typeface="Roboto"/>
+              </a:rPr>
+              <a:t>Data retrieved 2pm, Tue 6 Oct 2026 · Generated 8 Oct 2026, 9:35am · Sample data · Made with Python (python-pptx)</a:t>
+            </a:r>
+          </a:p>
+        </p:txBody>
+      </p:sp>
+      <p:sp>
+        <p:nvSpPr>
+          <p:cNvPr id="23" name="TextBox 22"/>
+          <p:cNvSpPr txBox="1"/>
+          <p:nvPr/>
+        </p:nvSpPr>
+        <p:spPr>
+          <a:xfrm>
             <a:off x="8503920" y="6492240"/>
             <a:ext cx="3200400" cy="274320"/>
           </a:xfrm>
@@ -6152,7 +7810,7 @@
           <a:noFill/>
         </p:spPr>
         <p:txBody>
-          <a:bodyPr wrap="square">
+          <a:bodyPr wrap="square" lIns="45720" rIns="45720">
             <a:spAutoFit/>
           </a:bodyPr>
           <a:lstStyle/>
@@ -6169,7 +7827,7 @@
                 </a:solidFill>
                 <a:latin typeface="Roboto"/>
               </a:rPr>
-              <a:t>Slide 4 of 11</a:t>
+              <a:t>Slide 4 of 5</a:t>
             </a:r>
           </a:p>
         </p:txBody>
@@ -6194,7 +7852,44 @@
       <p:grpSpPr/>
       <p:sp>
         <p:nvSpPr>
-          <p:cNvPr id="2" name="Rectangle 1"/>
+          <p:cNvPr id="2" name="Title 1"/>
+          <p:cNvSpPr>
+            <a:spLocks noGrp="1"/>
+          </p:cNvSpPr>
+          <p:nvPr>
+            <p:ph type="title"/>
+          </p:nvPr>
+        </p:nvSpPr>
+        <p:spPr>
+          <a:xfrm>
+            <a:off x="457200" y="384048"/>
+            <a:ext cx="11277295" cy="475488"/>
+          </a:xfrm>
+        </p:spPr>
+        <p:txBody>
+          <a:bodyPr wrap="square" lIns="45720" rIns="45720" tIns="0" bIns="0" anchor="t"/>
+          <a:lstStyle/>
+          <a:p>
+            <a:pPr algn="l">
+              <a:defRPr>
+                <a:latin typeface="Roboto"/>
+              </a:defRPr>
+            </a:pPr>
+            <a:r>
+              <a:rPr sz="2400" b="1">
+                <a:solidFill>
+                  <a:srgbClr val="25342A"/>
+                </a:solidFill>
+                <a:latin typeface="Roboto"/>
+              </a:rPr>
+              <a:t>Fundraising events</a:t>
+            </a:r>
+          </a:p>
+        </p:txBody>
+      </p:sp>
+      <p:sp>
+        <p:nvSpPr>
+          <p:cNvPr id="3" name="Rectangle 2"/>
           <p:cNvSpPr/>
           <p:nvPr/>
         </p:nvSpPr>
@@ -6241,53 +7936,14 @@
       </p:sp>
       <p:sp>
         <p:nvSpPr>
-          <p:cNvPr id="3" name="TextBox 2"/>
-          <p:cNvSpPr txBox="1"/>
-          <p:nvPr/>
-        </p:nvSpPr>
-        <p:spPr>
-          <a:xfrm>
-            <a:off x="457200" y="164592"/>
-            <a:ext cx="7315200" cy="274320"/>
-          </a:xfrm>
-          <a:prstGeom prst="rect">
-            <a:avLst/>
-          </a:prstGeom>
-          <a:noFill/>
-        </p:spPr>
-        <p:txBody>
-          <a:bodyPr wrap="square">
-            <a:spAutoFit/>
-          </a:bodyPr>
-          <a:lstStyle/>
-          <a:p>
-            <a:pPr>
-              <a:defRPr>
-                <a:latin typeface="Roboto"/>
-              </a:defRPr>
-            </a:pPr>
-            <a:r>
-              <a:rPr sz="1000" b="0">
-                <a:solidFill>
-                  <a:srgbClr val="5F6F63"/>
-                </a:solidFill>
-                <a:latin typeface="Roboto"/>
-              </a:rPr>
-              <a:t>Sample Community Services Ltd · What does it cost to raise a dollar?</a:t>
-            </a:r>
-          </a:p>
-        </p:txBody>
-      </p:sp>
-      <p:sp>
-        <p:nvSpPr>
           <p:cNvPr id="4" name="TextBox 3"/>
           <p:cNvSpPr txBox="1"/>
           <p:nvPr/>
         </p:nvSpPr>
         <p:spPr>
           <a:xfrm>
-            <a:off x="457200" y="411480"/>
-            <a:ext cx="11247120" cy="548640"/>
+            <a:off x="457200" y="146304"/>
+            <a:ext cx="8229600" cy="256032"/>
           </a:xfrm>
           <a:prstGeom prst="rect">
             <a:avLst/>
@@ -6295,7 +7951,7 @@
           <a:noFill/>
         </p:spPr>
         <p:txBody>
-          <a:bodyPr wrap="square">
+          <a:bodyPr wrap="square" lIns="45720" rIns="45720">
             <a:spAutoFit/>
           </a:bodyPr>
           <a:lstStyle/>
@@ -6306,27 +7962,66 @@
               </a:defRPr>
             </a:pPr>
             <a:r>
-              <a:rPr sz="2400" b="1">
-                <a:solidFill>
-                  <a:srgbClr val="25342A"/>
+              <a:rPr sz="1000" b="0">
+                <a:solidFill>
+                  <a:srgbClr val="5F6F63"/>
                 </a:solidFill>
                 <a:latin typeface="Roboto"/>
               </a:rPr>
-              <a:t>Headline numbers · Source: Grants</a:t>
-            </a:r>
-          </a:p>
-        </p:txBody>
-      </p:sp>
-      <p:sp>
-        <p:nvSpPr>
-          <p:cNvPr id="5" name="Rectangle 4"/>
+              <a:t>Sample Community Services Ltd · What does it cost to raise a dollar?</a:t>
+            </a:r>
+          </a:p>
+        </p:txBody>
+      </p:sp>
+      <p:sp>
+        <p:nvSpPr>
+          <p:cNvPr id="5" name="TextBox 4"/>
+          <p:cNvSpPr txBox="1"/>
+          <p:nvPr/>
+        </p:nvSpPr>
+        <p:spPr>
+          <a:xfrm>
+            <a:off x="457200" y="914400"/>
+            <a:ext cx="11277295" cy="263652"/>
+          </a:xfrm>
+          <a:prstGeom prst="rect">
+            <a:avLst/>
+          </a:prstGeom>
+          <a:noFill/>
+        </p:spPr>
+        <p:txBody>
+          <a:bodyPr wrap="square" lIns="45720" rIns="45720">
+            <a:spAutoFit/>
+          </a:bodyPr>
+          <a:lstStyle/>
+          <a:p>
+            <a:pPr>
+              <a:defRPr>
+                <a:latin typeface="Roboto"/>
+              </a:defRPr>
+            </a:pPr>
+            <a:r>
+              <a:rPr sz="1200" b="0">
+                <a:solidFill>
+                  <a:srgbClr val="5F6F63"/>
+                </a:solidFill>
+                <a:latin typeface="Roboto"/>
+              </a:rPr>
+              <a:t>Cost to raise a dollar, by month (cents) · Fundraising events</a:t>
+            </a:r>
+          </a:p>
+        </p:txBody>
+      </p:sp>
+      <p:sp>
+        <p:nvSpPr>
+          <p:cNvPr id="6" name="Rectangle 5"/>
           <p:cNvSpPr/>
           <p:nvPr/>
         </p:nvSpPr>
         <p:spPr>
           <a:xfrm>
-            <a:off x="457200" y="1645920"/>
-            <a:ext cx="5501487" cy="2011680"/>
+            <a:off x="457200" y="1278636"/>
+            <a:ext cx="5524347" cy="1188720"/>
           </a:xfrm>
           <a:prstGeom prst="rect">
             <a:avLst/>
@@ -6368,53 +8063,14 @@
       </p:sp>
       <p:sp>
         <p:nvSpPr>
-          <p:cNvPr id="6" name="TextBox 5"/>
-          <p:cNvSpPr txBox="1"/>
-          <p:nvPr/>
-        </p:nvSpPr>
-        <p:spPr>
-          <a:xfrm>
-            <a:off x="640080" y="1783080"/>
-            <a:ext cx="5135727" cy="457200"/>
-          </a:xfrm>
-          <a:prstGeom prst="rect">
-            <a:avLst/>
-          </a:prstGeom>
-          <a:noFill/>
-        </p:spPr>
-        <p:txBody>
-          <a:bodyPr wrap="square">
-            <a:spAutoFit/>
-          </a:bodyPr>
-          <a:lstStyle/>
-          <a:p>
-            <a:pPr>
-              <a:defRPr>
-                <a:latin typeface="Roboto"/>
-              </a:defRPr>
-            </a:pPr>
-            <a:r>
-              <a:rPr sz="1200" b="0">
-                <a:solidFill>
-                  <a:srgbClr val="5F6F63"/>
-                </a:solidFill>
-                <a:latin typeface="Roboto"/>
-              </a:rPr>
-              <a:t>January · Grants</a:t>
-            </a:r>
-          </a:p>
-        </p:txBody>
-      </p:sp>
-      <p:sp>
-        <p:nvSpPr>
           <p:cNvPr id="7" name="TextBox 6"/>
           <p:cNvSpPr txBox="1"/>
           <p:nvPr/>
         </p:nvSpPr>
         <p:spPr>
           <a:xfrm>
-            <a:off x="640080" y="2240280"/>
-            <a:ext cx="5135727" cy="731520"/>
+            <a:off x="594360" y="1351788"/>
+            <a:ext cx="5250027" cy="384048"/>
           </a:xfrm>
           <a:prstGeom prst="rect">
             <a:avLst/>
@@ -6422,7 +8078,7 @@
           <a:noFill/>
         </p:spPr>
         <p:txBody>
-          <a:bodyPr wrap="square">
+          <a:bodyPr wrap="square" lIns="45720" rIns="45720">
             <a:spAutoFit/>
           </a:bodyPr>
           <a:lstStyle/>
@@ -6433,13 +8089,13 @@
               </a:defRPr>
             </a:pPr>
             <a:r>
-              <a:rPr sz="3000" b="1">
-                <a:solidFill>
-                  <a:srgbClr val="2F7A5D"/>
+              <a:rPr sz="1100" b="0">
+                <a:solidFill>
+                  <a:srgbClr val="5F6F63"/>
                 </a:solidFill>
                 <a:latin typeface="Roboto"/>
               </a:rPr>
-              <a:t>12¢</a:t>
+              <a:t>January · Fundraising events</a:t>
             </a:r>
           </a:p>
         </p:txBody>
@@ -6452,8 +8108,8 @@
         </p:nvSpPr>
         <p:spPr>
           <a:xfrm>
-            <a:off x="640080" y="3017520"/>
-            <a:ext cx="5135727" cy="548640"/>
+            <a:off x="594360" y="1717548"/>
+            <a:ext cx="5250027" cy="502920"/>
           </a:xfrm>
           <a:prstGeom prst="rect">
             <a:avLst/>
@@ -6461,7 +8117,7 @@
           <a:noFill/>
         </p:spPr>
         <p:txBody>
-          <a:bodyPr wrap="square">
+          <a:bodyPr wrap="square" lIns="45720" rIns="45720">
             <a:spAutoFit/>
           </a:bodyPr>
           <a:lstStyle/>
@@ -6472,27 +8128,66 @@
               </a:defRPr>
             </a:pPr>
             <a:r>
-              <a:rPr sz="1100" b="0">
+              <a:rPr sz="2200" b="1">
+                <a:solidFill>
+                  <a:srgbClr val="2F7A5D"/>
+                </a:solidFill>
+                <a:latin typeface="Roboto"/>
+              </a:rPr>
+              <a:t>–</a:t>
+            </a:r>
+          </a:p>
+        </p:txBody>
+      </p:sp>
+      <p:sp>
+        <p:nvSpPr>
+          <p:cNvPr id="9" name="TextBox 8"/>
+          <p:cNvSpPr txBox="1"/>
+          <p:nvPr/>
+        </p:nvSpPr>
+        <p:spPr>
+          <a:xfrm>
+            <a:off x="594360" y="2083308"/>
+            <a:ext cx="5250027" cy="329184"/>
+          </a:xfrm>
+          <a:prstGeom prst="rect">
+            <a:avLst/>
+          </a:prstGeom>
+          <a:noFill/>
+        </p:spPr>
+        <p:txBody>
+          <a:bodyPr wrap="square" lIns="45720" rIns="45720">
+            <a:spAutoFit/>
+          </a:bodyPr>
+          <a:lstStyle/>
+          <a:p>
+            <a:pPr>
+              <a:defRPr>
+                <a:latin typeface="Roboto"/>
+              </a:defRPr>
+            </a:pPr>
+            <a:r>
+              <a:rPr sz="1000" b="0">
                 <a:solidFill>
                   <a:srgbClr val="5F6F63"/>
                 </a:solidFill>
                 <a:latin typeface="Roboto"/>
               </a:rPr>
-              <a:t>December 10¢</a:t>
-            </a:r>
-          </a:p>
-        </p:txBody>
-      </p:sp>
-      <p:sp>
-        <p:nvSpPr>
-          <p:cNvPr id="9" name="Rectangle 8"/>
+              <a:t>December 42¢</a:t>
+            </a:r>
+          </a:p>
+        </p:txBody>
+      </p:sp>
+      <p:sp>
+        <p:nvSpPr>
+          <p:cNvPr id="10" name="Rectangle 9"/>
           <p:cNvSpPr/>
           <p:nvPr/>
         </p:nvSpPr>
         <p:spPr>
           <a:xfrm>
-            <a:off x="6233007" y="1645920"/>
-            <a:ext cx="5501487" cy="2011680"/>
+            <a:off x="6210147" y="1278636"/>
+            <a:ext cx="5524347" cy="1188720"/>
           </a:xfrm>
           <a:prstGeom prst="rect">
             <a:avLst/>
@@ -6534,53 +8229,14 @@
       </p:sp>
       <p:sp>
         <p:nvSpPr>
-          <p:cNvPr id="10" name="TextBox 9"/>
-          <p:cNvSpPr txBox="1"/>
-          <p:nvPr/>
-        </p:nvSpPr>
-        <p:spPr>
-          <a:xfrm>
-            <a:off x="6415887" y="1783080"/>
-            <a:ext cx="5135727" cy="457200"/>
-          </a:xfrm>
-          <a:prstGeom prst="rect">
-            <a:avLst/>
-          </a:prstGeom>
-          <a:noFill/>
-        </p:spPr>
-        <p:txBody>
-          <a:bodyPr wrap="square">
-            <a:spAutoFit/>
-          </a:bodyPr>
-          <a:lstStyle/>
-          <a:p>
-            <a:pPr>
-              <a:defRPr>
-                <a:latin typeface="Roboto"/>
-              </a:defRPr>
-            </a:pPr>
-            <a:r>
-              <a:rPr sz="1200" b="0">
-                <a:solidFill>
-                  <a:srgbClr val="5F6F63"/>
-                </a:solidFill>
-                <a:latin typeface="Roboto"/>
-              </a:rPr>
-              <a:t>Year to date (Jul to Jan 2026)</a:t>
-            </a:r>
-          </a:p>
-        </p:txBody>
-      </p:sp>
-      <p:sp>
-        <p:nvSpPr>
           <p:cNvPr id="11" name="TextBox 10"/>
           <p:cNvSpPr txBox="1"/>
           <p:nvPr/>
         </p:nvSpPr>
         <p:spPr>
           <a:xfrm>
-            <a:off x="6415887" y="2240280"/>
-            <a:ext cx="5135727" cy="731520"/>
+            <a:off x="6347307" y="1351788"/>
+            <a:ext cx="5250027" cy="384048"/>
           </a:xfrm>
           <a:prstGeom prst="rect">
             <a:avLst/>
@@ -6588,7 +8244,7 @@
           <a:noFill/>
         </p:spPr>
         <p:txBody>
-          <a:bodyPr wrap="square">
+          <a:bodyPr wrap="square" lIns="45720" rIns="45720">
             <a:spAutoFit/>
           </a:bodyPr>
           <a:lstStyle/>
@@ -6599,13 +8255,13 @@
               </a:defRPr>
             </a:pPr>
             <a:r>
-              <a:rPr sz="3000" b="1">
-                <a:solidFill>
-                  <a:srgbClr val="2F7A5D"/>
+              <a:rPr sz="1100" b="0">
+                <a:solidFill>
+                  <a:srgbClr val="5F6F63"/>
                 </a:solidFill>
                 <a:latin typeface="Roboto"/>
               </a:rPr>
-              <a:t>11¢</a:t>
+              <a:t>Year to date (Jul to Jan 2026)</a:t>
             </a:r>
           </a:p>
         </p:txBody>
@@ -6618,8 +8274,8 @@
         </p:nvSpPr>
         <p:spPr>
           <a:xfrm>
-            <a:off x="6415887" y="3017520"/>
-            <a:ext cx="5135727" cy="548640"/>
+            <a:off x="6347307" y="1717548"/>
+            <a:ext cx="5250027" cy="502920"/>
           </a:xfrm>
           <a:prstGeom prst="rect">
             <a:avLst/>
@@ -6627,7 +8283,7 @@
           <a:noFill/>
         </p:spPr>
         <p:txBody>
-          <a:bodyPr wrap="square">
+          <a:bodyPr wrap="square" lIns="45720" rIns="45720">
             <a:spAutoFit/>
           </a:bodyPr>
           <a:lstStyle/>
@@ -6638,13 +8294,13 @@
               </a:defRPr>
             </a:pPr>
             <a:r>
-              <a:rPr sz="1100" b="0">
-                <a:solidFill>
-                  <a:srgbClr val="5F6F63"/>
+              <a:rPr sz="2200" b="1">
+                <a:solidFill>
+                  <a:srgbClr val="2F7A5D"/>
                 </a:solidFill>
                 <a:latin typeface="Roboto"/>
               </a:rPr>
-              <a:t>same period last year: not in the data</a:t>
+              <a:t>41¢</a:t>
             </a:r>
           </a:p>
         </p:txBody>
@@ -6657,8 +8313,8 @@
         </p:nvSpPr>
         <p:spPr>
           <a:xfrm>
-            <a:off x="457200" y="6492240"/>
-            <a:ext cx="3657600" cy="274320"/>
+            <a:off x="6347307" y="2083308"/>
+            <a:ext cx="5250027" cy="329184"/>
           </a:xfrm>
           <a:prstGeom prst="rect">
             <a:avLst/>
@@ -6666,7 +8322,7 @@
           <a:noFill/>
         </p:spPr>
         <p:txBody>
-          <a:bodyPr wrap="square">
+          <a:bodyPr wrap="square" lIns="45720" rIns="45720">
             <a:spAutoFit/>
           </a:bodyPr>
           <a:lstStyle/>
@@ -6677,132 +8333,56 @@
               </a:defRPr>
             </a:pPr>
             <a:r>
-              <a:rPr sz="900" b="0">
+              <a:rPr sz="1000" b="0">
                 <a:solidFill>
                   <a:srgbClr val="5F6F63"/>
                 </a:solidFill>
                 <a:latin typeface="Roboto"/>
               </a:rPr>
-              <a:t>cost-to-raise.pptx</a:t>
-            </a:r>
-          </a:p>
-        </p:txBody>
-      </p:sp>
-      <p:sp>
-        <p:nvSpPr>
-          <p:cNvPr id="14" name="TextBox 13"/>
-          <p:cNvSpPr txBox="1"/>
+              <a:t>same period last year: not in the data</a:t>
+            </a:r>
+          </a:p>
+        </p:txBody>
+      </p:sp>
+      <p:graphicFrame>
+        <p:nvGraphicFramePr>
+          <p:cNvPr id="14" name="Chart 13"/>
+          <p:cNvGraphicFramePr>
+            <a:graphicFrameLocks noGrp="1"/>
+          </p:cNvGraphicFramePr>
           <p:nvPr/>
-        </p:nvSpPr>
-        <p:spPr>
-          <a:xfrm>
-            <a:off x="4297680" y="6492240"/>
-            <a:ext cx="3657600" cy="274320"/>
-          </a:xfrm>
-          <a:prstGeom prst="rect">
-            <a:avLst/>
-          </a:prstGeom>
-          <a:noFill/>
-        </p:spPr>
-        <p:txBody>
-          <a:bodyPr wrap="square">
-            <a:spAutoFit/>
-          </a:bodyPr>
-          <a:lstStyle/>
-          <a:p>
-            <a:pPr algn="ctr">
-              <a:defRPr>
-                <a:latin typeface="Roboto"/>
-              </a:defRPr>
-            </a:pPr>
-            <a:r>
-              <a:rPr sz="900" b="0">
-                <a:solidFill>
-                  <a:srgbClr val="5F6F63"/>
-                </a:solidFill>
-                <a:latin typeface="Roboto"/>
-              </a:rPr>
-              <a:t>Data retrieved 2pm, Tue 6 Oct 2026 · Sample data</a:t>
-            </a:r>
-          </a:p>
-        </p:txBody>
-      </p:sp>
-      <p:sp>
-        <p:nvSpPr>
-          <p:cNvPr id="15" name="TextBox 14"/>
-          <p:cNvSpPr txBox="1"/>
-          <p:nvPr/>
-        </p:nvSpPr>
-        <p:spPr>
-          <a:xfrm>
-            <a:off x="8503920" y="6492240"/>
-            <a:ext cx="3200400" cy="274320"/>
-          </a:xfrm>
-          <a:prstGeom prst="rect">
-            <a:avLst/>
-          </a:prstGeom>
-          <a:noFill/>
-        </p:spPr>
-        <p:txBody>
-          <a:bodyPr wrap="square">
-            <a:spAutoFit/>
-          </a:bodyPr>
-          <a:lstStyle/>
-          <a:p>
-            <a:pPr algn="r">
-              <a:defRPr>
-                <a:latin typeface="Roboto"/>
-              </a:defRPr>
-            </a:pPr>
-            <a:r>
-              <a:rPr sz="900" b="0">
-                <a:solidFill>
-                  <a:srgbClr val="5F6F63"/>
-                </a:solidFill>
-                <a:latin typeface="Roboto"/>
-              </a:rPr>
-              <a:t>Slide 5 of 11</a:t>
-            </a:r>
-          </a:p>
-        </p:txBody>
-      </p:sp>
-    </p:spTree>
-  </p:cSld>
-  <p:clrMapOvr>
-    <a:masterClrMapping/>
-  </p:clrMapOvr>
-</p:sld>
-</file>
-
-<file path=ppt/slides/slide6.xml><?xml version="1.0" encoding="utf-8"?>
-<p:sld xmlns:a="http://schemas.openxmlformats.org/drawingml/2006/main" xmlns:p="http://schemas.openxmlformats.org/presentationml/2006/main" xmlns:r="http://schemas.openxmlformats.org/officeDocument/2006/relationships">
-  <p:cSld>
-    <p:spTree>
-      <p:nvGrpSpPr>
-        <p:cNvPr id="1" name=""/>
-        <p:cNvGrpSpPr/>
-        <p:nvPr/>
-      </p:nvGrpSpPr>
-      <p:grpSpPr/>
-      <p:sp>
-        <p:nvSpPr>
-          <p:cNvPr id="2" name="Rectangle 1"/>
+        </p:nvGraphicFramePr>
+        <p:xfrm>
+          <a:off x="457200" y="2604516"/>
+          <a:ext cx="11277295" cy="2714244"/>
+        </p:xfrm>
+        <a:graphic>
+          <a:graphicData uri="http://schemas.openxmlformats.org/drawingml/2006/chart">
+            <c:chart xmlns:c="http://schemas.openxmlformats.org/drawingml/2006/chart" r:id="rId3"/>
+          </a:graphicData>
+        </a:graphic>
+      </p:graphicFrame>
+      <p:sp>
+        <p:nvSpPr>
+          <p:cNvPr id="15" name="Rectangle 14"/>
           <p:cNvSpPr/>
           <p:nvPr/>
         </p:nvSpPr>
         <p:spPr>
           <a:xfrm>
-            <a:off x="0" y="0"/>
-            <a:ext cx="12191695" cy="73152"/>
+            <a:off x="457200" y="5410200"/>
+            <a:ext cx="5501487" cy="899160"/>
           </a:xfrm>
           <a:prstGeom prst="rect">
             <a:avLst/>
           </a:prstGeom>
           <a:solidFill>
-            <a:srgbClr val="2F7A5D"/>
+            <a:srgbClr val="FFFFFF"/>
           </a:solidFill>
           <a:ln>
-            <a:noFill/>
+            <a:solidFill>
+              <a:srgbClr val="DCE8DC"/>
+            </a:solidFill>
           </a:ln>
         </p:spPr>
         <p:style>
@@ -6833,14 +8413,14 @@
       </p:sp>
       <p:sp>
         <p:nvSpPr>
-          <p:cNvPr id="3" name="TextBox 2"/>
+          <p:cNvPr id="16" name="TextBox 15"/>
           <p:cNvSpPr txBox="1"/>
           <p:nvPr/>
         </p:nvSpPr>
         <p:spPr>
           <a:xfrm>
-            <a:off x="457200" y="164592"/>
-            <a:ext cx="7315200" cy="274320"/>
+            <a:off x="594360" y="5465064"/>
+            <a:ext cx="5227167" cy="274320"/>
           </a:xfrm>
           <a:prstGeom prst="rect">
             <a:avLst/>
@@ -6848,7 +8428,7 @@
           <a:noFill/>
         </p:spPr>
         <p:txBody>
-          <a:bodyPr wrap="square">
+          <a:bodyPr wrap="square" lIns="45720" rIns="45720">
             <a:spAutoFit/>
           </a:bodyPr>
           <a:lstStyle/>
@@ -6859,27 +8439,27 @@
               </a:defRPr>
             </a:pPr>
             <a:r>
-              <a:rPr sz="1000" b="0">
+              <a:rPr sz="1000" b="1">
                 <a:solidFill>
                   <a:srgbClr val="5F6F63"/>
                 </a:solidFill>
                 <a:latin typeface="Roboto"/>
               </a:rPr>
-              <a:t>Sample Community Services Ltd · What does it cost to raise a dollar?</a:t>
-            </a:r>
-          </a:p>
-        </p:txBody>
-      </p:sp>
-      <p:sp>
-        <p:nvSpPr>
-          <p:cNvPr id="4" name="TextBox 3"/>
+              <a:t>WHAT IT SHOWS</a:t>
+            </a:r>
+          </a:p>
+        </p:txBody>
+      </p:sp>
+      <p:sp>
+        <p:nvSpPr>
+          <p:cNvPr id="17" name="TextBox 16"/>
           <p:cNvSpPr txBox="1"/>
           <p:nvPr/>
         </p:nvSpPr>
         <p:spPr>
           <a:xfrm>
-            <a:off x="457200" y="411480"/>
-            <a:ext cx="11247120" cy="548640"/>
+            <a:off x="594360" y="5739384"/>
+            <a:ext cx="5227167" cy="533400"/>
           </a:xfrm>
           <a:prstGeom prst="rect">
             <a:avLst/>
@@ -6887,7 +8467,7 @@
           <a:noFill/>
         </p:spPr>
         <p:txBody>
-          <a:bodyPr wrap="square">
+          <a:bodyPr wrap="square" lIns="45720" rIns="45720">
             <a:spAutoFit/>
           </a:bodyPr>
           <a:lstStyle/>
@@ -6898,33 +8478,33 @@
               </a:defRPr>
             </a:pPr>
             <a:r>
-              <a:rPr sz="2400" b="1">
+              <a:rPr sz="1200" b="0">
                 <a:solidFill>
                   <a:srgbClr val="25342A"/>
                 </a:solidFill>
                 <a:latin typeface="Roboto"/>
               </a:rPr>
-              <a:t>What it shows · Source: Grants</a:t>
-            </a:r>
-          </a:p>
-        </p:txBody>
-      </p:sp>
-      <p:sp>
-        <p:nvSpPr>
-          <p:cNvPr id="5" name="Rectangle 4"/>
+              <a:t>Fundraising events cost 41¢ to raise each dollar this financial year to date ($17,800 of event costs for $43,000).</a:t>
+            </a:r>
+          </a:p>
+        </p:txBody>
+      </p:sp>
+      <p:sp>
+        <p:nvSpPr>
+          <p:cNvPr id="18" name="Rectangle 17"/>
           <p:cNvSpPr/>
           <p:nvPr/>
         </p:nvSpPr>
         <p:spPr>
           <a:xfrm>
-            <a:off x="457200" y="1554480"/>
-            <a:ext cx="5501487" cy="4389120"/>
+            <a:off x="6233007" y="5410200"/>
+            <a:ext cx="5501487" cy="899160"/>
           </a:xfrm>
           <a:prstGeom prst="rect">
             <a:avLst/>
           </a:prstGeom>
           <a:solidFill>
-            <a:srgbClr val="FFFFFF"/>
+            <a:srgbClr val="EEF5F0"/>
           </a:solidFill>
           <a:ln>
             <a:solidFill>
@@ -6960,14 +8540,14 @@
       </p:sp>
       <p:sp>
         <p:nvSpPr>
-          <p:cNvPr id="6" name="TextBox 5"/>
+          <p:cNvPr id="19" name="TextBox 18"/>
           <p:cNvSpPr txBox="1"/>
           <p:nvPr/>
         </p:nvSpPr>
         <p:spPr>
           <a:xfrm>
-            <a:off x="685800" y="1691640"/>
-            <a:ext cx="5044287" cy="365760"/>
+            <a:off x="6370167" y="5465064"/>
+            <a:ext cx="5227167" cy="274320"/>
           </a:xfrm>
           <a:prstGeom prst="rect">
             <a:avLst/>
@@ -6975,7 +8555,7 @@
           <a:noFill/>
         </p:spPr>
         <p:txBody>
-          <a:bodyPr wrap="square">
+          <a:bodyPr wrap="square" lIns="45720" rIns="45720">
             <a:spAutoFit/>
           </a:bodyPr>
           <a:lstStyle/>
@@ -6986,27 +8566,27 @@
               </a:defRPr>
             </a:pPr>
             <a:r>
-              <a:rPr sz="1100" b="1">
+              <a:rPr sz="1000" b="1">
                 <a:solidFill>
                   <a:srgbClr val="5F6F63"/>
                 </a:solidFill>
                 <a:latin typeface="Roboto"/>
               </a:rPr>
-              <a:t>WHAT IT SHOWS</a:t>
-            </a:r>
-          </a:p>
-        </p:txBody>
-      </p:sp>
-      <p:sp>
-        <p:nvSpPr>
-          <p:cNvPr id="7" name="TextBox 6"/>
+              <a:t>WHAT YOU'D DO ABOUT IT</a:t>
+            </a:r>
+          </a:p>
+        </p:txBody>
+      </p:sp>
+      <p:sp>
+        <p:nvSpPr>
+          <p:cNvPr id="20" name="TextBox 19"/>
           <p:cNvSpPr txBox="1"/>
           <p:nvPr/>
         </p:nvSpPr>
         <p:spPr>
           <a:xfrm>
-            <a:off x="685800" y="2103120"/>
-            <a:ext cx="5044287" cy="3749039"/>
+            <a:off x="6370167" y="5739384"/>
+            <a:ext cx="5227167" cy="533400"/>
           </a:xfrm>
           <a:prstGeom prst="rect">
             <a:avLst/>
@@ -7014,7 +8594,7 @@
           <a:noFill/>
         </p:spPr>
         <p:txBody>
-          <a:bodyPr wrap="square">
+          <a:bodyPr wrap="square" lIns="45720" rIns="45720">
             <a:spAutoFit/>
           </a:bodyPr>
           <a:lstStyle/>
@@ -7025,76 +8605,27 @@
               </a:defRPr>
             </a:pPr>
             <a:r>
-              <a:rPr sz="1600" b="0">
+              <a:rPr sz="1200" b="0">
                 <a:solidFill>
                   <a:srgbClr val="25342A"/>
                 </a:solidFill>
                 <a:latin typeface="Roboto"/>
               </a:rPr>
-              <a:t>Grants cost 11¢ to raise each dollar this financial year to date ($49,700 of grant writing and reporting for $450,671).</a:t>
-            </a:r>
-          </a:p>
-        </p:txBody>
-      </p:sp>
-      <p:sp>
-        <p:nvSpPr>
-          <p:cNvPr id="8" name="Rectangle 7"/>
-          <p:cNvSpPr/>
-          <p:nvPr/>
-        </p:nvSpPr>
-        <p:spPr>
-          <a:xfrm>
-            <a:off x="6233007" y="1554480"/>
-            <a:ext cx="5501487" cy="4389120"/>
-          </a:xfrm>
-          <a:prstGeom prst="rect">
-            <a:avLst/>
-          </a:prstGeom>
-          <a:solidFill>
-            <a:srgbClr val="EEF5F0"/>
-          </a:solidFill>
-          <a:ln>
-            <a:solidFill>
-              <a:srgbClr val="DCE8DC"/>
-            </a:solidFill>
-          </a:ln>
-        </p:spPr>
-        <p:style>
-          <a:lnRef idx="1">
-            <a:schemeClr val="accent1"/>
-          </a:lnRef>
-          <a:fillRef idx="3">
-            <a:schemeClr val="accent1"/>
-          </a:fillRef>
-          <a:effectRef idx="2">
-            <a:schemeClr val="accent1"/>
-          </a:effectRef>
-          <a:fontRef idx="minor">
-            <a:schemeClr val="lt1"/>
-          </a:fontRef>
-        </p:style>
-        <p:txBody>
-          <a:bodyPr rtlCol="0" anchor="ctr"/>
-          <a:lstStyle/>
-          <a:p>
-            <a:pPr algn="ctr">
-              <a:defRPr>
-                <a:latin typeface="Roboto"/>
-              </a:defRPr>
-            </a:pPr>
-          </a:p>
-        </p:txBody>
-      </p:sp>
-      <p:sp>
-        <p:nvSpPr>
-          <p:cNvPr id="9" name="TextBox 8"/>
+              <a:t>Usually the dearest money to raise: events are worth counting for what else they bring too (new donors, profile).</a:t>
+            </a:r>
+          </a:p>
+        </p:txBody>
+      </p:sp>
+      <p:sp>
+        <p:nvSpPr>
+          <p:cNvPr id="21" name="TextBox 20"/>
           <p:cNvSpPr txBox="1"/>
           <p:nvPr/>
         </p:nvSpPr>
         <p:spPr>
           <a:xfrm>
-            <a:off x="6461607" y="1691640"/>
-            <a:ext cx="5044287" cy="365760"/>
+            <a:off x="457200" y="6492240"/>
+            <a:ext cx="2926080" cy="274320"/>
           </a:xfrm>
           <a:prstGeom prst="rect">
             <a:avLst/>
@@ -7102,7 +8633,7 @@
           <a:noFill/>
         </p:spPr>
         <p:txBody>
-          <a:bodyPr wrap="square">
+          <a:bodyPr wrap="square" lIns="45720" rIns="45720">
             <a:spAutoFit/>
           </a:bodyPr>
           <a:lstStyle/>
@@ -7113,27 +8644,27 @@
               </a:defRPr>
             </a:pPr>
             <a:r>
-              <a:rPr sz="1100" b="1">
+              <a:rPr sz="900" b="0">
                 <a:solidFill>
                   <a:srgbClr val="5F6F63"/>
                 </a:solidFill>
                 <a:latin typeface="Roboto"/>
               </a:rPr>
-              <a:t>WHAT YOU'D DO ABOUT IT</a:t>
-            </a:r>
-          </a:p>
-        </p:txBody>
-      </p:sp>
-      <p:sp>
-        <p:nvSpPr>
-          <p:cNvPr id="10" name="TextBox 9"/>
+              <a:t>cost-to-raise.pptx</a:t>
+            </a:r>
+          </a:p>
+        </p:txBody>
+      </p:sp>
+      <p:sp>
+        <p:nvSpPr>
+          <p:cNvPr id="22" name="TextBox 21"/>
           <p:cNvSpPr txBox="1"/>
           <p:nvPr/>
         </p:nvSpPr>
         <p:spPr>
           <a:xfrm>
-            <a:off x="6461607" y="2103120"/>
-            <a:ext cx="5044287" cy="3749039"/>
+            <a:off x="3108960" y="6492240"/>
+            <a:ext cx="5943600" cy="274320"/>
           </a:xfrm>
           <a:prstGeom prst="rect">
             <a:avLst/>
@@ -7141,38 +8672,38 @@
           <a:noFill/>
         </p:spPr>
         <p:txBody>
-          <a:bodyPr wrap="square">
+          <a:bodyPr wrap="square" lIns="45720" rIns="45720">
             <a:spAutoFit/>
           </a:bodyPr>
           <a:lstStyle/>
           <a:p>
-            <a:pPr>
-              <a:defRPr>
-                <a:latin typeface="Roboto"/>
-              </a:defRPr>
-            </a:pPr>
-            <a:r>
-              <a:rPr sz="1600" b="0">
-                <a:solidFill>
-                  <a:srgbClr val="25342A"/>
+            <a:pPr algn="ctr">
+              <a:defRPr>
+                <a:latin typeface="Roboto"/>
+              </a:defRPr>
+            </a:pPr>
+            <a:r>
+              <a:rPr sz="900" b="0">
+                <a:solidFill>
+                  <a:srgbClr val="5F6F63"/>
                 </a:solidFill>
                 <a:latin typeface="Roboto"/>
               </a:rPr>
-              <a:t>Usually the cheapest money to raise, as long as the time that goes into applications and acquittals is protected.</a:t>
-            </a:r>
-          </a:p>
-        </p:txBody>
-      </p:sp>
-      <p:sp>
-        <p:nvSpPr>
-          <p:cNvPr id="11" name="TextBox 10"/>
+              <a:t>Data retrieved 2pm, Tue 6 Oct 2026 · Generated 8 Oct 2026, 9:35am · Sample data · Made with Python (python-pptx)</a:t>
+            </a:r>
+          </a:p>
+        </p:txBody>
+      </p:sp>
+      <p:sp>
+        <p:nvSpPr>
+          <p:cNvPr id="23" name="TextBox 22"/>
           <p:cNvSpPr txBox="1"/>
           <p:nvPr/>
         </p:nvSpPr>
         <p:spPr>
           <a:xfrm>
-            <a:off x="457200" y="6492240"/>
-            <a:ext cx="3657600" cy="274320"/>
+            <a:off x="8503920" y="6492240"/>
+            <a:ext cx="3200400" cy="274320"/>
           </a:xfrm>
           <a:prstGeom prst="rect">
             <a:avLst/>
@@ -7180,12 +8711,12 @@
           <a:noFill/>
         </p:spPr>
         <p:txBody>
-          <a:bodyPr wrap="square">
+          <a:bodyPr wrap="square" lIns="45720" rIns="45720">
             <a:spAutoFit/>
           </a:bodyPr>
           <a:lstStyle/>
           <a:p>
-            <a:pPr>
+            <a:pPr algn="r">
               <a:defRPr>
                 <a:latin typeface="Roboto"/>
               </a:defRPr>
@@ -7197,1783 +8728,7 @@
                 </a:solidFill>
                 <a:latin typeface="Roboto"/>
               </a:rPr>
-              <a:t>cost-to-raise.pptx</a:t>
-            </a:r>
-          </a:p>
-        </p:txBody>
-      </p:sp>
-      <p:sp>
-        <p:nvSpPr>
-          <p:cNvPr id="12" name="TextBox 11"/>
-          <p:cNvSpPr txBox="1"/>
-          <p:nvPr/>
-        </p:nvSpPr>
-        <p:spPr>
-          <a:xfrm>
-            <a:off x="4297680" y="6492240"/>
-            <a:ext cx="3657600" cy="274320"/>
-          </a:xfrm>
-          <a:prstGeom prst="rect">
-            <a:avLst/>
-          </a:prstGeom>
-          <a:noFill/>
-        </p:spPr>
-        <p:txBody>
-          <a:bodyPr wrap="square">
-            <a:spAutoFit/>
-          </a:bodyPr>
-          <a:lstStyle/>
-          <a:p>
-            <a:pPr algn="ctr">
-              <a:defRPr>
-                <a:latin typeface="Roboto"/>
-              </a:defRPr>
-            </a:pPr>
-            <a:r>
-              <a:rPr sz="900" b="0">
-                <a:solidFill>
-                  <a:srgbClr val="5F6F63"/>
-                </a:solidFill>
-                <a:latin typeface="Roboto"/>
-              </a:rPr>
-              <a:t>Data retrieved 2pm, Tue 6 Oct 2026 · Sample data</a:t>
-            </a:r>
-          </a:p>
-        </p:txBody>
-      </p:sp>
-      <p:sp>
-        <p:nvSpPr>
-          <p:cNvPr id="13" name="TextBox 12"/>
-          <p:cNvSpPr txBox="1"/>
-          <p:nvPr/>
-        </p:nvSpPr>
-        <p:spPr>
-          <a:xfrm>
-            <a:off x="8503920" y="6492240"/>
-            <a:ext cx="3200400" cy="274320"/>
-          </a:xfrm>
-          <a:prstGeom prst="rect">
-            <a:avLst/>
-          </a:prstGeom>
-          <a:noFill/>
-        </p:spPr>
-        <p:txBody>
-          <a:bodyPr wrap="square">
-            <a:spAutoFit/>
-          </a:bodyPr>
-          <a:lstStyle/>
-          <a:p>
-            <a:pPr algn="r">
-              <a:defRPr>
-                <a:latin typeface="Roboto"/>
-              </a:defRPr>
-            </a:pPr>
-            <a:r>
-              <a:rPr sz="900" b="0">
-                <a:solidFill>
-                  <a:srgbClr val="5F6F63"/>
-                </a:solidFill>
-                <a:latin typeface="Roboto"/>
-              </a:rPr>
-              <a:t>Slide 6 of 11</a:t>
-            </a:r>
-          </a:p>
-        </p:txBody>
-      </p:sp>
-    </p:spTree>
-  </p:cSld>
-  <p:clrMapOvr>
-    <a:masterClrMapping/>
-  </p:clrMapOvr>
-</p:sld>
-</file>
-
-<file path=ppt/slides/slide7.xml><?xml version="1.0" encoding="utf-8"?>
-<p:sld xmlns:a="http://schemas.openxmlformats.org/drawingml/2006/main" xmlns:p="http://schemas.openxmlformats.org/presentationml/2006/main" xmlns:r="http://schemas.openxmlformats.org/officeDocument/2006/relationships">
-  <p:cSld>
-    <p:spTree>
-      <p:nvGrpSpPr>
-        <p:cNvPr id="1" name=""/>
-        <p:cNvGrpSpPr/>
-        <p:nvPr/>
-      </p:nvGrpSpPr>
-      <p:grpSpPr/>
-      <p:sp>
-        <p:nvSpPr>
-          <p:cNvPr id="2" name="Rectangle 1"/>
-          <p:cNvSpPr/>
-          <p:nvPr/>
-        </p:nvSpPr>
-        <p:spPr>
-          <a:xfrm>
-            <a:off x="0" y="0"/>
-            <a:ext cx="12191695" cy="73152"/>
-          </a:xfrm>
-          <a:prstGeom prst="rect">
-            <a:avLst/>
-          </a:prstGeom>
-          <a:solidFill>
-            <a:srgbClr val="2F7A5D"/>
-          </a:solidFill>
-          <a:ln>
-            <a:noFill/>
-          </a:ln>
-        </p:spPr>
-        <p:style>
-          <a:lnRef idx="1">
-            <a:schemeClr val="accent1"/>
-          </a:lnRef>
-          <a:fillRef idx="3">
-            <a:schemeClr val="accent1"/>
-          </a:fillRef>
-          <a:effectRef idx="2">
-            <a:schemeClr val="accent1"/>
-          </a:effectRef>
-          <a:fontRef idx="minor">
-            <a:schemeClr val="lt1"/>
-          </a:fontRef>
-        </p:style>
-        <p:txBody>
-          <a:bodyPr rtlCol="0" anchor="ctr"/>
-          <a:lstStyle/>
-          <a:p>
-            <a:pPr algn="ctr">
-              <a:defRPr>
-                <a:latin typeface="Roboto"/>
-              </a:defRPr>
-            </a:pPr>
-          </a:p>
-        </p:txBody>
-      </p:sp>
-      <p:sp>
-        <p:nvSpPr>
-          <p:cNvPr id="3" name="TextBox 2"/>
-          <p:cNvSpPr txBox="1"/>
-          <p:nvPr/>
-        </p:nvSpPr>
-        <p:spPr>
-          <a:xfrm>
-            <a:off x="457200" y="164592"/>
-            <a:ext cx="7315200" cy="274320"/>
-          </a:xfrm>
-          <a:prstGeom prst="rect">
-            <a:avLst/>
-          </a:prstGeom>
-          <a:noFill/>
-        </p:spPr>
-        <p:txBody>
-          <a:bodyPr wrap="square">
-            <a:spAutoFit/>
-          </a:bodyPr>
-          <a:lstStyle/>
-          <a:p>
-            <a:pPr>
-              <a:defRPr>
-                <a:latin typeface="Roboto"/>
-              </a:defRPr>
-            </a:pPr>
-            <a:r>
-              <a:rPr sz="1000" b="0">
-                <a:solidFill>
-                  <a:srgbClr val="5F6F63"/>
-                </a:solidFill>
-                <a:latin typeface="Roboto"/>
-              </a:rPr>
-              <a:t>Sample Community Services Ltd · What does it cost to raise a dollar?</a:t>
-            </a:r>
-          </a:p>
-        </p:txBody>
-      </p:sp>
-      <p:sp>
-        <p:nvSpPr>
-          <p:cNvPr id="4" name="TextBox 3"/>
-          <p:cNvSpPr txBox="1"/>
-          <p:nvPr/>
-        </p:nvSpPr>
-        <p:spPr>
-          <a:xfrm>
-            <a:off x="457200" y="411480"/>
-            <a:ext cx="11247120" cy="548640"/>
-          </a:xfrm>
-          <a:prstGeom prst="rect">
-            <a:avLst/>
-          </a:prstGeom>
-          <a:noFill/>
-        </p:spPr>
-        <p:txBody>
-          <a:bodyPr wrap="square">
-            <a:spAutoFit/>
-          </a:bodyPr>
-          <a:lstStyle/>
-          <a:p>
-            <a:pPr>
-              <a:defRPr>
-                <a:latin typeface="Roboto"/>
-              </a:defRPr>
-            </a:pPr>
-            <a:r>
-              <a:rPr sz="2400" b="1">
-                <a:solidFill>
-                  <a:srgbClr val="25342A"/>
-                </a:solidFill>
-                <a:latin typeface="Roboto"/>
-              </a:rPr>
-              <a:t>Headline numbers · Source: Donations</a:t>
-            </a:r>
-          </a:p>
-        </p:txBody>
-      </p:sp>
-      <p:sp>
-        <p:nvSpPr>
-          <p:cNvPr id="5" name="Rectangle 4"/>
-          <p:cNvSpPr/>
-          <p:nvPr/>
-        </p:nvSpPr>
-        <p:spPr>
-          <a:xfrm>
-            <a:off x="457200" y="1645920"/>
-            <a:ext cx="5501487" cy="2011680"/>
-          </a:xfrm>
-          <a:prstGeom prst="rect">
-            <a:avLst/>
-          </a:prstGeom>
-          <a:solidFill>
-            <a:srgbClr val="F7FAF7"/>
-          </a:solidFill>
-          <a:ln>
-            <a:solidFill>
-              <a:srgbClr val="DCE8DC"/>
-            </a:solidFill>
-          </a:ln>
-        </p:spPr>
-        <p:style>
-          <a:lnRef idx="1">
-            <a:schemeClr val="accent1"/>
-          </a:lnRef>
-          <a:fillRef idx="3">
-            <a:schemeClr val="accent1"/>
-          </a:fillRef>
-          <a:effectRef idx="2">
-            <a:schemeClr val="accent1"/>
-          </a:effectRef>
-          <a:fontRef idx="minor">
-            <a:schemeClr val="lt1"/>
-          </a:fontRef>
-        </p:style>
-        <p:txBody>
-          <a:bodyPr rtlCol="0" anchor="ctr"/>
-          <a:lstStyle/>
-          <a:p>
-            <a:pPr algn="ctr">
-              <a:defRPr>
-                <a:latin typeface="Roboto"/>
-              </a:defRPr>
-            </a:pPr>
-          </a:p>
-        </p:txBody>
-      </p:sp>
-      <p:sp>
-        <p:nvSpPr>
-          <p:cNvPr id="6" name="TextBox 5"/>
-          <p:cNvSpPr txBox="1"/>
-          <p:nvPr/>
-        </p:nvSpPr>
-        <p:spPr>
-          <a:xfrm>
-            <a:off x="640080" y="1783080"/>
-            <a:ext cx="5135727" cy="457200"/>
-          </a:xfrm>
-          <a:prstGeom prst="rect">
-            <a:avLst/>
-          </a:prstGeom>
-          <a:noFill/>
-        </p:spPr>
-        <p:txBody>
-          <a:bodyPr wrap="square">
-            <a:spAutoFit/>
-          </a:bodyPr>
-          <a:lstStyle/>
-          <a:p>
-            <a:pPr>
-              <a:defRPr>
-                <a:latin typeface="Roboto"/>
-              </a:defRPr>
-            </a:pPr>
-            <a:r>
-              <a:rPr sz="1200" b="0">
-                <a:solidFill>
-                  <a:srgbClr val="5F6F63"/>
-                </a:solidFill>
-                <a:latin typeface="Roboto"/>
-              </a:rPr>
-              <a:t>January · Donations</a:t>
-            </a:r>
-          </a:p>
-        </p:txBody>
-      </p:sp>
-      <p:sp>
-        <p:nvSpPr>
-          <p:cNvPr id="7" name="TextBox 6"/>
-          <p:cNvSpPr txBox="1"/>
-          <p:nvPr/>
-        </p:nvSpPr>
-        <p:spPr>
-          <a:xfrm>
-            <a:off x="640080" y="2240280"/>
-            <a:ext cx="5135727" cy="731520"/>
-          </a:xfrm>
-          <a:prstGeom prst="rect">
-            <a:avLst/>
-          </a:prstGeom>
-          <a:noFill/>
-        </p:spPr>
-        <p:txBody>
-          <a:bodyPr wrap="square">
-            <a:spAutoFit/>
-          </a:bodyPr>
-          <a:lstStyle/>
-          <a:p>
-            <a:pPr>
-              <a:defRPr>
-                <a:latin typeface="Roboto"/>
-              </a:defRPr>
-            </a:pPr>
-            <a:r>
-              <a:rPr sz="3000" b="1">
-                <a:solidFill>
-                  <a:srgbClr val="2F7A5D"/>
-                </a:solidFill>
-                <a:latin typeface="Roboto"/>
-              </a:rPr>
-              <a:t>17¢</a:t>
-            </a:r>
-          </a:p>
-        </p:txBody>
-      </p:sp>
-      <p:sp>
-        <p:nvSpPr>
-          <p:cNvPr id="8" name="TextBox 7"/>
-          <p:cNvSpPr txBox="1"/>
-          <p:nvPr/>
-        </p:nvSpPr>
-        <p:spPr>
-          <a:xfrm>
-            <a:off x="640080" y="3017520"/>
-            <a:ext cx="5135727" cy="548640"/>
-          </a:xfrm>
-          <a:prstGeom prst="rect">
-            <a:avLst/>
-          </a:prstGeom>
-          <a:noFill/>
-        </p:spPr>
-        <p:txBody>
-          <a:bodyPr wrap="square">
-            <a:spAutoFit/>
-          </a:bodyPr>
-          <a:lstStyle/>
-          <a:p>
-            <a:pPr>
-              <a:defRPr>
-                <a:latin typeface="Roboto"/>
-              </a:defRPr>
-            </a:pPr>
-            <a:r>
-              <a:rPr sz="1100" b="0">
-                <a:solidFill>
-                  <a:srgbClr val="5F6F63"/>
-                </a:solidFill>
-                <a:latin typeface="Roboto"/>
-              </a:rPr>
-              <a:t>December 17¢</a:t>
-            </a:r>
-          </a:p>
-        </p:txBody>
-      </p:sp>
-      <p:sp>
-        <p:nvSpPr>
-          <p:cNvPr id="9" name="Rectangle 8"/>
-          <p:cNvSpPr/>
-          <p:nvPr/>
-        </p:nvSpPr>
-        <p:spPr>
-          <a:xfrm>
-            <a:off x="6233007" y="1645920"/>
-            <a:ext cx="5501487" cy="2011680"/>
-          </a:xfrm>
-          <a:prstGeom prst="rect">
-            <a:avLst/>
-          </a:prstGeom>
-          <a:solidFill>
-            <a:srgbClr val="F7FAF7"/>
-          </a:solidFill>
-          <a:ln>
-            <a:solidFill>
-              <a:srgbClr val="DCE8DC"/>
-            </a:solidFill>
-          </a:ln>
-        </p:spPr>
-        <p:style>
-          <a:lnRef idx="1">
-            <a:schemeClr val="accent1"/>
-          </a:lnRef>
-          <a:fillRef idx="3">
-            <a:schemeClr val="accent1"/>
-          </a:fillRef>
-          <a:effectRef idx="2">
-            <a:schemeClr val="accent1"/>
-          </a:effectRef>
-          <a:fontRef idx="minor">
-            <a:schemeClr val="lt1"/>
-          </a:fontRef>
-        </p:style>
-        <p:txBody>
-          <a:bodyPr rtlCol="0" anchor="ctr"/>
-          <a:lstStyle/>
-          <a:p>
-            <a:pPr algn="ctr">
-              <a:defRPr>
-                <a:latin typeface="Roboto"/>
-              </a:defRPr>
-            </a:pPr>
-          </a:p>
-        </p:txBody>
-      </p:sp>
-      <p:sp>
-        <p:nvSpPr>
-          <p:cNvPr id="10" name="TextBox 9"/>
-          <p:cNvSpPr txBox="1"/>
-          <p:nvPr/>
-        </p:nvSpPr>
-        <p:spPr>
-          <a:xfrm>
-            <a:off x="6415887" y="1783080"/>
-            <a:ext cx="5135727" cy="457200"/>
-          </a:xfrm>
-          <a:prstGeom prst="rect">
-            <a:avLst/>
-          </a:prstGeom>
-          <a:noFill/>
-        </p:spPr>
-        <p:txBody>
-          <a:bodyPr wrap="square">
-            <a:spAutoFit/>
-          </a:bodyPr>
-          <a:lstStyle/>
-          <a:p>
-            <a:pPr>
-              <a:defRPr>
-                <a:latin typeface="Roboto"/>
-              </a:defRPr>
-            </a:pPr>
-            <a:r>
-              <a:rPr sz="1200" b="0">
-                <a:solidFill>
-                  <a:srgbClr val="5F6F63"/>
-                </a:solidFill>
-                <a:latin typeface="Roboto"/>
-              </a:rPr>
-              <a:t>Year to date (Jul to Jan 2026)</a:t>
-            </a:r>
-          </a:p>
-        </p:txBody>
-      </p:sp>
-      <p:sp>
-        <p:nvSpPr>
-          <p:cNvPr id="11" name="TextBox 10"/>
-          <p:cNvSpPr txBox="1"/>
-          <p:nvPr/>
-        </p:nvSpPr>
-        <p:spPr>
-          <a:xfrm>
-            <a:off x="6415887" y="2240280"/>
-            <a:ext cx="5135727" cy="731520"/>
-          </a:xfrm>
-          <a:prstGeom prst="rect">
-            <a:avLst/>
-          </a:prstGeom>
-          <a:noFill/>
-        </p:spPr>
-        <p:txBody>
-          <a:bodyPr wrap="square">
-            <a:spAutoFit/>
-          </a:bodyPr>
-          <a:lstStyle/>
-          <a:p>
-            <a:pPr>
-              <a:defRPr>
-                <a:latin typeface="Roboto"/>
-              </a:defRPr>
-            </a:pPr>
-            <a:r>
-              <a:rPr sz="3000" b="1">
-                <a:solidFill>
-                  <a:srgbClr val="2F7A5D"/>
-                </a:solidFill>
-                <a:latin typeface="Roboto"/>
-              </a:rPr>
-              <a:t>15¢</a:t>
-            </a:r>
-          </a:p>
-        </p:txBody>
-      </p:sp>
-      <p:sp>
-        <p:nvSpPr>
-          <p:cNvPr id="12" name="TextBox 11"/>
-          <p:cNvSpPr txBox="1"/>
-          <p:nvPr/>
-        </p:nvSpPr>
-        <p:spPr>
-          <a:xfrm>
-            <a:off x="6415887" y="3017520"/>
-            <a:ext cx="5135727" cy="548640"/>
-          </a:xfrm>
-          <a:prstGeom prst="rect">
-            <a:avLst/>
-          </a:prstGeom>
-          <a:noFill/>
-        </p:spPr>
-        <p:txBody>
-          <a:bodyPr wrap="square">
-            <a:spAutoFit/>
-          </a:bodyPr>
-          <a:lstStyle/>
-          <a:p>
-            <a:pPr>
-              <a:defRPr>
-                <a:latin typeface="Roboto"/>
-              </a:defRPr>
-            </a:pPr>
-            <a:r>
-              <a:rPr sz="1100" b="0">
-                <a:solidFill>
-                  <a:srgbClr val="5F6F63"/>
-                </a:solidFill>
-                <a:latin typeface="Roboto"/>
-              </a:rPr>
-              <a:t>same period last year: not in the data</a:t>
-            </a:r>
-          </a:p>
-        </p:txBody>
-      </p:sp>
-      <p:sp>
-        <p:nvSpPr>
-          <p:cNvPr id="13" name="TextBox 12"/>
-          <p:cNvSpPr txBox="1"/>
-          <p:nvPr/>
-        </p:nvSpPr>
-        <p:spPr>
-          <a:xfrm>
-            <a:off x="457200" y="6492240"/>
-            <a:ext cx="3657600" cy="274320"/>
-          </a:xfrm>
-          <a:prstGeom prst="rect">
-            <a:avLst/>
-          </a:prstGeom>
-          <a:noFill/>
-        </p:spPr>
-        <p:txBody>
-          <a:bodyPr wrap="square">
-            <a:spAutoFit/>
-          </a:bodyPr>
-          <a:lstStyle/>
-          <a:p>
-            <a:pPr>
-              <a:defRPr>
-                <a:latin typeface="Roboto"/>
-              </a:defRPr>
-            </a:pPr>
-            <a:r>
-              <a:rPr sz="900" b="0">
-                <a:solidFill>
-                  <a:srgbClr val="5F6F63"/>
-                </a:solidFill>
-                <a:latin typeface="Roboto"/>
-              </a:rPr>
-              <a:t>cost-to-raise.pptx</a:t>
-            </a:r>
-          </a:p>
-        </p:txBody>
-      </p:sp>
-      <p:sp>
-        <p:nvSpPr>
-          <p:cNvPr id="14" name="TextBox 13"/>
-          <p:cNvSpPr txBox="1"/>
-          <p:nvPr/>
-        </p:nvSpPr>
-        <p:spPr>
-          <a:xfrm>
-            <a:off x="4297680" y="6492240"/>
-            <a:ext cx="3657600" cy="274320"/>
-          </a:xfrm>
-          <a:prstGeom prst="rect">
-            <a:avLst/>
-          </a:prstGeom>
-          <a:noFill/>
-        </p:spPr>
-        <p:txBody>
-          <a:bodyPr wrap="square">
-            <a:spAutoFit/>
-          </a:bodyPr>
-          <a:lstStyle/>
-          <a:p>
-            <a:pPr algn="ctr">
-              <a:defRPr>
-                <a:latin typeface="Roboto"/>
-              </a:defRPr>
-            </a:pPr>
-            <a:r>
-              <a:rPr sz="900" b="0">
-                <a:solidFill>
-                  <a:srgbClr val="5F6F63"/>
-                </a:solidFill>
-                <a:latin typeface="Roboto"/>
-              </a:rPr>
-              <a:t>Data retrieved 2pm, Tue 6 Oct 2026 · Sample data</a:t>
-            </a:r>
-          </a:p>
-        </p:txBody>
-      </p:sp>
-      <p:sp>
-        <p:nvSpPr>
-          <p:cNvPr id="15" name="TextBox 14"/>
-          <p:cNvSpPr txBox="1"/>
-          <p:nvPr/>
-        </p:nvSpPr>
-        <p:spPr>
-          <a:xfrm>
-            <a:off x="8503920" y="6492240"/>
-            <a:ext cx="3200400" cy="274320"/>
-          </a:xfrm>
-          <a:prstGeom prst="rect">
-            <a:avLst/>
-          </a:prstGeom>
-          <a:noFill/>
-        </p:spPr>
-        <p:txBody>
-          <a:bodyPr wrap="square">
-            <a:spAutoFit/>
-          </a:bodyPr>
-          <a:lstStyle/>
-          <a:p>
-            <a:pPr algn="r">
-              <a:defRPr>
-                <a:latin typeface="Roboto"/>
-              </a:defRPr>
-            </a:pPr>
-            <a:r>
-              <a:rPr sz="900" b="0">
-                <a:solidFill>
-                  <a:srgbClr val="5F6F63"/>
-                </a:solidFill>
-                <a:latin typeface="Roboto"/>
-              </a:rPr>
-              <a:t>Slide 7 of 11</a:t>
-            </a:r>
-          </a:p>
-        </p:txBody>
-      </p:sp>
-    </p:spTree>
-  </p:cSld>
-  <p:clrMapOvr>
-    <a:masterClrMapping/>
-  </p:clrMapOvr>
-</p:sld>
-</file>
-
-<file path=ppt/slides/slide8.xml><?xml version="1.0" encoding="utf-8"?>
-<p:sld xmlns:a="http://schemas.openxmlformats.org/drawingml/2006/main" xmlns:p="http://schemas.openxmlformats.org/presentationml/2006/main" xmlns:r="http://schemas.openxmlformats.org/officeDocument/2006/relationships">
-  <p:cSld>
-    <p:spTree>
-      <p:nvGrpSpPr>
-        <p:cNvPr id="1" name=""/>
-        <p:cNvGrpSpPr/>
-        <p:nvPr/>
-      </p:nvGrpSpPr>
-      <p:grpSpPr/>
-      <p:sp>
-        <p:nvSpPr>
-          <p:cNvPr id="2" name="Rectangle 1"/>
-          <p:cNvSpPr/>
-          <p:nvPr/>
-        </p:nvSpPr>
-        <p:spPr>
-          <a:xfrm>
-            <a:off x="0" y="0"/>
-            <a:ext cx="12191695" cy="73152"/>
-          </a:xfrm>
-          <a:prstGeom prst="rect">
-            <a:avLst/>
-          </a:prstGeom>
-          <a:solidFill>
-            <a:srgbClr val="2F7A5D"/>
-          </a:solidFill>
-          <a:ln>
-            <a:noFill/>
-          </a:ln>
-        </p:spPr>
-        <p:style>
-          <a:lnRef idx="1">
-            <a:schemeClr val="accent1"/>
-          </a:lnRef>
-          <a:fillRef idx="3">
-            <a:schemeClr val="accent1"/>
-          </a:fillRef>
-          <a:effectRef idx="2">
-            <a:schemeClr val="accent1"/>
-          </a:effectRef>
-          <a:fontRef idx="minor">
-            <a:schemeClr val="lt1"/>
-          </a:fontRef>
-        </p:style>
-        <p:txBody>
-          <a:bodyPr rtlCol="0" anchor="ctr"/>
-          <a:lstStyle/>
-          <a:p>
-            <a:pPr algn="ctr">
-              <a:defRPr>
-                <a:latin typeface="Roboto"/>
-              </a:defRPr>
-            </a:pPr>
-          </a:p>
-        </p:txBody>
-      </p:sp>
-      <p:sp>
-        <p:nvSpPr>
-          <p:cNvPr id="3" name="TextBox 2"/>
-          <p:cNvSpPr txBox="1"/>
-          <p:nvPr/>
-        </p:nvSpPr>
-        <p:spPr>
-          <a:xfrm>
-            <a:off x="457200" y="164592"/>
-            <a:ext cx="7315200" cy="274320"/>
-          </a:xfrm>
-          <a:prstGeom prst="rect">
-            <a:avLst/>
-          </a:prstGeom>
-          <a:noFill/>
-        </p:spPr>
-        <p:txBody>
-          <a:bodyPr wrap="square">
-            <a:spAutoFit/>
-          </a:bodyPr>
-          <a:lstStyle/>
-          <a:p>
-            <a:pPr>
-              <a:defRPr>
-                <a:latin typeface="Roboto"/>
-              </a:defRPr>
-            </a:pPr>
-            <a:r>
-              <a:rPr sz="1000" b="0">
-                <a:solidFill>
-                  <a:srgbClr val="5F6F63"/>
-                </a:solidFill>
-                <a:latin typeface="Roboto"/>
-              </a:rPr>
-              <a:t>Sample Community Services Ltd · What does it cost to raise a dollar?</a:t>
-            </a:r>
-          </a:p>
-        </p:txBody>
-      </p:sp>
-      <p:sp>
-        <p:nvSpPr>
-          <p:cNvPr id="4" name="TextBox 3"/>
-          <p:cNvSpPr txBox="1"/>
-          <p:nvPr/>
-        </p:nvSpPr>
-        <p:spPr>
-          <a:xfrm>
-            <a:off x="457200" y="411480"/>
-            <a:ext cx="11247120" cy="548640"/>
-          </a:xfrm>
-          <a:prstGeom prst="rect">
-            <a:avLst/>
-          </a:prstGeom>
-          <a:noFill/>
-        </p:spPr>
-        <p:txBody>
-          <a:bodyPr wrap="square">
-            <a:spAutoFit/>
-          </a:bodyPr>
-          <a:lstStyle/>
-          <a:p>
-            <a:pPr>
-              <a:defRPr>
-                <a:latin typeface="Roboto"/>
-              </a:defRPr>
-            </a:pPr>
-            <a:r>
-              <a:rPr sz="2400" b="1">
-                <a:solidFill>
-                  <a:srgbClr val="25342A"/>
-                </a:solidFill>
-                <a:latin typeface="Roboto"/>
-              </a:rPr>
-              <a:t>What it shows · Source: Donations</a:t>
-            </a:r>
-          </a:p>
-        </p:txBody>
-      </p:sp>
-      <p:sp>
-        <p:nvSpPr>
-          <p:cNvPr id="5" name="Rectangle 4"/>
-          <p:cNvSpPr/>
-          <p:nvPr/>
-        </p:nvSpPr>
-        <p:spPr>
-          <a:xfrm>
-            <a:off x="457200" y="1554480"/>
-            <a:ext cx="5501487" cy="4389120"/>
-          </a:xfrm>
-          <a:prstGeom prst="rect">
-            <a:avLst/>
-          </a:prstGeom>
-          <a:solidFill>
-            <a:srgbClr val="FFFFFF"/>
-          </a:solidFill>
-          <a:ln>
-            <a:solidFill>
-              <a:srgbClr val="DCE8DC"/>
-            </a:solidFill>
-          </a:ln>
-        </p:spPr>
-        <p:style>
-          <a:lnRef idx="1">
-            <a:schemeClr val="accent1"/>
-          </a:lnRef>
-          <a:fillRef idx="3">
-            <a:schemeClr val="accent1"/>
-          </a:fillRef>
-          <a:effectRef idx="2">
-            <a:schemeClr val="accent1"/>
-          </a:effectRef>
-          <a:fontRef idx="minor">
-            <a:schemeClr val="lt1"/>
-          </a:fontRef>
-        </p:style>
-        <p:txBody>
-          <a:bodyPr rtlCol="0" anchor="ctr"/>
-          <a:lstStyle/>
-          <a:p>
-            <a:pPr algn="ctr">
-              <a:defRPr>
-                <a:latin typeface="Roboto"/>
-              </a:defRPr>
-            </a:pPr>
-          </a:p>
-        </p:txBody>
-      </p:sp>
-      <p:sp>
-        <p:nvSpPr>
-          <p:cNvPr id="6" name="TextBox 5"/>
-          <p:cNvSpPr txBox="1"/>
-          <p:nvPr/>
-        </p:nvSpPr>
-        <p:spPr>
-          <a:xfrm>
-            <a:off x="685800" y="1691640"/>
-            <a:ext cx="5044287" cy="365760"/>
-          </a:xfrm>
-          <a:prstGeom prst="rect">
-            <a:avLst/>
-          </a:prstGeom>
-          <a:noFill/>
-        </p:spPr>
-        <p:txBody>
-          <a:bodyPr wrap="square">
-            <a:spAutoFit/>
-          </a:bodyPr>
-          <a:lstStyle/>
-          <a:p>
-            <a:pPr>
-              <a:defRPr>
-                <a:latin typeface="Roboto"/>
-              </a:defRPr>
-            </a:pPr>
-            <a:r>
-              <a:rPr sz="1100" b="1">
-                <a:solidFill>
-                  <a:srgbClr val="5F6F63"/>
-                </a:solidFill>
-                <a:latin typeface="Roboto"/>
-              </a:rPr>
-              <a:t>WHAT IT SHOWS</a:t>
-            </a:r>
-          </a:p>
-        </p:txBody>
-      </p:sp>
-      <p:sp>
-        <p:nvSpPr>
-          <p:cNvPr id="7" name="TextBox 6"/>
-          <p:cNvSpPr txBox="1"/>
-          <p:nvPr/>
-        </p:nvSpPr>
-        <p:spPr>
-          <a:xfrm>
-            <a:off x="685800" y="2103120"/>
-            <a:ext cx="5044287" cy="3749039"/>
-          </a:xfrm>
-          <a:prstGeom prst="rect">
-            <a:avLst/>
-          </a:prstGeom>
-          <a:noFill/>
-        </p:spPr>
-        <p:txBody>
-          <a:bodyPr wrap="square">
-            <a:spAutoFit/>
-          </a:bodyPr>
-          <a:lstStyle/>
-          <a:p>
-            <a:pPr>
-              <a:defRPr>
-                <a:latin typeface="Roboto"/>
-              </a:defRPr>
-            </a:pPr>
-            <a:r>
-              <a:rPr sz="1600" b="0">
-                <a:solidFill>
-                  <a:srgbClr val="25342A"/>
-                </a:solidFill>
-                <a:latin typeface="Roboto"/>
-              </a:rPr>
-              <a:t>Donations cost 15¢ to raise each dollar this financial year to date ($18,500 of donor campaigns for $119,700).</a:t>
-            </a:r>
-          </a:p>
-        </p:txBody>
-      </p:sp>
-      <p:sp>
-        <p:nvSpPr>
-          <p:cNvPr id="8" name="Rectangle 7"/>
-          <p:cNvSpPr/>
-          <p:nvPr/>
-        </p:nvSpPr>
-        <p:spPr>
-          <a:xfrm>
-            <a:off x="6233007" y="1554480"/>
-            <a:ext cx="5501487" cy="4389120"/>
-          </a:xfrm>
-          <a:prstGeom prst="rect">
-            <a:avLst/>
-          </a:prstGeom>
-          <a:solidFill>
-            <a:srgbClr val="EEF5F0"/>
-          </a:solidFill>
-          <a:ln>
-            <a:solidFill>
-              <a:srgbClr val="DCE8DC"/>
-            </a:solidFill>
-          </a:ln>
-        </p:spPr>
-        <p:style>
-          <a:lnRef idx="1">
-            <a:schemeClr val="accent1"/>
-          </a:lnRef>
-          <a:fillRef idx="3">
-            <a:schemeClr val="accent1"/>
-          </a:fillRef>
-          <a:effectRef idx="2">
-            <a:schemeClr val="accent1"/>
-          </a:effectRef>
-          <a:fontRef idx="minor">
-            <a:schemeClr val="lt1"/>
-          </a:fontRef>
-        </p:style>
-        <p:txBody>
-          <a:bodyPr rtlCol="0" anchor="ctr"/>
-          <a:lstStyle/>
-          <a:p>
-            <a:pPr algn="ctr">
-              <a:defRPr>
-                <a:latin typeface="Roboto"/>
-              </a:defRPr>
-            </a:pPr>
-          </a:p>
-        </p:txBody>
-      </p:sp>
-      <p:sp>
-        <p:nvSpPr>
-          <p:cNvPr id="9" name="TextBox 8"/>
-          <p:cNvSpPr txBox="1"/>
-          <p:nvPr/>
-        </p:nvSpPr>
-        <p:spPr>
-          <a:xfrm>
-            <a:off x="6461607" y="1691640"/>
-            <a:ext cx="5044287" cy="365760"/>
-          </a:xfrm>
-          <a:prstGeom prst="rect">
-            <a:avLst/>
-          </a:prstGeom>
-          <a:noFill/>
-        </p:spPr>
-        <p:txBody>
-          <a:bodyPr wrap="square">
-            <a:spAutoFit/>
-          </a:bodyPr>
-          <a:lstStyle/>
-          <a:p>
-            <a:pPr>
-              <a:defRPr>
-                <a:latin typeface="Roboto"/>
-              </a:defRPr>
-            </a:pPr>
-            <a:r>
-              <a:rPr sz="1100" b="1">
-                <a:solidFill>
-                  <a:srgbClr val="5F6F63"/>
-                </a:solidFill>
-                <a:latin typeface="Roboto"/>
-              </a:rPr>
-              <a:t>WHAT YOU'D DO ABOUT IT</a:t>
-            </a:r>
-          </a:p>
-        </p:txBody>
-      </p:sp>
-      <p:sp>
-        <p:nvSpPr>
-          <p:cNvPr id="10" name="TextBox 9"/>
-          <p:cNvSpPr txBox="1"/>
-          <p:nvPr/>
-        </p:nvSpPr>
-        <p:spPr>
-          <a:xfrm>
-            <a:off x="6461607" y="2103120"/>
-            <a:ext cx="5044287" cy="3749039"/>
-          </a:xfrm>
-          <a:prstGeom prst="rect">
-            <a:avLst/>
-          </a:prstGeom>
-          <a:noFill/>
-        </p:spPr>
-        <p:txBody>
-          <a:bodyPr wrap="square">
-            <a:spAutoFit/>
-          </a:bodyPr>
-          <a:lstStyle/>
-          <a:p>
-            <a:pPr>
-              <a:defRPr>
-                <a:latin typeface="Roboto"/>
-              </a:defRPr>
-            </a:pPr>
-            <a:r>
-              <a:rPr sz="1600" b="0">
-                <a:solidFill>
-                  <a:srgbClr val="25342A"/>
-                </a:solidFill>
-                <a:latin typeface="Roboto"/>
-              </a:rPr>
-              <a:t>Steady and cheap, and untied: the money that builds reserves.</a:t>
-            </a:r>
-          </a:p>
-        </p:txBody>
-      </p:sp>
-      <p:sp>
-        <p:nvSpPr>
-          <p:cNvPr id="11" name="TextBox 10"/>
-          <p:cNvSpPr txBox="1"/>
-          <p:nvPr/>
-        </p:nvSpPr>
-        <p:spPr>
-          <a:xfrm>
-            <a:off x="457200" y="6492240"/>
-            <a:ext cx="3657600" cy="274320"/>
-          </a:xfrm>
-          <a:prstGeom prst="rect">
-            <a:avLst/>
-          </a:prstGeom>
-          <a:noFill/>
-        </p:spPr>
-        <p:txBody>
-          <a:bodyPr wrap="square">
-            <a:spAutoFit/>
-          </a:bodyPr>
-          <a:lstStyle/>
-          <a:p>
-            <a:pPr>
-              <a:defRPr>
-                <a:latin typeface="Roboto"/>
-              </a:defRPr>
-            </a:pPr>
-            <a:r>
-              <a:rPr sz="900" b="0">
-                <a:solidFill>
-                  <a:srgbClr val="5F6F63"/>
-                </a:solidFill>
-                <a:latin typeface="Roboto"/>
-              </a:rPr>
-              <a:t>cost-to-raise.pptx</a:t>
-            </a:r>
-          </a:p>
-        </p:txBody>
-      </p:sp>
-      <p:sp>
-        <p:nvSpPr>
-          <p:cNvPr id="12" name="TextBox 11"/>
-          <p:cNvSpPr txBox="1"/>
-          <p:nvPr/>
-        </p:nvSpPr>
-        <p:spPr>
-          <a:xfrm>
-            <a:off x="4297680" y="6492240"/>
-            <a:ext cx="3657600" cy="274320"/>
-          </a:xfrm>
-          <a:prstGeom prst="rect">
-            <a:avLst/>
-          </a:prstGeom>
-          <a:noFill/>
-        </p:spPr>
-        <p:txBody>
-          <a:bodyPr wrap="square">
-            <a:spAutoFit/>
-          </a:bodyPr>
-          <a:lstStyle/>
-          <a:p>
-            <a:pPr algn="ctr">
-              <a:defRPr>
-                <a:latin typeface="Roboto"/>
-              </a:defRPr>
-            </a:pPr>
-            <a:r>
-              <a:rPr sz="900" b="0">
-                <a:solidFill>
-                  <a:srgbClr val="5F6F63"/>
-                </a:solidFill>
-                <a:latin typeface="Roboto"/>
-              </a:rPr>
-              <a:t>Data retrieved 2pm, Tue 6 Oct 2026 · Sample data</a:t>
-            </a:r>
-          </a:p>
-        </p:txBody>
-      </p:sp>
-      <p:sp>
-        <p:nvSpPr>
-          <p:cNvPr id="13" name="TextBox 12"/>
-          <p:cNvSpPr txBox="1"/>
-          <p:nvPr/>
-        </p:nvSpPr>
-        <p:spPr>
-          <a:xfrm>
-            <a:off x="8503920" y="6492240"/>
-            <a:ext cx="3200400" cy="274320"/>
-          </a:xfrm>
-          <a:prstGeom prst="rect">
-            <a:avLst/>
-          </a:prstGeom>
-          <a:noFill/>
-        </p:spPr>
-        <p:txBody>
-          <a:bodyPr wrap="square">
-            <a:spAutoFit/>
-          </a:bodyPr>
-          <a:lstStyle/>
-          <a:p>
-            <a:pPr algn="r">
-              <a:defRPr>
-                <a:latin typeface="Roboto"/>
-              </a:defRPr>
-            </a:pPr>
-            <a:r>
-              <a:rPr sz="900" b="0">
-                <a:solidFill>
-                  <a:srgbClr val="5F6F63"/>
-                </a:solidFill>
-                <a:latin typeface="Roboto"/>
-              </a:rPr>
-              <a:t>Slide 8 of 11</a:t>
-            </a:r>
-          </a:p>
-        </p:txBody>
-      </p:sp>
-    </p:spTree>
-  </p:cSld>
-  <p:clrMapOvr>
-    <a:masterClrMapping/>
-  </p:clrMapOvr>
-</p:sld>
-</file>
-
-<file path=ppt/slides/slide9.xml><?xml version="1.0" encoding="utf-8"?>
-<p:sld xmlns:a="http://schemas.openxmlformats.org/drawingml/2006/main" xmlns:p="http://schemas.openxmlformats.org/presentationml/2006/main" xmlns:r="http://schemas.openxmlformats.org/officeDocument/2006/relationships">
-  <p:cSld>
-    <p:spTree>
-      <p:nvGrpSpPr>
-        <p:cNvPr id="1" name=""/>
-        <p:cNvGrpSpPr/>
-        <p:nvPr/>
-      </p:nvGrpSpPr>
-      <p:grpSpPr/>
-      <p:sp>
-        <p:nvSpPr>
-          <p:cNvPr id="2" name="Rectangle 1"/>
-          <p:cNvSpPr/>
-          <p:nvPr/>
-        </p:nvSpPr>
-        <p:spPr>
-          <a:xfrm>
-            <a:off x="0" y="0"/>
-            <a:ext cx="12191695" cy="73152"/>
-          </a:xfrm>
-          <a:prstGeom prst="rect">
-            <a:avLst/>
-          </a:prstGeom>
-          <a:solidFill>
-            <a:srgbClr val="2F7A5D"/>
-          </a:solidFill>
-          <a:ln>
-            <a:noFill/>
-          </a:ln>
-        </p:spPr>
-        <p:style>
-          <a:lnRef idx="1">
-            <a:schemeClr val="accent1"/>
-          </a:lnRef>
-          <a:fillRef idx="3">
-            <a:schemeClr val="accent1"/>
-          </a:fillRef>
-          <a:effectRef idx="2">
-            <a:schemeClr val="accent1"/>
-          </a:effectRef>
-          <a:fontRef idx="minor">
-            <a:schemeClr val="lt1"/>
-          </a:fontRef>
-        </p:style>
-        <p:txBody>
-          <a:bodyPr rtlCol="0" anchor="ctr"/>
-          <a:lstStyle/>
-          <a:p>
-            <a:pPr algn="ctr">
-              <a:defRPr>
-                <a:latin typeface="Roboto"/>
-              </a:defRPr>
-            </a:pPr>
-          </a:p>
-        </p:txBody>
-      </p:sp>
-      <p:sp>
-        <p:nvSpPr>
-          <p:cNvPr id="3" name="TextBox 2"/>
-          <p:cNvSpPr txBox="1"/>
-          <p:nvPr/>
-        </p:nvSpPr>
-        <p:spPr>
-          <a:xfrm>
-            <a:off x="457200" y="164592"/>
-            <a:ext cx="7315200" cy="274320"/>
-          </a:xfrm>
-          <a:prstGeom prst="rect">
-            <a:avLst/>
-          </a:prstGeom>
-          <a:noFill/>
-        </p:spPr>
-        <p:txBody>
-          <a:bodyPr wrap="square">
-            <a:spAutoFit/>
-          </a:bodyPr>
-          <a:lstStyle/>
-          <a:p>
-            <a:pPr>
-              <a:defRPr>
-                <a:latin typeface="Roboto"/>
-              </a:defRPr>
-            </a:pPr>
-            <a:r>
-              <a:rPr sz="1000" b="0">
-                <a:solidFill>
-                  <a:srgbClr val="5F6F63"/>
-                </a:solidFill>
-                <a:latin typeface="Roboto"/>
-              </a:rPr>
-              <a:t>Sample Community Services Ltd · What does it cost to raise a dollar?</a:t>
-            </a:r>
-          </a:p>
-        </p:txBody>
-      </p:sp>
-      <p:sp>
-        <p:nvSpPr>
-          <p:cNvPr id="4" name="TextBox 3"/>
-          <p:cNvSpPr txBox="1"/>
-          <p:nvPr/>
-        </p:nvSpPr>
-        <p:spPr>
-          <a:xfrm>
-            <a:off x="457200" y="411480"/>
-            <a:ext cx="11247120" cy="548640"/>
-          </a:xfrm>
-          <a:prstGeom prst="rect">
-            <a:avLst/>
-          </a:prstGeom>
-          <a:noFill/>
-        </p:spPr>
-        <p:txBody>
-          <a:bodyPr wrap="square">
-            <a:spAutoFit/>
-          </a:bodyPr>
-          <a:lstStyle/>
-          <a:p>
-            <a:pPr>
-              <a:defRPr>
-                <a:latin typeface="Roboto"/>
-              </a:defRPr>
-            </a:pPr>
-            <a:r>
-              <a:rPr sz="2400" b="1">
-                <a:solidFill>
-                  <a:srgbClr val="25342A"/>
-                </a:solidFill>
-                <a:latin typeface="Roboto"/>
-              </a:rPr>
-              <a:t>Headline numbers · Source: Fundraising events</a:t>
-            </a:r>
-          </a:p>
-        </p:txBody>
-      </p:sp>
-      <p:sp>
-        <p:nvSpPr>
-          <p:cNvPr id="5" name="Rectangle 4"/>
-          <p:cNvSpPr/>
-          <p:nvPr/>
-        </p:nvSpPr>
-        <p:spPr>
-          <a:xfrm>
-            <a:off x="457200" y="1645920"/>
-            <a:ext cx="5501487" cy="2011680"/>
-          </a:xfrm>
-          <a:prstGeom prst="rect">
-            <a:avLst/>
-          </a:prstGeom>
-          <a:solidFill>
-            <a:srgbClr val="F7FAF7"/>
-          </a:solidFill>
-          <a:ln>
-            <a:solidFill>
-              <a:srgbClr val="DCE8DC"/>
-            </a:solidFill>
-          </a:ln>
-        </p:spPr>
-        <p:style>
-          <a:lnRef idx="1">
-            <a:schemeClr val="accent1"/>
-          </a:lnRef>
-          <a:fillRef idx="3">
-            <a:schemeClr val="accent1"/>
-          </a:fillRef>
-          <a:effectRef idx="2">
-            <a:schemeClr val="accent1"/>
-          </a:effectRef>
-          <a:fontRef idx="minor">
-            <a:schemeClr val="lt1"/>
-          </a:fontRef>
-        </p:style>
-        <p:txBody>
-          <a:bodyPr rtlCol="0" anchor="ctr"/>
-          <a:lstStyle/>
-          <a:p>
-            <a:pPr algn="ctr">
-              <a:defRPr>
-                <a:latin typeface="Roboto"/>
-              </a:defRPr>
-            </a:pPr>
-          </a:p>
-        </p:txBody>
-      </p:sp>
-      <p:sp>
-        <p:nvSpPr>
-          <p:cNvPr id="6" name="TextBox 5"/>
-          <p:cNvSpPr txBox="1"/>
-          <p:nvPr/>
-        </p:nvSpPr>
-        <p:spPr>
-          <a:xfrm>
-            <a:off x="640080" y="1783080"/>
-            <a:ext cx="5135727" cy="457200"/>
-          </a:xfrm>
-          <a:prstGeom prst="rect">
-            <a:avLst/>
-          </a:prstGeom>
-          <a:noFill/>
-        </p:spPr>
-        <p:txBody>
-          <a:bodyPr wrap="square">
-            <a:spAutoFit/>
-          </a:bodyPr>
-          <a:lstStyle/>
-          <a:p>
-            <a:pPr>
-              <a:defRPr>
-                <a:latin typeface="Roboto"/>
-              </a:defRPr>
-            </a:pPr>
-            <a:r>
-              <a:rPr sz="1200" b="0">
-                <a:solidFill>
-                  <a:srgbClr val="5F6F63"/>
-                </a:solidFill>
-                <a:latin typeface="Roboto"/>
-              </a:rPr>
-              <a:t>January · Fundraising events</a:t>
-            </a:r>
-          </a:p>
-        </p:txBody>
-      </p:sp>
-      <p:sp>
-        <p:nvSpPr>
-          <p:cNvPr id="7" name="TextBox 6"/>
-          <p:cNvSpPr txBox="1"/>
-          <p:nvPr/>
-        </p:nvSpPr>
-        <p:spPr>
-          <a:xfrm>
-            <a:off x="640080" y="2240280"/>
-            <a:ext cx="5135727" cy="731520"/>
-          </a:xfrm>
-          <a:prstGeom prst="rect">
-            <a:avLst/>
-          </a:prstGeom>
-          <a:noFill/>
-        </p:spPr>
-        <p:txBody>
-          <a:bodyPr wrap="square">
-            <a:spAutoFit/>
-          </a:bodyPr>
-          <a:lstStyle/>
-          <a:p>
-            <a:pPr>
-              <a:defRPr>
-                <a:latin typeface="Roboto"/>
-              </a:defRPr>
-            </a:pPr>
-            <a:r>
-              <a:rPr sz="3000" b="1">
-                <a:solidFill>
-                  <a:srgbClr val="2F7A5D"/>
-                </a:solidFill>
-                <a:latin typeface="Roboto"/>
-              </a:rPr>
-              <a:t>–</a:t>
-            </a:r>
-          </a:p>
-        </p:txBody>
-      </p:sp>
-      <p:sp>
-        <p:nvSpPr>
-          <p:cNvPr id="8" name="TextBox 7"/>
-          <p:cNvSpPr txBox="1"/>
-          <p:nvPr/>
-        </p:nvSpPr>
-        <p:spPr>
-          <a:xfrm>
-            <a:off x="640080" y="3017520"/>
-            <a:ext cx="5135727" cy="548640"/>
-          </a:xfrm>
-          <a:prstGeom prst="rect">
-            <a:avLst/>
-          </a:prstGeom>
-          <a:noFill/>
-        </p:spPr>
-        <p:txBody>
-          <a:bodyPr wrap="square">
-            <a:spAutoFit/>
-          </a:bodyPr>
-          <a:lstStyle/>
-          <a:p>
-            <a:pPr>
-              <a:defRPr>
-                <a:latin typeface="Roboto"/>
-              </a:defRPr>
-            </a:pPr>
-            <a:r>
-              <a:rPr sz="1100" b="0">
-                <a:solidFill>
-                  <a:srgbClr val="5F6F63"/>
-                </a:solidFill>
-                <a:latin typeface="Roboto"/>
-              </a:rPr>
-              <a:t>December 42¢</a:t>
-            </a:r>
-          </a:p>
-        </p:txBody>
-      </p:sp>
-      <p:sp>
-        <p:nvSpPr>
-          <p:cNvPr id="9" name="Rectangle 8"/>
-          <p:cNvSpPr/>
-          <p:nvPr/>
-        </p:nvSpPr>
-        <p:spPr>
-          <a:xfrm>
-            <a:off x="6233007" y="1645920"/>
-            <a:ext cx="5501487" cy="2011680"/>
-          </a:xfrm>
-          <a:prstGeom prst="rect">
-            <a:avLst/>
-          </a:prstGeom>
-          <a:solidFill>
-            <a:srgbClr val="F7FAF7"/>
-          </a:solidFill>
-          <a:ln>
-            <a:solidFill>
-              <a:srgbClr val="DCE8DC"/>
-            </a:solidFill>
-          </a:ln>
-        </p:spPr>
-        <p:style>
-          <a:lnRef idx="1">
-            <a:schemeClr val="accent1"/>
-          </a:lnRef>
-          <a:fillRef idx="3">
-            <a:schemeClr val="accent1"/>
-          </a:fillRef>
-          <a:effectRef idx="2">
-            <a:schemeClr val="accent1"/>
-          </a:effectRef>
-          <a:fontRef idx="minor">
-            <a:schemeClr val="lt1"/>
-          </a:fontRef>
-        </p:style>
-        <p:txBody>
-          <a:bodyPr rtlCol="0" anchor="ctr"/>
-          <a:lstStyle/>
-          <a:p>
-            <a:pPr algn="ctr">
-              <a:defRPr>
-                <a:latin typeface="Roboto"/>
-              </a:defRPr>
-            </a:pPr>
-          </a:p>
-        </p:txBody>
-      </p:sp>
-      <p:sp>
-        <p:nvSpPr>
-          <p:cNvPr id="10" name="TextBox 9"/>
-          <p:cNvSpPr txBox="1"/>
-          <p:nvPr/>
-        </p:nvSpPr>
-        <p:spPr>
-          <a:xfrm>
-            <a:off x="6415887" y="1783080"/>
-            <a:ext cx="5135727" cy="457200"/>
-          </a:xfrm>
-          <a:prstGeom prst="rect">
-            <a:avLst/>
-          </a:prstGeom>
-          <a:noFill/>
-        </p:spPr>
-        <p:txBody>
-          <a:bodyPr wrap="square">
-            <a:spAutoFit/>
-          </a:bodyPr>
-          <a:lstStyle/>
-          <a:p>
-            <a:pPr>
-              <a:defRPr>
-                <a:latin typeface="Roboto"/>
-              </a:defRPr>
-            </a:pPr>
-            <a:r>
-              <a:rPr sz="1200" b="0">
-                <a:solidFill>
-                  <a:srgbClr val="5F6F63"/>
-                </a:solidFill>
-                <a:latin typeface="Roboto"/>
-              </a:rPr>
-              <a:t>Year to date (Jul to Jan 2026)</a:t>
-            </a:r>
-          </a:p>
-        </p:txBody>
-      </p:sp>
-      <p:sp>
-        <p:nvSpPr>
-          <p:cNvPr id="11" name="TextBox 10"/>
-          <p:cNvSpPr txBox="1"/>
-          <p:nvPr/>
-        </p:nvSpPr>
-        <p:spPr>
-          <a:xfrm>
-            <a:off x="6415887" y="2240280"/>
-            <a:ext cx="5135727" cy="731520"/>
-          </a:xfrm>
-          <a:prstGeom prst="rect">
-            <a:avLst/>
-          </a:prstGeom>
-          <a:noFill/>
-        </p:spPr>
-        <p:txBody>
-          <a:bodyPr wrap="square">
-            <a:spAutoFit/>
-          </a:bodyPr>
-          <a:lstStyle/>
-          <a:p>
-            <a:pPr>
-              <a:defRPr>
-                <a:latin typeface="Roboto"/>
-              </a:defRPr>
-            </a:pPr>
-            <a:r>
-              <a:rPr sz="3000" b="1">
-                <a:solidFill>
-                  <a:srgbClr val="2F7A5D"/>
-                </a:solidFill>
-                <a:latin typeface="Roboto"/>
-              </a:rPr>
-              <a:t>41¢</a:t>
-            </a:r>
-          </a:p>
-        </p:txBody>
-      </p:sp>
-      <p:sp>
-        <p:nvSpPr>
-          <p:cNvPr id="12" name="TextBox 11"/>
-          <p:cNvSpPr txBox="1"/>
-          <p:nvPr/>
-        </p:nvSpPr>
-        <p:spPr>
-          <a:xfrm>
-            <a:off x="6415887" y="3017520"/>
-            <a:ext cx="5135727" cy="548640"/>
-          </a:xfrm>
-          <a:prstGeom prst="rect">
-            <a:avLst/>
-          </a:prstGeom>
-          <a:noFill/>
-        </p:spPr>
-        <p:txBody>
-          <a:bodyPr wrap="square">
-            <a:spAutoFit/>
-          </a:bodyPr>
-          <a:lstStyle/>
-          <a:p>
-            <a:pPr>
-              <a:defRPr>
-                <a:latin typeface="Roboto"/>
-              </a:defRPr>
-            </a:pPr>
-            <a:r>
-              <a:rPr sz="1100" b="0">
-                <a:solidFill>
-                  <a:srgbClr val="5F6F63"/>
-                </a:solidFill>
-                <a:latin typeface="Roboto"/>
-              </a:rPr>
-              <a:t>same period last year: not in the data</a:t>
-            </a:r>
-          </a:p>
-        </p:txBody>
-      </p:sp>
-      <p:sp>
-        <p:nvSpPr>
-          <p:cNvPr id="13" name="TextBox 12"/>
-          <p:cNvSpPr txBox="1"/>
-          <p:nvPr/>
-        </p:nvSpPr>
-        <p:spPr>
-          <a:xfrm>
-            <a:off x="457200" y="6492240"/>
-            <a:ext cx="3657600" cy="274320"/>
-          </a:xfrm>
-          <a:prstGeom prst="rect">
-            <a:avLst/>
-          </a:prstGeom>
-          <a:noFill/>
-        </p:spPr>
-        <p:txBody>
-          <a:bodyPr wrap="square">
-            <a:spAutoFit/>
-          </a:bodyPr>
-          <a:lstStyle/>
-          <a:p>
-            <a:pPr>
-              <a:defRPr>
-                <a:latin typeface="Roboto"/>
-              </a:defRPr>
-            </a:pPr>
-            <a:r>
-              <a:rPr sz="900" b="0">
-                <a:solidFill>
-                  <a:srgbClr val="5F6F63"/>
-                </a:solidFill>
-                <a:latin typeface="Roboto"/>
-              </a:rPr>
-              <a:t>cost-to-raise.pptx</a:t>
-            </a:r>
-          </a:p>
-        </p:txBody>
-      </p:sp>
-      <p:sp>
-        <p:nvSpPr>
-          <p:cNvPr id="14" name="TextBox 13"/>
-          <p:cNvSpPr txBox="1"/>
-          <p:nvPr/>
-        </p:nvSpPr>
-        <p:spPr>
-          <a:xfrm>
-            <a:off x="4297680" y="6492240"/>
-            <a:ext cx="3657600" cy="274320"/>
-          </a:xfrm>
-          <a:prstGeom prst="rect">
-            <a:avLst/>
-          </a:prstGeom>
-          <a:noFill/>
-        </p:spPr>
-        <p:txBody>
-          <a:bodyPr wrap="square">
-            <a:spAutoFit/>
-          </a:bodyPr>
-          <a:lstStyle/>
-          <a:p>
-            <a:pPr algn="ctr">
-              <a:defRPr>
-                <a:latin typeface="Roboto"/>
-              </a:defRPr>
-            </a:pPr>
-            <a:r>
-              <a:rPr sz="900" b="0">
-                <a:solidFill>
-                  <a:srgbClr val="5F6F63"/>
-                </a:solidFill>
-                <a:latin typeface="Roboto"/>
-              </a:rPr>
-              <a:t>Data retrieved 2pm, Tue 6 Oct 2026 · Sample data</a:t>
-            </a:r>
-          </a:p>
-        </p:txBody>
-      </p:sp>
-      <p:sp>
-        <p:nvSpPr>
-          <p:cNvPr id="15" name="TextBox 14"/>
-          <p:cNvSpPr txBox="1"/>
-          <p:nvPr/>
-        </p:nvSpPr>
-        <p:spPr>
-          <a:xfrm>
-            <a:off x="8503920" y="6492240"/>
-            <a:ext cx="3200400" cy="274320"/>
-          </a:xfrm>
-          <a:prstGeom prst="rect">
-            <a:avLst/>
-          </a:prstGeom>
-          <a:noFill/>
-        </p:spPr>
-        <p:txBody>
-          <a:bodyPr wrap="square">
-            <a:spAutoFit/>
-          </a:bodyPr>
-          <a:lstStyle/>
-          <a:p>
-            <a:pPr algn="r">
-              <a:defRPr>
-                <a:latin typeface="Roboto"/>
-              </a:defRPr>
-            </a:pPr>
-            <a:r>
-              <a:rPr sz="900" b="0">
-                <a:solidFill>
-                  <a:srgbClr val="5F6F63"/>
-                </a:solidFill>
-                <a:latin typeface="Roboto"/>
-              </a:rPr>
-              <a:t>Slide 9 of 11</a:t>
+              <a:t>Slide 5 of 5</a:t>
             </a:r>
           </a:p>
         </p:txBody>
@@ -8987,6 +8742,326 @@
 </file>
 
 <file path=ppt/theme/theme1.xml><?xml version="1.0" encoding="utf-8"?>
+<a:theme xmlns:a="http://schemas.openxmlformats.org/drawingml/2006/main" name="Office Theme">
+  <a:themeElements>
+    <a:clrScheme name="Office">
+      <a:dk1>
+        <a:sysClr val="windowText" lastClr="000000"/>
+      </a:dk1>
+      <a:lt1>
+        <a:sysClr val="window" lastClr="FFFFFF"/>
+      </a:lt1>
+      <a:dk2>
+        <a:srgbClr val="25342A"/>
+      </a:dk2>
+      <a:lt2>
+        <a:srgbClr val="F4F7F2"/>
+      </a:lt2>
+      <a:accent1>
+        <a:srgbClr val="2F7A5D"/>
+      </a:accent1>
+      <a:accent2>
+        <a:srgbClr val="0E9F6E"/>
+      </a:accent2>
+      <a:accent3>
+        <a:srgbClr val="7D8790"/>
+      </a:accent3>
+      <a:accent4>
+        <a:srgbClr val="8A6D3B"/>
+      </a:accent4>
+      <a:accent5>
+        <a:srgbClr val="B42318"/>
+      </a:accent5>
+      <a:accent6>
+        <a:srgbClr val="8E9CAB"/>
+      </a:accent6>
+      <a:hlink>
+        <a:srgbClr val="0000FF"/>
+      </a:hlink>
+      <a:folHlink>
+        <a:srgbClr val="800080"/>
+      </a:folHlink>
+    </a:clrScheme>
+    <a:fontScheme name="Office">
+      <a:majorFont>
+        <a:latin typeface="Roboto"/>
+        <a:ea typeface=""/>
+        <a:cs typeface=""/>
+        <a:font script="Jpan" typeface="ＭＳ Ｐゴシック"/>
+        <a:font script="Hang" typeface="맑은 고딕"/>
+        <a:font script="Hans" typeface="宋体"/>
+        <a:font script="Hant" typeface="新細明體"/>
+        <a:font script="Arab" typeface="Times New Roman"/>
+        <a:font script="Hebr" typeface="Times New Roman"/>
+        <a:font script="Thai" typeface="Angsana New"/>
+        <a:font script="Ethi" typeface="Nyala"/>
+        <a:font script="Beng" typeface="Vrinda"/>
+        <a:font script="Gujr" typeface="Shruti"/>
+        <a:font script="Khmr" typeface="MoolBoran"/>
+        <a:font script="Knda" typeface="Tunga"/>
+        <a:font script="Guru" typeface="Raavi"/>
+        <a:font script="Cans" typeface="Euphemia"/>
+        <a:font script="Cher" typeface="Plantagenet Cherokee"/>
+        <a:font script="Yiii" typeface="Microsoft Yi Baiti"/>
+        <a:font script="Tibt" typeface="Microsoft Himalaya"/>
+        <a:font script="Thaa" typeface="MV Boli"/>
+        <a:font script="Deva" typeface="Mangal"/>
+        <a:font script="Telu" typeface="Gautami"/>
+        <a:font script="Taml" typeface="Latha"/>
+        <a:font script="Syrc" typeface="Estrangelo Edessa"/>
+        <a:font script="Orya" typeface="Kalinga"/>
+        <a:font script="Mlym" typeface="Kartika"/>
+        <a:font script="Laoo" typeface="DokChampa"/>
+        <a:font script="Sinh" typeface="Iskoola Pota"/>
+        <a:font script="Mong" typeface="Mongolian Baiti"/>
+        <a:font script="Viet" typeface="Times New Roman"/>
+        <a:font script="Uigh" typeface="Microsoft Uighur"/>
+        <a:font script="Geor" typeface="Sylfaen"/>
+      </a:majorFont>
+      <a:minorFont>
+        <a:latin typeface="Roboto"/>
+        <a:ea typeface=""/>
+        <a:cs typeface=""/>
+        <a:font script="Jpan" typeface="ＭＳ Ｐゴシック"/>
+        <a:font script="Hang" typeface="맑은 고딕"/>
+        <a:font script="Hans" typeface="宋体"/>
+        <a:font script="Hant" typeface="新細明體"/>
+        <a:font script="Arab" typeface="Arial"/>
+        <a:font script="Hebr" typeface="Arial"/>
+        <a:font script="Thai" typeface="Cordia New"/>
+        <a:font script="Ethi" typeface="Nyala"/>
+        <a:font script="Beng" typeface="Vrinda"/>
+        <a:font script="Gujr" typeface="Shruti"/>
+        <a:font script="Khmr" typeface="DaunPenh"/>
+        <a:font script="Knda" typeface="Tunga"/>
+        <a:font script="Guru" typeface="Raavi"/>
+        <a:font script="Cans" typeface="Euphemia"/>
+        <a:font script="Cher" typeface="Plantagenet Cherokee"/>
+        <a:font script="Yiii" typeface="Microsoft Yi Baiti"/>
+        <a:font script="Tibt" typeface="Microsoft Himalaya"/>
+        <a:font script="Thaa" typeface="MV Boli"/>
+        <a:font script="Deva" typeface="Mangal"/>
+        <a:font script="Telu" typeface="Gautami"/>
+        <a:font script="Taml" typeface="Latha"/>
+        <a:font script="Syrc" typeface="Estrangelo Edessa"/>
+        <a:font script="Orya" typeface="Kalinga"/>
+        <a:font script="Mlym" typeface="Kartika"/>
+        <a:font script="Laoo" typeface="DokChampa"/>
+        <a:font script="Sinh" typeface="Iskoola Pota"/>
+        <a:font script="Mong" typeface="Mongolian Baiti"/>
+        <a:font script="Viet" typeface="Arial"/>
+        <a:font script="Uigh" typeface="Microsoft Uighur"/>
+        <a:font script="Geor" typeface="Sylfaen"/>
+      </a:minorFont>
+    </a:fontScheme>
+    <a:fmtScheme name="Office">
+      <a:fillStyleLst>
+        <a:solidFill>
+          <a:schemeClr val="phClr"/>
+        </a:solidFill>
+        <a:gradFill rotWithShape="1">
+          <a:gsLst>
+            <a:gs pos="0">
+              <a:schemeClr val="phClr">
+                <a:tint val="50000"/>
+                <a:satMod val="300000"/>
+              </a:schemeClr>
+            </a:gs>
+            <a:gs pos="35000">
+              <a:schemeClr val="phClr">
+                <a:tint val="37000"/>
+                <a:satMod val="300000"/>
+              </a:schemeClr>
+            </a:gs>
+            <a:gs pos="100000">
+              <a:schemeClr val="phClr">
+                <a:tint val="15000"/>
+                <a:satMod val="350000"/>
+              </a:schemeClr>
+            </a:gs>
+          </a:gsLst>
+          <a:lin ang="16200000" scaled="1"/>
+        </a:gradFill>
+        <a:gradFill rotWithShape="1">
+          <a:gsLst>
+            <a:gs pos="0">
+              <a:schemeClr val="phClr">
+                <a:tint val="100000"/>
+                <a:shade val="100000"/>
+                <a:satMod val="130000"/>
+              </a:schemeClr>
+            </a:gs>
+            <a:gs pos="100000">
+              <a:schemeClr val="phClr">
+                <a:tint val="50000"/>
+                <a:shade val="100000"/>
+                <a:satMod val="350000"/>
+              </a:schemeClr>
+            </a:gs>
+          </a:gsLst>
+          <a:lin ang="16200000" scaled="0"/>
+        </a:gradFill>
+      </a:fillStyleLst>
+      <a:lnStyleLst>
+        <a:ln w="9525" cap="flat" cmpd="sng" algn="ctr">
+          <a:solidFill>
+            <a:schemeClr val="phClr">
+              <a:shade val="95000"/>
+              <a:satMod val="105000"/>
+            </a:schemeClr>
+          </a:solidFill>
+          <a:prstDash val="solid"/>
+        </a:ln>
+        <a:ln w="25400" cap="flat" cmpd="sng" algn="ctr">
+          <a:solidFill>
+            <a:schemeClr val="phClr"/>
+          </a:solidFill>
+          <a:prstDash val="solid"/>
+        </a:ln>
+        <a:ln w="38100" cap="flat" cmpd="sng" algn="ctr">
+          <a:solidFill>
+            <a:schemeClr val="phClr"/>
+          </a:solidFill>
+          <a:prstDash val="solid"/>
+        </a:ln>
+      </a:lnStyleLst>
+      <a:effectStyleLst>
+        <a:effectStyle>
+          <a:effectLst>
+            <a:outerShdw blurRad="40000" dist="20000" dir="5400000" rotWithShape="0">
+              <a:srgbClr val="000000">
+                <a:alpha val="38000"/>
+              </a:srgbClr>
+            </a:outerShdw>
+          </a:effectLst>
+        </a:effectStyle>
+        <a:effectStyle>
+          <a:effectLst>
+            <a:outerShdw blurRad="40000" dist="23000" dir="5400000" rotWithShape="0">
+              <a:srgbClr val="000000">
+                <a:alpha val="35000"/>
+              </a:srgbClr>
+            </a:outerShdw>
+          </a:effectLst>
+        </a:effectStyle>
+        <a:effectStyle>
+          <a:effectLst>
+            <a:outerShdw blurRad="40000" dist="23000" dir="5400000" rotWithShape="0">
+              <a:srgbClr val="000000">
+                <a:alpha val="35000"/>
+              </a:srgbClr>
+            </a:outerShdw>
+          </a:effectLst>
+          <a:scene3d>
+            <a:camera prst="orthographicFront">
+              <a:rot lat="0" lon="0" rev="0"/>
+            </a:camera>
+            <a:lightRig rig="threePt" dir="t">
+              <a:rot lat="0" lon="0" rev="1200000"/>
+            </a:lightRig>
+          </a:scene3d>
+          <a:sp3d>
+            <a:bevelT w="63500" h="25400"/>
+          </a:sp3d>
+        </a:effectStyle>
+      </a:effectStyleLst>
+      <a:bgFillStyleLst>
+        <a:solidFill>
+          <a:schemeClr val="phClr"/>
+        </a:solidFill>
+        <a:gradFill rotWithShape="1">
+          <a:gsLst>
+            <a:gs pos="0">
+              <a:schemeClr val="phClr">
+                <a:tint val="40000"/>
+                <a:satMod val="350000"/>
+              </a:schemeClr>
+            </a:gs>
+            <a:gs pos="40000">
+              <a:schemeClr val="phClr">
+                <a:tint val="45000"/>
+                <a:shade val="99000"/>
+                <a:satMod val="350000"/>
+              </a:schemeClr>
+            </a:gs>
+            <a:gs pos="100000">
+              <a:schemeClr val="phClr">
+                <a:shade val="20000"/>
+                <a:satMod val="255000"/>
+              </a:schemeClr>
+            </a:gs>
+          </a:gsLst>
+          <a:path path="circle">
+            <a:fillToRect l="50000" t="-80000" r="50000" b="180000"/>
+          </a:path>
+        </a:gradFill>
+        <a:gradFill rotWithShape="1">
+          <a:gsLst>
+            <a:gs pos="0">
+              <a:schemeClr val="phClr">
+                <a:tint val="80000"/>
+                <a:satMod val="300000"/>
+              </a:schemeClr>
+            </a:gs>
+            <a:gs pos="100000">
+              <a:schemeClr val="phClr">
+                <a:shade val="30000"/>
+                <a:satMod val="200000"/>
+              </a:schemeClr>
+            </a:gs>
+          </a:gsLst>
+          <a:path path="circle">
+            <a:fillToRect l="50000" t="50000" r="50000" b="50000"/>
+          </a:path>
+        </a:gradFill>
+      </a:bgFillStyleLst>
+    </a:fmtScheme>
+  </a:themeElements>
+  <a:objectDefaults>
+    <a:spDef>
+      <a:spPr/>
+      <a:bodyPr/>
+      <a:lstStyle/>
+      <a:style>
+        <a:lnRef idx="1">
+          <a:schemeClr val="accent1"/>
+        </a:lnRef>
+        <a:fillRef idx="3">
+          <a:schemeClr val="accent1"/>
+        </a:fillRef>
+        <a:effectRef idx="2">
+          <a:schemeClr val="accent1"/>
+        </a:effectRef>
+        <a:fontRef idx="minor">
+          <a:schemeClr val="lt1"/>
+        </a:fontRef>
+      </a:style>
+    </a:spDef>
+    <a:lnDef>
+      <a:spPr/>
+      <a:bodyPr/>
+      <a:lstStyle/>
+      <a:style>
+        <a:lnRef idx="2">
+          <a:schemeClr val="accent1"/>
+        </a:lnRef>
+        <a:fillRef idx="0">
+          <a:schemeClr val="accent1"/>
+        </a:fillRef>
+        <a:effectRef idx="1">
+          <a:schemeClr val="accent1"/>
+        </a:effectRef>
+        <a:fontRef idx="minor">
+          <a:schemeClr val="tx1"/>
+        </a:fontRef>
+      </a:style>
+    </a:lnDef>
+  </a:objectDefaults>
+  <a:extraClrSchemeLst/>
+</a:theme>
+</file>
+
+<file path=ppt/theme/theme2.xml><?xml version="1.0" encoding="utf-8"?>
 <a:theme xmlns:a="http://schemas.openxmlformats.org/drawingml/2006/main" name="Office Theme">
   <a:themeElements>
     <a:clrScheme name="Office">

--- a/media/exports/reports/2026-01/cost-to-raise.pptx
+++ b/media/exports/reports/2026-01/cost-to-raise.pptx
@@ -1390,7 +1390,7 @@
           <a:lstStyle/>
           <a:p>
             <a:r>
-              <a:t>What does it cost to raise a dollar?. Sample Community Services Ltd. Period: January 2026. What fundraising costs (grant writing, donor campaigns, events) for every dollar it brings in. Pick a source and every number, chart and note follows it.</a:t>
+              <a:t>What does it cost to raise a dollar?. Sample Community Services Ltd. Period: January 2026. In short: Each dollar raised cost 13¢ in January, and 14¢ a dollar this financial year to date. What fundraising costs (grant writing, donor campaigns, events) for every dollar it brings in. Pick a source and every number, chart and note follows it.</a:t>
             </a:r>
           </a:p>
         </p:txBody>
@@ -4895,7 +4895,7 @@
         <p:spPr>
           <a:xfrm>
             <a:off x="457200" y="3703320"/>
-            <a:ext cx="11277295" cy="535940"/>
+            <a:ext cx="11277295" cy="758190"/>
           </a:xfrm>
           <a:prstGeom prst="rect">
             <a:avLst/>
@@ -4920,7 +4920,7 @@
                 </a:solidFill>
                 <a:latin typeface="Roboto"/>
               </a:rPr>
-              <a:t>Period: January 2026. What fundraising costs (grant writing, donor campaigns, events) for every dollar it brings in. Pick a source and every number, chart and note follows it.</a:t>
+              <a:t>Period: January 2026. In short: Each dollar raised cost 13¢ in January, and 14¢ a dollar this financial year to date. What fundraising costs (grant writing, donor campaigns, events) for every dollar it brings in. Pick a source and every number, chart and note follows it.</a:t>
             </a:r>
           </a:p>
         </p:txBody>
@@ -4933,7 +4933,7 @@
         </p:nvSpPr>
         <p:spPr>
           <a:xfrm>
-            <a:off x="457200" y="4330700"/>
+            <a:off x="457200" y="4552950"/>
             <a:ext cx="11277295" cy="1097280"/>
           </a:xfrm>
           <a:prstGeom prst="rect">
@@ -5085,7 +5085,7 @@
                 </a:solidFill>
                 <a:latin typeface="Roboto"/>
               </a:rPr>
-              <a:t>Data retrieved 2pm, Tue 6 Oct 2026 · Generated 8 Oct 2026, 9:35am · Sample data · Made with Python (python-pptx)</a:t>
+              <a:t>Data retrieved 2pm, Tue 6 Oct 2026 · Generated 10 Oct 2026, 9:55pm · Sample data · Made with Python (python-pptx)</a:t>
             </a:r>
           </a:p>
         </p:txBody>
@@ -5986,7 +5986,7 @@
                 </a:solidFill>
                 <a:latin typeface="Roboto"/>
               </a:rPr>
-              <a:t>Data retrieved 2pm, Tue 6 Oct 2026 · Generated 8 Oct 2026, 9:35am · Sample data · Made with Python (python-pptx)</a:t>
+              <a:t>Data retrieved 2pm, Tue 6 Oct 2026 · Generated 10 Oct 2026, 9:55pm · Sample data · Made with Python (python-pptx)</a:t>
             </a:r>
           </a:p>
         </p:txBody>
@@ -6887,7 +6887,7 @@
                 </a:solidFill>
                 <a:latin typeface="Roboto"/>
               </a:rPr>
-              <a:t>Data retrieved 2pm, Tue 6 Oct 2026 · Generated 8 Oct 2026, 9:35am · Sample data · Made with Python (python-pptx)</a:t>
+              <a:t>Data retrieved 2pm, Tue 6 Oct 2026 · Generated 10 Oct 2026, 9:55pm · Sample data · Made with Python (python-pptx)</a:t>
             </a:r>
           </a:p>
         </p:txBody>
@@ -7788,7 +7788,7 @@
                 </a:solidFill>
                 <a:latin typeface="Roboto"/>
               </a:rPr>
-              <a:t>Data retrieved 2pm, Tue 6 Oct 2026 · Generated 8 Oct 2026, 9:35am · Sample data · Made with Python (python-pptx)</a:t>
+              <a:t>Data retrieved 2pm, Tue 6 Oct 2026 · Generated 10 Oct 2026, 9:55pm · Sample data · Made with Python (python-pptx)</a:t>
             </a:r>
           </a:p>
         </p:txBody>
@@ -8689,7 +8689,7 @@
                 </a:solidFill>
                 <a:latin typeface="Roboto"/>
               </a:rPr>
-              <a:t>Data retrieved 2pm, Tue 6 Oct 2026 · Generated 8 Oct 2026, 9:35am · Sample data · Made with Python (python-pptx)</a:t>
+              <a:t>Data retrieved 2pm, Tue 6 Oct 2026 · Generated 10 Oct 2026, 9:55pm · Sample data · Made with Python (python-pptx)</a:t>
             </a:r>
           </a:p>
         </p:txBody>
